--- a/figures/fig_method_framework.pptx
+++ b/figures/fig_method_framework.pptx
@@ -1,11 +1,11 @@
 
 <file path=ppt/presentation.xml><?xml version="1.0" encoding="utf-8"?>
-<p:presentation xmlns:a="http://schemas.openxmlformats.org/drawingml/2006/main" xmlns:r="http://schemas.openxmlformats.org/officeDocument/2006/relationships" xmlns:p="http://schemas.openxmlformats.org/presentationml/2006/main" autoCompressPictures="0">
+<p:presentation xmlns:a="http://schemas.openxmlformats.org/drawingml/2006/main" xmlns:r="http://schemas.openxmlformats.org/officeDocument/2006/relationships" xmlns:p="http://schemas.openxmlformats.org/presentationml/2006/main" saveSubsetFonts="1" autoCompressPictures="0">
   <p:sldMasterIdLst>
     <p:sldMasterId id="2147483648" r:id="rId1"/>
   </p:sldMasterIdLst>
   <p:sldIdLst>
-    <p:sldId id="256" r:id="rId3"/>
+    <p:sldId id="256" r:id="rId7"/>
   </p:sldIdLst>
   <p:sldSz cx="13167360" cy="8229600" type="screen4x3"/>
   <p:notesSz cx="6858000" cy="9144000"/>
@@ -104,22 +104,6 @@
       </a:defRPr>
     </a:lvl9pPr>
   </p:defaultTextStyle>
-  <p:extLst>
-    <p:ext uri="{EFAFB233-063F-42B5-8137-9DF3F51BA10A}">
-      <p15:sldGuideLst xmlns:p15="http://schemas.microsoft.com/office/powerpoint/2012/main">
-        <p15:guide id="1" orient="horz" pos="2160" userDrawn="1">
-          <p15:clr>
-            <a:srgbClr val="A4A3A4"/>
-          </p15:clr>
-        </p15:guide>
-        <p15:guide id="2" pos="2880" userDrawn="1">
-          <p15:clr>
-            <a:srgbClr val="A4A3A4"/>
-          </p15:clr>
-        </p15:guide>
-      </p15:sldGuideLst>
-    </p:ext>
-  </p:extLst>
 </p:presentation>
 </file>
 
@@ -304,6 +288,7 @@
           <a:p>
             <a:fld id="{5BCAD085-E8A6-8845-BD4E-CB4CCA059FC4}" type="datetimeFigureOut">
               <a:rPr lang="en-US" smtClean="0"/>
+              <a:t>1/27/13</a:t>
             </a:fld>
             <a:endParaRPr lang="en-US"/>
           </a:p>
@@ -345,12 +330,18 @@
           <a:p>
             <a:fld id="{C1FF6DA9-008F-8B48-92A6-B652298478BF}" type="slidenum">
               <a:rPr lang="en-US" smtClean="0"/>
+              <a:t>‹#›</a:t>
             </a:fld>
             <a:endParaRPr lang="en-US"/>
           </a:p>
         </p:txBody>
       </p:sp>
     </p:spTree>
+    <p:extLst>
+      <p:ext uri="{BB962C8B-B14F-4D97-AF65-F5344CB8AC3E}">
+        <p14:creationId xmlns:p14="http://schemas.microsoft.com/office/powerpoint/2010/main" val="3168075583"/>
+      </p:ext>
+    </p:extLst>
   </p:cSld>
   <p:clrMapOvr>
     <a:masterClrMapping/>
@@ -418,7 +409,6 @@
               <a:rPr lang="en-US" smtClean="0"/>
               <a:t>Click to edit Master text styles</a:t>
             </a:r>
-            <a:endParaRPr lang="en-US" smtClean="0"/>
           </a:p>
           <a:p>
             <a:pPr lvl="1"/>
@@ -426,7 +416,6 @@
               <a:rPr lang="en-US" smtClean="0"/>
               <a:t>Second level</a:t>
             </a:r>
-            <a:endParaRPr lang="en-US" smtClean="0"/>
           </a:p>
           <a:p>
             <a:pPr lvl="2"/>
@@ -434,7 +423,6 @@
               <a:rPr lang="en-US" smtClean="0"/>
               <a:t>Third level</a:t>
             </a:r>
-            <a:endParaRPr lang="en-US" smtClean="0"/>
           </a:p>
           <a:p>
             <a:pPr lvl="3"/>
@@ -442,7 +430,6 @@
               <a:rPr lang="en-US" smtClean="0"/>
               <a:t>Fourth level</a:t>
             </a:r>
-            <a:endParaRPr lang="en-US" smtClean="0"/>
           </a:p>
           <a:p>
             <a:pPr lvl="4"/>
@@ -471,6 +458,7 @@
           <a:p>
             <a:fld id="{5BCAD085-E8A6-8845-BD4E-CB4CCA059FC4}" type="datetimeFigureOut">
               <a:rPr lang="en-US" smtClean="0"/>
+              <a:t>1/27/13</a:t>
             </a:fld>
             <a:endParaRPr lang="en-US"/>
           </a:p>
@@ -512,12 +500,18 @@
           <a:p>
             <a:fld id="{C1FF6DA9-008F-8B48-92A6-B652298478BF}" type="slidenum">
               <a:rPr lang="en-US" smtClean="0"/>
+              <a:t>‹#›</a:t>
             </a:fld>
             <a:endParaRPr lang="en-US"/>
           </a:p>
         </p:txBody>
       </p:sp>
     </p:spTree>
+    <p:extLst>
+      <p:ext uri="{BB962C8B-B14F-4D97-AF65-F5344CB8AC3E}">
+        <p14:creationId xmlns:p14="http://schemas.microsoft.com/office/powerpoint/2010/main" val="2910927964"/>
+      </p:ext>
+    </p:extLst>
   </p:cSld>
   <p:clrMapOvr>
     <a:masterClrMapping/>
@@ -595,7 +589,6 @@
               <a:rPr lang="en-US" smtClean="0"/>
               <a:t>Click to edit Master text styles</a:t>
             </a:r>
-            <a:endParaRPr lang="en-US" smtClean="0"/>
           </a:p>
           <a:p>
             <a:pPr lvl="1"/>
@@ -603,7 +596,6 @@
               <a:rPr lang="en-US" smtClean="0"/>
               <a:t>Second level</a:t>
             </a:r>
-            <a:endParaRPr lang="en-US" smtClean="0"/>
           </a:p>
           <a:p>
             <a:pPr lvl="2"/>
@@ -611,7 +603,6 @@
               <a:rPr lang="en-US" smtClean="0"/>
               <a:t>Third level</a:t>
             </a:r>
-            <a:endParaRPr lang="en-US" smtClean="0"/>
           </a:p>
           <a:p>
             <a:pPr lvl="3"/>
@@ -619,7 +610,6 @@
               <a:rPr lang="en-US" smtClean="0"/>
               <a:t>Fourth level</a:t>
             </a:r>
-            <a:endParaRPr lang="en-US" smtClean="0"/>
           </a:p>
           <a:p>
             <a:pPr lvl="4"/>
@@ -648,6 +638,7 @@
           <a:p>
             <a:fld id="{5BCAD085-E8A6-8845-BD4E-CB4CCA059FC4}" type="datetimeFigureOut">
               <a:rPr lang="en-US" smtClean="0"/>
+              <a:t>1/27/13</a:t>
             </a:fld>
             <a:endParaRPr lang="en-US"/>
           </a:p>
@@ -689,12 +680,18 @@
           <a:p>
             <a:fld id="{C1FF6DA9-008F-8B48-92A6-B652298478BF}" type="slidenum">
               <a:rPr lang="en-US" smtClean="0"/>
+              <a:t>‹#›</a:t>
             </a:fld>
             <a:endParaRPr lang="en-US"/>
           </a:p>
         </p:txBody>
       </p:sp>
     </p:spTree>
+    <p:extLst>
+      <p:ext uri="{BB962C8B-B14F-4D97-AF65-F5344CB8AC3E}">
+        <p14:creationId xmlns:p14="http://schemas.microsoft.com/office/powerpoint/2010/main" val="3612223792"/>
+      </p:ext>
+    </p:extLst>
   </p:cSld>
   <p:clrMapOvr>
     <a:masterClrMapping/>
@@ -762,7 +759,6 @@
               <a:rPr lang="en-US" smtClean="0"/>
               <a:t>Click to edit Master text styles</a:t>
             </a:r>
-            <a:endParaRPr lang="en-US" smtClean="0"/>
           </a:p>
           <a:p>
             <a:pPr lvl="1"/>
@@ -770,7 +766,6 @@
               <a:rPr lang="en-US" smtClean="0"/>
               <a:t>Second level</a:t>
             </a:r>
-            <a:endParaRPr lang="en-US" smtClean="0"/>
           </a:p>
           <a:p>
             <a:pPr lvl="2"/>
@@ -778,7 +773,6 @@
               <a:rPr lang="en-US" smtClean="0"/>
               <a:t>Third level</a:t>
             </a:r>
-            <a:endParaRPr lang="en-US" smtClean="0"/>
           </a:p>
           <a:p>
             <a:pPr lvl="3"/>
@@ -786,7 +780,6 @@
               <a:rPr lang="en-US" smtClean="0"/>
               <a:t>Fourth level</a:t>
             </a:r>
-            <a:endParaRPr lang="en-US" smtClean="0"/>
           </a:p>
           <a:p>
             <a:pPr lvl="4"/>
@@ -815,6 +808,7 @@
           <a:p>
             <a:fld id="{5BCAD085-E8A6-8845-BD4E-CB4CCA059FC4}" type="datetimeFigureOut">
               <a:rPr lang="en-US" smtClean="0"/>
+              <a:t>1/27/13</a:t>
             </a:fld>
             <a:endParaRPr lang="en-US"/>
           </a:p>
@@ -856,12 +850,18 @@
           <a:p>
             <a:fld id="{C1FF6DA9-008F-8B48-92A6-B652298478BF}" type="slidenum">
               <a:rPr lang="en-US" smtClean="0"/>
+              <a:t>‹#›</a:t>
             </a:fld>
             <a:endParaRPr lang="en-US"/>
           </a:p>
         </p:txBody>
       </p:sp>
     </p:spTree>
+    <p:extLst>
+      <p:ext uri="{BB962C8B-B14F-4D97-AF65-F5344CB8AC3E}">
+        <p14:creationId xmlns:p14="http://schemas.microsoft.com/office/powerpoint/2010/main" val="2614314258"/>
+      </p:ext>
+    </p:extLst>
   </p:cSld>
   <p:clrMapOvr>
     <a:masterClrMapping/>
@@ -1034,7 +1034,6 @@
               <a:rPr lang="en-US" smtClean="0"/>
               <a:t>Click to edit Master text styles</a:t>
             </a:r>
-            <a:endParaRPr lang="en-US" smtClean="0"/>
           </a:p>
         </p:txBody>
       </p:sp>
@@ -1055,6 +1054,7 @@
           <a:p>
             <a:fld id="{5BCAD085-E8A6-8845-BD4E-CB4CCA059FC4}" type="datetimeFigureOut">
               <a:rPr lang="en-US" smtClean="0"/>
+              <a:t>1/27/13</a:t>
             </a:fld>
             <a:endParaRPr lang="en-US"/>
           </a:p>
@@ -1096,12 +1096,18 @@
           <a:p>
             <a:fld id="{C1FF6DA9-008F-8B48-92A6-B652298478BF}" type="slidenum">
               <a:rPr lang="en-US" smtClean="0"/>
+              <a:t>‹#›</a:t>
             </a:fld>
             <a:endParaRPr lang="en-US"/>
           </a:p>
         </p:txBody>
       </p:sp>
     </p:spTree>
+    <p:extLst>
+      <p:ext uri="{BB962C8B-B14F-4D97-AF65-F5344CB8AC3E}">
+        <p14:creationId xmlns:p14="http://schemas.microsoft.com/office/powerpoint/2010/main" val="960648375"/>
+      </p:ext>
+    </p:extLst>
   </p:cSld>
   <p:clrMapOvr>
     <a:masterClrMapping/>
@@ -1202,7 +1208,6 @@
               <a:rPr lang="en-US" smtClean="0"/>
               <a:t>Click to edit Master text styles</a:t>
             </a:r>
-            <a:endParaRPr lang="en-US" smtClean="0"/>
           </a:p>
           <a:p>
             <a:pPr lvl="1"/>
@@ -1210,7 +1215,6 @@
               <a:rPr lang="en-US" smtClean="0"/>
               <a:t>Second level</a:t>
             </a:r>
-            <a:endParaRPr lang="en-US" smtClean="0"/>
           </a:p>
           <a:p>
             <a:pPr lvl="2"/>
@@ -1218,7 +1222,6 @@
               <a:rPr lang="en-US" smtClean="0"/>
               <a:t>Third level</a:t>
             </a:r>
-            <a:endParaRPr lang="en-US" smtClean="0"/>
           </a:p>
           <a:p>
             <a:pPr lvl="3"/>
@@ -1226,7 +1229,6 @@
               <a:rPr lang="en-US" smtClean="0"/>
               <a:t>Fourth level</a:t>
             </a:r>
-            <a:endParaRPr lang="en-US" smtClean="0"/>
           </a:p>
           <a:p>
             <a:pPr lvl="4"/>
@@ -1291,7 +1293,6 @@
               <a:rPr lang="en-US" smtClean="0"/>
               <a:t>Click to edit Master text styles</a:t>
             </a:r>
-            <a:endParaRPr lang="en-US" smtClean="0"/>
           </a:p>
           <a:p>
             <a:pPr lvl="1"/>
@@ -1299,7 +1300,6 @@
               <a:rPr lang="en-US" smtClean="0"/>
               <a:t>Second level</a:t>
             </a:r>
-            <a:endParaRPr lang="en-US" smtClean="0"/>
           </a:p>
           <a:p>
             <a:pPr lvl="2"/>
@@ -1307,7 +1307,6 @@
               <a:rPr lang="en-US" smtClean="0"/>
               <a:t>Third level</a:t>
             </a:r>
-            <a:endParaRPr lang="en-US" smtClean="0"/>
           </a:p>
           <a:p>
             <a:pPr lvl="3"/>
@@ -1315,7 +1314,6 @@
               <a:rPr lang="en-US" smtClean="0"/>
               <a:t>Fourth level</a:t>
             </a:r>
-            <a:endParaRPr lang="en-US" smtClean="0"/>
           </a:p>
           <a:p>
             <a:pPr lvl="4"/>
@@ -1344,6 +1342,7 @@
           <a:p>
             <a:fld id="{5BCAD085-E8A6-8845-BD4E-CB4CCA059FC4}" type="datetimeFigureOut">
               <a:rPr lang="en-US" smtClean="0"/>
+              <a:t>1/27/13</a:t>
             </a:fld>
             <a:endParaRPr lang="en-US"/>
           </a:p>
@@ -1385,12 +1384,18 @@
           <a:p>
             <a:fld id="{C1FF6DA9-008F-8B48-92A6-B652298478BF}" type="slidenum">
               <a:rPr lang="en-US" smtClean="0"/>
+              <a:t>‹#›</a:t>
             </a:fld>
             <a:endParaRPr lang="en-US"/>
           </a:p>
         </p:txBody>
       </p:sp>
     </p:spTree>
+    <p:extLst>
+      <p:ext uri="{BB962C8B-B14F-4D97-AF65-F5344CB8AC3E}">
+        <p14:creationId xmlns:p14="http://schemas.microsoft.com/office/powerpoint/2010/main" val="2782244947"/>
+      </p:ext>
+    </p:extLst>
   </p:cSld>
   <p:clrMapOvr>
     <a:masterClrMapping/>
@@ -1504,7 +1509,6 @@
               <a:rPr lang="en-US" smtClean="0"/>
               <a:t>Click to edit Master text styles</a:t>
             </a:r>
-            <a:endParaRPr lang="en-US" smtClean="0"/>
           </a:p>
         </p:txBody>
       </p:sp>
@@ -1561,7 +1565,6 @@
               <a:rPr lang="en-US" smtClean="0"/>
               <a:t>Click to edit Master text styles</a:t>
             </a:r>
-            <a:endParaRPr lang="en-US" smtClean="0"/>
           </a:p>
           <a:p>
             <a:pPr lvl="1"/>
@@ -1569,7 +1572,6 @@
               <a:rPr lang="en-US" smtClean="0"/>
               <a:t>Second level</a:t>
             </a:r>
-            <a:endParaRPr lang="en-US" smtClean="0"/>
           </a:p>
           <a:p>
             <a:pPr lvl="2"/>
@@ -1577,7 +1579,6 @@
               <a:rPr lang="en-US" smtClean="0"/>
               <a:t>Third level</a:t>
             </a:r>
-            <a:endParaRPr lang="en-US" smtClean="0"/>
           </a:p>
           <a:p>
             <a:pPr lvl="3"/>
@@ -1585,7 +1586,6 @@
               <a:rPr lang="en-US" smtClean="0"/>
               <a:t>Fourth level</a:t>
             </a:r>
-            <a:endParaRPr lang="en-US" smtClean="0"/>
           </a:p>
           <a:p>
             <a:pPr lvl="4"/>
@@ -1659,7 +1659,6 @@
               <a:rPr lang="en-US" smtClean="0"/>
               <a:t>Click to edit Master text styles</a:t>
             </a:r>
-            <a:endParaRPr lang="en-US" smtClean="0"/>
           </a:p>
         </p:txBody>
       </p:sp>
@@ -1716,7 +1715,6 @@
               <a:rPr lang="en-US" smtClean="0"/>
               <a:t>Click to edit Master text styles</a:t>
             </a:r>
-            <a:endParaRPr lang="en-US" smtClean="0"/>
           </a:p>
           <a:p>
             <a:pPr lvl="1"/>
@@ -1724,7 +1722,6 @@
               <a:rPr lang="en-US" smtClean="0"/>
               <a:t>Second level</a:t>
             </a:r>
-            <a:endParaRPr lang="en-US" smtClean="0"/>
           </a:p>
           <a:p>
             <a:pPr lvl="2"/>
@@ -1732,7 +1729,6 @@
               <a:rPr lang="en-US" smtClean="0"/>
               <a:t>Third level</a:t>
             </a:r>
-            <a:endParaRPr lang="en-US" smtClean="0"/>
           </a:p>
           <a:p>
             <a:pPr lvl="3"/>
@@ -1740,7 +1736,6 @@
               <a:rPr lang="en-US" smtClean="0"/>
               <a:t>Fourth level</a:t>
             </a:r>
-            <a:endParaRPr lang="en-US" smtClean="0"/>
           </a:p>
           <a:p>
             <a:pPr lvl="4"/>
@@ -1769,6 +1764,7 @@
           <a:p>
             <a:fld id="{5BCAD085-E8A6-8845-BD4E-CB4CCA059FC4}" type="datetimeFigureOut">
               <a:rPr lang="en-US" smtClean="0"/>
+              <a:t>1/27/13</a:t>
             </a:fld>
             <a:endParaRPr lang="en-US"/>
           </a:p>
@@ -1810,12 +1806,18 @@
           <a:p>
             <a:fld id="{C1FF6DA9-008F-8B48-92A6-B652298478BF}" type="slidenum">
               <a:rPr lang="en-US" smtClean="0"/>
+              <a:t>‹#›</a:t>
             </a:fld>
             <a:endParaRPr lang="en-US"/>
           </a:p>
         </p:txBody>
       </p:sp>
     </p:spTree>
+    <p:extLst>
+      <p:ext uri="{BB962C8B-B14F-4D97-AF65-F5344CB8AC3E}">
+        <p14:creationId xmlns:p14="http://schemas.microsoft.com/office/powerpoint/2010/main" val="990158736"/>
+      </p:ext>
+    </p:extLst>
   </p:cSld>
   <p:clrMapOvr>
     <a:masterClrMapping/>
@@ -1880,6 +1882,7 @@
           <a:p>
             <a:fld id="{5BCAD085-E8A6-8845-BD4E-CB4CCA059FC4}" type="datetimeFigureOut">
               <a:rPr lang="en-US" smtClean="0"/>
+              <a:t>1/27/13</a:t>
             </a:fld>
             <a:endParaRPr lang="en-US"/>
           </a:p>
@@ -1921,12 +1924,18 @@
           <a:p>
             <a:fld id="{C1FF6DA9-008F-8B48-92A6-B652298478BF}" type="slidenum">
               <a:rPr lang="en-US" smtClean="0"/>
+              <a:t>‹#›</a:t>
             </a:fld>
             <a:endParaRPr lang="en-US"/>
           </a:p>
         </p:txBody>
       </p:sp>
     </p:spTree>
+    <p:extLst>
+      <p:ext uri="{BB962C8B-B14F-4D97-AF65-F5344CB8AC3E}">
+        <p14:creationId xmlns:p14="http://schemas.microsoft.com/office/powerpoint/2010/main" val="727027711"/>
+      </p:ext>
+    </p:extLst>
   </p:cSld>
   <p:clrMapOvr>
     <a:masterClrMapping/>
@@ -1968,6 +1977,7 @@
           <a:p>
             <a:fld id="{5BCAD085-E8A6-8845-BD4E-CB4CCA059FC4}" type="datetimeFigureOut">
               <a:rPr lang="en-US" smtClean="0"/>
+              <a:t>1/27/13</a:t>
             </a:fld>
             <a:endParaRPr lang="en-US"/>
           </a:p>
@@ -2009,12 +2019,18 @@
           <a:p>
             <a:fld id="{C1FF6DA9-008F-8B48-92A6-B652298478BF}" type="slidenum">
               <a:rPr lang="en-US" smtClean="0"/>
+              <a:t>‹#›</a:t>
             </a:fld>
             <a:endParaRPr lang="en-US"/>
           </a:p>
         </p:txBody>
       </p:sp>
     </p:spTree>
+    <p:extLst>
+      <p:ext uri="{BB962C8B-B14F-4D97-AF65-F5344CB8AC3E}">
+        <p14:creationId xmlns:p14="http://schemas.microsoft.com/office/powerpoint/2010/main" val="1212999818"/>
+      </p:ext>
+    </p:extLst>
   </p:cSld>
   <p:clrMapOvr>
     <a:masterClrMapping/>
@@ -2124,7 +2140,6 @@
               <a:rPr lang="en-US" smtClean="0"/>
               <a:t>Click to edit Master text styles</a:t>
             </a:r>
-            <a:endParaRPr lang="en-US" smtClean="0"/>
           </a:p>
           <a:p>
             <a:pPr lvl="1"/>
@@ -2132,7 +2147,6 @@
               <a:rPr lang="en-US" smtClean="0"/>
               <a:t>Second level</a:t>
             </a:r>
-            <a:endParaRPr lang="en-US" smtClean="0"/>
           </a:p>
           <a:p>
             <a:pPr lvl="2"/>
@@ -2140,7 +2154,6 @@
               <a:rPr lang="en-US" smtClean="0"/>
               <a:t>Third level</a:t>
             </a:r>
-            <a:endParaRPr lang="en-US" smtClean="0"/>
           </a:p>
           <a:p>
             <a:pPr lvl="3"/>
@@ -2148,7 +2161,6 @@
               <a:rPr lang="en-US" smtClean="0"/>
               <a:t>Fourth level</a:t>
             </a:r>
-            <a:endParaRPr lang="en-US" smtClean="0"/>
           </a:p>
           <a:p>
             <a:pPr lvl="4"/>
@@ -2222,7 +2234,6 @@
               <a:rPr lang="en-US" smtClean="0"/>
               <a:t>Click to edit Master text styles</a:t>
             </a:r>
-            <a:endParaRPr lang="en-US" smtClean="0"/>
           </a:p>
         </p:txBody>
       </p:sp>
@@ -2243,6 +2254,7 @@
           <a:p>
             <a:fld id="{5BCAD085-E8A6-8845-BD4E-CB4CCA059FC4}" type="datetimeFigureOut">
               <a:rPr lang="en-US" smtClean="0"/>
+              <a:t>1/27/13</a:t>
             </a:fld>
             <a:endParaRPr lang="en-US"/>
           </a:p>
@@ -2284,12 +2296,18 @@
           <a:p>
             <a:fld id="{C1FF6DA9-008F-8B48-92A6-B652298478BF}" type="slidenum">
               <a:rPr lang="en-US" smtClean="0"/>
+              <a:t>‹#›</a:t>
             </a:fld>
             <a:endParaRPr lang="en-US"/>
           </a:p>
         </p:txBody>
       </p:sp>
     </p:spTree>
+    <p:extLst>
+      <p:ext uri="{BB962C8B-B14F-4D97-AF65-F5344CB8AC3E}">
+        <p14:creationId xmlns:p14="http://schemas.microsoft.com/office/powerpoint/2010/main" val="1840726560"/>
+      </p:ext>
+    </p:extLst>
   </p:cSld>
   <p:clrMapOvr>
     <a:masterClrMapping/>
@@ -2469,7 +2487,6 @@
               <a:rPr lang="en-US" smtClean="0"/>
               <a:t>Click to edit Master text styles</a:t>
             </a:r>
-            <a:endParaRPr lang="en-US" smtClean="0"/>
           </a:p>
         </p:txBody>
       </p:sp>
@@ -2490,6 +2507,7 @@
           <a:p>
             <a:fld id="{5BCAD085-E8A6-8845-BD4E-CB4CCA059FC4}" type="datetimeFigureOut">
               <a:rPr lang="en-US" smtClean="0"/>
+              <a:t>1/27/13</a:t>
             </a:fld>
             <a:endParaRPr lang="en-US"/>
           </a:p>
@@ -2531,12 +2549,18 @@
           <a:p>
             <a:fld id="{C1FF6DA9-008F-8B48-92A6-B652298478BF}" type="slidenum">
               <a:rPr lang="en-US" smtClean="0"/>
+              <a:t>‹#›</a:t>
             </a:fld>
             <a:endParaRPr lang="en-US"/>
           </a:p>
         </p:txBody>
       </p:sp>
     </p:spTree>
+    <p:extLst>
+      <p:ext uri="{BB962C8B-B14F-4D97-AF65-F5344CB8AC3E}">
+        <p14:creationId xmlns:p14="http://schemas.microsoft.com/office/powerpoint/2010/main" val="3889236939"/>
+      </p:ext>
+    </p:extLst>
   </p:cSld>
   <p:clrMapOvr>
     <a:masterClrMapping/>
@@ -2629,7 +2653,6 @@
               <a:rPr lang="en-US" smtClean="0"/>
               <a:t>Click to edit Master text styles</a:t>
             </a:r>
-            <a:endParaRPr lang="en-US" smtClean="0"/>
           </a:p>
           <a:p>
             <a:pPr lvl="1"/>
@@ -2637,7 +2660,6 @@
               <a:rPr lang="en-US" smtClean="0"/>
               <a:t>Second level</a:t>
             </a:r>
-            <a:endParaRPr lang="en-US" smtClean="0"/>
           </a:p>
           <a:p>
             <a:pPr lvl="2"/>
@@ -2645,7 +2667,6 @@
               <a:rPr lang="en-US" smtClean="0"/>
               <a:t>Third level</a:t>
             </a:r>
-            <a:endParaRPr lang="en-US" smtClean="0"/>
           </a:p>
           <a:p>
             <a:pPr lvl="3"/>
@@ -2653,7 +2674,6 @@
               <a:rPr lang="en-US" smtClean="0"/>
               <a:t>Fourth level</a:t>
             </a:r>
-            <a:endParaRPr lang="en-US" smtClean="0"/>
           </a:p>
           <a:p>
             <a:pPr lvl="4"/>
@@ -2700,6 +2720,7 @@
           <a:p>
             <a:fld id="{5BCAD085-E8A6-8845-BD4E-CB4CCA059FC4}" type="datetimeFigureOut">
               <a:rPr lang="en-US" smtClean="0"/>
+              <a:t>1/27/13</a:t>
             </a:fld>
             <a:endParaRPr lang="en-US"/>
           </a:p>
@@ -2777,12 +2798,18 @@
           <a:p>
             <a:fld id="{C1FF6DA9-008F-8B48-92A6-B652298478BF}" type="slidenum">
               <a:rPr lang="en-US" smtClean="0"/>
+              <a:t>‹#›</a:t>
             </a:fld>
             <a:endParaRPr lang="en-US"/>
           </a:p>
         </p:txBody>
       </p:sp>
     </p:spTree>
+    <p:extLst>
+      <p:ext uri="{BB962C8B-B14F-4D97-AF65-F5344CB8AC3E}">
+        <p14:creationId xmlns:p14="http://schemas.microsoft.com/office/powerpoint/2010/main" val="2209977519"/>
+      </p:ext>
+    </p:extLst>
   </p:cSld>
   <p:clrMap bg1="lt1" tx1="dk1" bg2="lt2" tx2="dk2" accent1="accent1" accent2="accent2" accent3="accent3" accent4="accent4" accent5="accent5" accent6="accent6" hlink="hlink" folHlink="folHlink"/>
   <p:sldLayoutIdLst>
@@ -2820,7 +2847,7 @@
         <a:spcBef>
           <a:spcPct val="20000"/>
         </a:spcBef>
-        <a:buFont typeface="Arial" panose="020B0604020202020204"/>
+        <a:buFont typeface="Arial"/>
         <a:buChar char="•"/>
         <a:defRPr sz="3200" kern="1200">
           <a:solidFill>
@@ -2835,7 +2862,7 @@
         <a:spcBef>
           <a:spcPct val="20000"/>
         </a:spcBef>
-        <a:buFont typeface="Arial" panose="020B0604020202020204"/>
+        <a:buFont typeface="Arial"/>
         <a:buChar char="–"/>
         <a:defRPr sz="2800" kern="1200">
           <a:solidFill>
@@ -2850,7 +2877,7 @@
         <a:spcBef>
           <a:spcPct val="20000"/>
         </a:spcBef>
-        <a:buFont typeface="Arial" panose="020B0604020202020204"/>
+        <a:buFont typeface="Arial"/>
         <a:buChar char="•"/>
         <a:defRPr sz="2400" kern="1200">
           <a:solidFill>
@@ -2865,7 +2892,7 @@
         <a:spcBef>
           <a:spcPct val="20000"/>
         </a:spcBef>
-        <a:buFont typeface="Arial" panose="020B0604020202020204"/>
+        <a:buFont typeface="Arial"/>
         <a:buChar char="–"/>
         <a:defRPr sz="2000" kern="1200">
           <a:solidFill>
@@ -2880,7 +2907,7 @@
         <a:spcBef>
           <a:spcPct val="20000"/>
         </a:spcBef>
-        <a:buFont typeface="Arial" panose="020B0604020202020204"/>
+        <a:buFont typeface="Arial"/>
         <a:buChar char="»"/>
         <a:defRPr sz="2000" kern="1200">
           <a:solidFill>
@@ -2895,7 +2922,7 @@
         <a:spcBef>
           <a:spcPct val="20000"/>
         </a:spcBef>
-        <a:buFont typeface="Arial" panose="020B0604020202020204"/>
+        <a:buFont typeface="Arial"/>
         <a:buChar char="•"/>
         <a:defRPr sz="2000" kern="1200">
           <a:solidFill>
@@ -2910,7 +2937,7 @@
         <a:spcBef>
           <a:spcPct val="20000"/>
         </a:spcBef>
-        <a:buFont typeface="Arial" panose="020B0604020202020204"/>
+        <a:buFont typeface="Arial"/>
         <a:buChar char="•"/>
         <a:defRPr sz="2000" kern="1200">
           <a:solidFill>
@@ -2925,7 +2952,7 @@
         <a:spcBef>
           <a:spcPct val="20000"/>
         </a:spcBef>
-        <a:buFont typeface="Arial" panose="020B0604020202020204"/>
+        <a:buFont typeface="Arial"/>
         <a:buChar char="•"/>
         <a:defRPr sz="2000" kern="1200">
           <a:solidFill>
@@ -2940,7 +2967,7 @@
         <a:spcBef>
           <a:spcPct val="20000"/>
         </a:spcBef>
-        <a:buFont typeface="Arial" panose="020B0604020202020204"/>
+        <a:buFont typeface="Arial"/>
         <a:buChar char="•"/>
         <a:defRPr sz="2000" kern="1200">
           <a:solidFill>
@@ -3052,7 +3079,7 @@
 </file>
 
 <file path=ppt/slides/slide1.xml><?xml version="1.0" encoding="utf-8"?>
-<p:sld xmlns:a="http://schemas.openxmlformats.org/drawingml/2006/main" xmlns:r="http://schemas.openxmlformats.org/officeDocument/2006/relationships" xmlns:p="http://schemas.openxmlformats.org/presentationml/2006/main">
+<p:sld xmlns:a="http://schemas.openxmlformats.org/drawingml/2006/main" xmlns:p="http://schemas.openxmlformats.org/presentationml/2006/main" xmlns:r="http://schemas.openxmlformats.org/officeDocument/2006/relationships">
   <p:cSld>
     <p:spTree>
       <p:nvGrpSpPr>
@@ -3140,7 +3167,7 @@
             <a:noFill/>
           </p:spPr>
           <p:txBody>
-            <a:bodyPr wrap="none" lIns="0" tIns="0" rIns="0" bIns="0" anchor="ctr">
+            <a:bodyPr wrap="none" lIns="0" rIns="0" tIns="0" bIns="0" anchor="ctr">
               <a:noAutofit/>
             </a:bodyPr>
             <a:lstStyle/>
@@ -3151,16 +3178,12 @@
                   <a:solidFill>
                     <a:srgbClr val="262626"/>
                   </a:solidFill>
-                  <a:latin typeface="Arial" panose="020B0604020202020204"/>
+                  <a:latin typeface="Times New Roman"/>
+                  <a:ea typeface="Times New Roman"/>
+                  <a:cs typeface="Times New Roman"/>
                 </a:rPr>
                 <a:t>Digital twin &amp; multi-entity data</a:t>
               </a:r>
-              <a:endParaRPr sz="1250" b="1" i="0">
-                <a:solidFill>
-                  <a:srgbClr val="262626"/>
-                </a:solidFill>
-                <a:latin typeface="Arial" panose="020B0604020202020204"/>
-              </a:endParaRPr>
             </a:p>
           </p:txBody>
         </p:sp>
@@ -3211,235 +3234,6 @@
         <p:pic>
           <p:nvPicPr>
             <p:cNvPr id="6" name="Picture 5" descr="factory.jpg"/>
-            <p:cNvPicPr>
-              <a:picLocks noChangeAspect="1"/>
-            </p:cNvPicPr>
-            <p:nvPr/>
-          </p:nvPicPr>
-          <p:blipFill>
-            <a:blip r:embed="rId1"/>
-            <a:stretch>
-              <a:fillRect/>
-            </a:stretch>
-          </p:blipFill>
-          <p:spPr>
-            <a:xfrm>
-              <a:off x="274320" y="530352"/>
-              <a:ext cx="3200400" cy="1834376"/>
-            </a:xfrm>
-            <a:prstGeom prst="rect">
-              <a:avLst/>
-            </a:prstGeom>
-          </p:spPr>
-        </p:pic>
-        <p:sp>
-          <p:nvSpPr>
-            <p:cNvPr id="9" name="TextBox 8"/>
-            <p:cNvSpPr txBox="1"/>
-            <p:nvPr/>
-          </p:nvSpPr>
-          <p:spPr>
-            <a:xfrm>
-              <a:off x="274320" y="2395728"/>
-              <a:ext cx="3200400" cy="201168"/>
-            </a:xfrm>
-            <a:prstGeom prst="rect">
-              <a:avLst/>
-            </a:prstGeom>
-            <a:noFill/>
-          </p:spPr>
-          <p:txBody>
-            <a:bodyPr wrap="none" lIns="0" tIns="0" rIns="0" bIns="0" anchor="ctr">
-              <a:noAutofit/>
-            </a:bodyPr>
-            <a:lstStyle/>
-            <a:p>
-              <a:pPr algn="ctr"/>
-              <a:r>
-                <a:rPr sz="950" b="0" i="0">
-                  <a:solidFill>
-                    <a:srgbClr val="595959"/>
-                  </a:solidFill>
-                  <a:latin typeface="Arial" panose="020B0604020202020204"/>
-                </a:rPr>
-                <a:t>Isaac Sim line  ·  single-axis disturbances</a:t>
-              </a:r>
-              <a:endParaRPr sz="950" b="0" i="0">
-                <a:solidFill>
-                  <a:srgbClr val="595959"/>
-                </a:solidFill>
-                <a:latin typeface="Arial" panose="020B0604020202020204"/>
-              </a:endParaRPr>
-            </a:p>
-          </p:txBody>
-        </p:sp>
-        <p:sp>
-          <p:nvSpPr>
-            <p:cNvPr id="12" name="TextBox 11"/>
-            <p:cNvSpPr txBox="1"/>
-            <p:nvPr/>
-          </p:nvSpPr>
-          <p:spPr>
-            <a:xfrm>
-              <a:off x="292608" y="3163824"/>
-              <a:ext cx="731520" cy="182880"/>
-            </a:xfrm>
-            <a:prstGeom prst="rect">
-              <a:avLst/>
-            </a:prstGeom>
-            <a:noFill/>
-          </p:spPr>
-          <p:txBody>
-            <a:bodyPr wrap="none" lIns="0" tIns="0" rIns="0" bIns="0" anchor="ctr">
-              <a:noAutofit/>
-            </a:bodyPr>
-            <a:lstStyle/>
-            <a:p>
-              <a:pPr algn="ctr"/>
-              <a:r>
-                <a:rPr sz="950" b="0" i="0">
-                  <a:solidFill>
-                    <a:srgbClr val="595959"/>
-                  </a:solidFill>
-                  <a:latin typeface="Arial" panose="020B0604020202020204"/>
-                </a:rPr>
-                <a:t>Human</a:t>
-              </a:r>
-              <a:endParaRPr sz="950" b="0" i="0">
-                <a:solidFill>
-                  <a:srgbClr val="595959"/>
-                </a:solidFill>
-                <a:latin typeface="Arial" panose="020B0604020202020204"/>
-              </a:endParaRPr>
-            </a:p>
-          </p:txBody>
-        </p:sp>
-        <p:sp>
-          <p:nvSpPr>
-            <p:cNvPr id="15" name="TextBox 14"/>
-            <p:cNvSpPr txBox="1"/>
-            <p:nvPr/>
-          </p:nvSpPr>
-          <p:spPr>
-            <a:xfrm>
-              <a:off x="1042416" y="3163824"/>
-              <a:ext cx="731520" cy="182880"/>
-            </a:xfrm>
-            <a:prstGeom prst="rect">
-              <a:avLst/>
-            </a:prstGeom>
-            <a:noFill/>
-          </p:spPr>
-          <p:txBody>
-            <a:bodyPr wrap="none" lIns="0" tIns="0" rIns="0" bIns="0" anchor="ctr">
-              <a:noAutofit/>
-            </a:bodyPr>
-            <a:lstStyle/>
-            <a:p>
-              <a:pPr algn="ctr"/>
-              <a:r>
-                <a:rPr sz="950" b="0" i="0">
-                  <a:solidFill>
-                    <a:srgbClr val="595959"/>
-                  </a:solidFill>
-                  <a:latin typeface="Arial" panose="020B0604020202020204"/>
-                </a:rPr>
-                <a:t>Machine</a:t>
-              </a:r>
-              <a:endParaRPr sz="950" b="0" i="0">
-                <a:solidFill>
-                  <a:srgbClr val="595959"/>
-                </a:solidFill>
-                <a:latin typeface="Arial" panose="020B0604020202020204"/>
-              </a:endParaRPr>
-            </a:p>
-          </p:txBody>
-        </p:sp>
-        <p:sp>
-          <p:nvSpPr>
-            <p:cNvPr id="18" name="TextBox 17"/>
-            <p:cNvSpPr txBox="1"/>
-            <p:nvPr/>
-          </p:nvSpPr>
-          <p:spPr>
-            <a:xfrm>
-              <a:off x="292608" y="3858768"/>
-              <a:ext cx="731520" cy="182880"/>
-            </a:xfrm>
-            <a:prstGeom prst="rect">
-              <a:avLst/>
-            </a:prstGeom>
-            <a:noFill/>
-          </p:spPr>
-          <p:txBody>
-            <a:bodyPr wrap="none" lIns="0" tIns="0" rIns="0" bIns="0" anchor="ctr">
-              <a:noAutofit/>
-            </a:bodyPr>
-            <a:lstStyle/>
-            <a:p>
-              <a:pPr algn="ctr"/>
-              <a:r>
-                <a:rPr sz="950" b="0" i="0">
-                  <a:solidFill>
-                    <a:srgbClr val="595959"/>
-                  </a:solidFill>
-                  <a:latin typeface="Arial" panose="020B0604020202020204"/>
-                </a:rPr>
-                <a:t>Material</a:t>
-              </a:r>
-              <a:endParaRPr sz="950" b="0" i="0">
-                <a:solidFill>
-                  <a:srgbClr val="595959"/>
-                </a:solidFill>
-                <a:latin typeface="Arial" panose="020B0604020202020204"/>
-              </a:endParaRPr>
-            </a:p>
-          </p:txBody>
-        </p:sp>
-        <p:sp>
-          <p:nvSpPr>
-            <p:cNvPr id="21" name="TextBox 20"/>
-            <p:cNvSpPr txBox="1"/>
-            <p:nvPr/>
-          </p:nvSpPr>
-          <p:spPr>
-            <a:xfrm>
-              <a:off x="1042416" y="3858768"/>
-              <a:ext cx="731520" cy="182880"/>
-            </a:xfrm>
-            <a:prstGeom prst="rect">
-              <a:avLst/>
-            </a:prstGeom>
-            <a:noFill/>
-          </p:spPr>
-          <p:txBody>
-            <a:bodyPr wrap="none" lIns="0" tIns="0" rIns="0" bIns="0" anchor="ctr">
-              <a:noAutofit/>
-            </a:bodyPr>
-            <a:lstStyle/>
-            <a:p>
-              <a:pPr algn="ctr"/>
-              <a:r>
-                <a:rPr sz="950" b="0" i="0">
-                  <a:solidFill>
-                    <a:srgbClr val="595959"/>
-                  </a:solidFill>
-                  <a:latin typeface="Arial" panose="020B0604020202020204"/>
-                </a:rPr>
-                <a:t>Logistics</a:t>
-              </a:r>
-              <a:endParaRPr sz="950" b="0" i="0">
-                <a:solidFill>
-                  <a:srgbClr val="595959"/>
-                </a:solidFill>
-                <a:latin typeface="Arial" panose="020B0604020202020204"/>
-              </a:endParaRPr>
-            </a:p>
-          </p:txBody>
-        </p:sp>
-        <p:pic>
-          <p:nvPicPr>
-            <p:cNvPr id="22" name="Picture 21" descr="tensor_0.png"/>
             <p:cNvPicPr>
               <a:picLocks noChangeAspect="1"/>
             </p:cNvPicPr>
@@ -3453,8 +3247,8 @@
           </p:blipFill>
           <p:spPr>
             <a:xfrm>
-              <a:off x="2203704" y="2596896"/>
-              <a:ext cx="1207008" cy="914400"/>
+              <a:off x="274320" y="530352"/>
+              <a:ext cx="3200400" cy="1834376"/>
             </a:xfrm>
             <a:prstGeom prst="rect">
               <a:avLst/>
@@ -3463,51 +3257,129 @@
         </p:pic>
         <p:sp>
           <p:nvSpPr>
-            <p:cNvPr id="23" name="Rectangle 22"/>
-            <p:cNvSpPr/>
-            <p:nvPr/>
-          </p:nvSpPr>
-          <p:spPr>
-            <a:xfrm>
-              <a:off x="2203704" y="2596896"/>
-              <a:ext cx="1207008" cy="914400"/>
+            <p:cNvPr id="7" name="Rounded Rectangle 6"/>
+            <p:cNvSpPr/>
+            <p:nvPr/>
+          </p:nvSpPr>
+          <p:spPr>
+            <a:xfrm>
+              <a:off x="2395728" y="603504"/>
+              <a:ext cx="1005840" cy="228600"/>
+            </a:xfrm>
+            <a:prstGeom prst="roundRect">
+              <a:avLst>
+                <a:gd name="adj" fmla="val 48000"/>
+              </a:avLst>
+            </a:prstGeom>
+            <a:solidFill>
+              <a:srgbClr val="3D6EB4"/>
+            </a:solidFill>
+            <a:ln w="9525">
+              <a:solidFill>
+                <a:srgbClr val="FFFFFF"/>
+              </a:solidFill>
+            </a:ln>
+            <a:effectLst/>
+          </p:spPr>
+          <p:style>
+            <a:lnRef idx="1">
+              <a:schemeClr val="accent1"/>
+            </a:lnRef>
+            <a:fillRef idx="3">
+              <a:schemeClr val="accent1"/>
+            </a:fillRef>
+            <a:effectRef idx="2">
+              <a:schemeClr val="accent1"/>
+            </a:effectRef>
+            <a:fontRef idx="minor">
+              <a:schemeClr val="lt1"/>
+            </a:fontRef>
+          </p:style>
+          <p:txBody>
+            <a:bodyPr rtlCol="0" anchor="ctr"/>
+            <a:lstStyle/>
+            <a:p>
+              <a:pPr algn="ctr"/>
+            </a:p>
+          </p:txBody>
+        </p:sp>
+        <p:sp>
+          <p:nvSpPr>
+            <p:cNvPr id="8" name="TextBox 7"/>
+            <p:cNvSpPr txBox="1"/>
+            <p:nvPr/>
+          </p:nvSpPr>
+          <p:spPr>
+            <a:xfrm>
+              <a:off x="2395728" y="603504"/>
+              <a:ext cx="1005840" cy="228600"/>
             </a:xfrm>
             <a:prstGeom prst="rect">
               <a:avLst/>
             </a:prstGeom>
             <a:noFill/>
-            <a:ln w="7620">
-              <a:solidFill>
-                <a:srgbClr val="595959"/>
-              </a:solidFill>
-            </a:ln>
-            <a:effectLst/>
-          </p:spPr>
-          <p:style>
-            <a:lnRef idx="1">
-              <a:schemeClr val="accent1"/>
-            </a:lnRef>
-            <a:fillRef idx="3">
-              <a:schemeClr val="accent1"/>
-            </a:fillRef>
-            <a:effectRef idx="2">
-              <a:schemeClr val="accent1"/>
-            </a:effectRef>
-            <a:fontRef idx="minor">
-              <a:schemeClr val="lt1"/>
-            </a:fontRef>
-          </p:style>
-          <p:txBody>
-            <a:bodyPr rtlCol="0" anchor="ctr"/>
-            <a:lstStyle/>
-            <a:p>
-              <a:pPr algn="ctr"/>
+          </p:spPr>
+          <p:txBody>
+            <a:bodyPr wrap="none" lIns="0" rIns="0" tIns="0" bIns="0" anchor="ctr">
+              <a:noAutofit/>
+            </a:bodyPr>
+            <a:lstStyle/>
+            <a:p>
+              <a:pPr algn="ctr"/>
+              <a:r>
+                <a:rPr sz="900" b="1" i="0">
+                  <a:solidFill>
+                    <a:srgbClr val="FFFFFF"/>
+                  </a:solidFill>
+                  <a:latin typeface="Times New Roman"/>
+                  <a:ea typeface="Times New Roman"/>
+                  <a:cs typeface="Times New Roman"/>
+                </a:rPr>
+                <a:t>Contribution 1</a:t>
+              </a:r>
+            </a:p>
+          </p:txBody>
+        </p:sp>
+        <p:sp>
+          <p:nvSpPr>
+            <p:cNvPr id="9" name="TextBox 8"/>
+            <p:cNvSpPr txBox="1"/>
+            <p:nvPr/>
+          </p:nvSpPr>
+          <p:spPr>
+            <a:xfrm>
+              <a:off x="274320" y="2395728"/>
+              <a:ext cx="3200400" cy="201168"/>
+            </a:xfrm>
+            <a:prstGeom prst="rect">
+              <a:avLst/>
+            </a:prstGeom>
+            <a:noFill/>
+          </p:spPr>
+          <p:txBody>
+            <a:bodyPr wrap="none" lIns="0" rIns="0" tIns="0" bIns="0" anchor="ctr">
+              <a:noAutofit/>
+            </a:bodyPr>
+            <a:lstStyle/>
+            <a:p>
+              <a:pPr algn="ctr"/>
+              <a:r>
+                <a:rPr sz="950" b="0" i="0">
+                  <a:solidFill>
+                    <a:srgbClr val="595959"/>
+                  </a:solidFill>
+                  <a:latin typeface="Times New Roman"/>
+                  <a:ea typeface="Times New Roman"/>
+                  <a:cs typeface="Times New Roman"/>
+                </a:rPr>
+                <a:t>Isaac Sim line  ·  single-axis disturbances</a:t>
+              </a:r>
             </a:p>
           </p:txBody>
         </p:sp>
         <p:pic>
           <p:nvPicPr>
-            <p:cNvPr id="24" name="Picture 23" descr="tensor_1.png"/>
+            <p:cNvPr id="10" name="Picture 9" descr="icon_human.png"/>
             <p:cNvPicPr>
               <a:picLocks noChangeAspect="1"/>
             </p:cNvPicPr>
@@ -3521,8 +3393,8 @@
           </p:blipFill>
           <p:spPr>
             <a:xfrm>
-              <a:off x="2130552" y="2670048"/>
-              <a:ext cx="1207008" cy="914400"/>
+              <a:off x="429768" y="2697480"/>
+              <a:ext cx="457200" cy="457200"/>
             </a:xfrm>
             <a:prstGeom prst="rect">
               <a:avLst/>
@@ -3531,51 +3403,120 @@
         </p:pic>
         <p:sp>
           <p:nvSpPr>
-            <p:cNvPr id="25" name="Rectangle 24"/>
-            <p:cNvSpPr/>
-            <p:nvPr/>
-          </p:nvSpPr>
-          <p:spPr>
-            <a:xfrm>
-              <a:off x="2130552" y="2670048"/>
-              <a:ext cx="1207008" cy="914400"/>
+            <p:cNvPr id="11" name="Freeform 10"/>
+            <p:cNvSpPr/>
+            <p:nvPr/>
+          </p:nvSpPr>
+          <p:spPr>
+            <a:xfrm>
+              <a:off x="841248" y="2697480"/>
+              <a:ext cx="124358" cy="186538"/>
+            </a:xfrm>
+            <a:custGeom>
+              <a:avLst/>
+              <a:gdLst/>
+              <a:ahLst/>
+              <a:cxnLst/>
+              <a:rect l="l" t="t" r="r" b="b"/>
+              <a:pathLst>
+                <a:path w="124358" h="186538">
+                  <a:moveTo>
+                    <a:pt x="23317" y="0"/>
+                  </a:moveTo>
+                  <a:lnTo>
+                    <a:pt x="116586" y="0"/>
+                  </a:lnTo>
+                  <a:lnTo>
+                    <a:pt x="69952" y="69952"/>
+                  </a:lnTo>
+                  <a:lnTo>
+                    <a:pt x="124358" y="69952"/>
+                  </a:lnTo>
+                  <a:lnTo>
+                    <a:pt x="15545" y="186538"/>
+                  </a:lnTo>
+                  <a:lnTo>
+                    <a:pt x="54407" y="93269"/>
+                  </a:lnTo>
+                  <a:lnTo>
+                    <a:pt x="0" y="93269"/>
+                  </a:lnTo>
+                  <a:close/>
+                </a:path>
+              </a:pathLst>
+            </a:custGeom>
+            <a:solidFill>
+              <a:srgbClr val="CB001C"/>
+            </a:solidFill>
+            <a:ln w="6350">
+              <a:solidFill>
+                <a:srgbClr val="FFFFFF"/>
+              </a:solidFill>
+            </a:ln>
+            <a:effectLst/>
+          </p:spPr>
+          <p:style>
+            <a:lnRef idx="1">
+              <a:schemeClr val="accent1"/>
+            </a:lnRef>
+            <a:fillRef idx="3">
+              <a:schemeClr val="accent1"/>
+            </a:fillRef>
+            <a:effectRef idx="2">
+              <a:schemeClr val="accent1"/>
+            </a:effectRef>
+            <a:fontRef idx="minor">
+              <a:schemeClr val="lt1"/>
+            </a:fontRef>
+          </p:style>
+          <p:txBody>
+            <a:bodyPr rtlCol="0" anchor="ctr"/>
+            <a:lstStyle/>
+            <a:p>
+              <a:pPr algn="ctr"/>
+            </a:p>
+          </p:txBody>
+        </p:sp>
+        <p:sp>
+          <p:nvSpPr>
+            <p:cNvPr id="12" name="TextBox 11"/>
+            <p:cNvSpPr txBox="1"/>
+            <p:nvPr/>
+          </p:nvSpPr>
+          <p:spPr>
+            <a:xfrm>
+              <a:off x="292608" y="3163824"/>
+              <a:ext cx="731520" cy="182880"/>
             </a:xfrm>
             <a:prstGeom prst="rect">
               <a:avLst/>
             </a:prstGeom>
             <a:noFill/>
-            <a:ln w="7620">
-              <a:solidFill>
-                <a:srgbClr val="595959"/>
-              </a:solidFill>
-            </a:ln>
-            <a:effectLst/>
-          </p:spPr>
-          <p:style>
-            <a:lnRef idx="1">
-              <a:schemeClr val="accent1"/>
-            </a:lnRef>
-            <a:fillRef idx="3">
-              <a:schemeClr val="accent1"/>
-            </a:fillRef>
-            <a:effectRef idx="2">
-              <a:schemeClr val="accent1"/>
-            </a:effectRef>
-            <a:fontRef idx="minor">
-              <a:schemeClr val="lt1"/>
-            </a:fontRef>
-          </p:style>
-          <p:txBody>
-            <a:bodyPr rtlCol="0" anchor="ctr"/>
-            <a:lstStyle/>
-            <a:p>
-              <a:pPr algn="ctr"/>
+          </p:spPr>
+          <p:txBody>
+            <a:bodyPr wrap="none" lIns="0" rIns="0" tIns="0" bIns="0" anchor="ctr">
+              <a:noAutofit/>
+            </a:bodyPr>
+            <a:lstStyle/>
+            <a:p>
+              <a:pPr algn="ctr"/>
+              <a:r>
+                <a:rPr sz="950" b="0" i="0">
+                  <a:solidFill>
+                    <a:srgbClr val="595959"/>
+                  </a:solidFill>
+                  <a:latin typeface="Times New Roman"/>
+                  <a:ea typeface="Times New Roman"/>
+                  <a:cs typeface="Times New Roman"/>
+                </a:rPr>
+                <a:t>Human</a:t>
+              </a:r>
             </a:p>
           </p:txBody>
         </p:sp>
         <p:pic>
           <p:nvPicPr>
-            <p:cNvPr id="26" name="Picture 25" descr="tensor_2.png"/>
+            <p:cNvPr id="13" name="Picture 12" descr="icon_machine.png"/>
             <p:cNvPicPr>
               <a:picLocks noChangeAspect="1"/>
             </p:cNvPicPr>
@@ -3589,6 +3530,553 @@
           </p:blipFill>
           <p:spPr>
             <a:xfrm>
+              <a:off x="1179576" y="2697480"/>
+              <a:ext cx="457200" cy="457200"/>
+            </a:xfrm>
+            <a:prstGeom prst="rect">
+              <a:avLst/>
+            </a:prstGeom>
+          </p:spPr>
+        </p:pic>
+        <p:sp>
+          <p:nvSpPr>
+            <p:cNvPr id="14" name="Freeform 13"/>
+            <p:cNvSpPr/>
+            <p:nvPr/>
+          </p:nvSpPr>
+          <p:spPr>
+            <a:xfrm>
+              <a:off x="1591056" y="2697480"/>
+              <a:ext cx="124358" cy="186538"/>
+            </a:xfrm>
+            <a:custGeom>
+              <a:avLst/>
+              <a:gdLst/>
+              <a:ahLst/>
+              <a:cxnLst/>
+              <a:rect l="l" t="t" r="r" b="b"/>
+              <a:pathLst>
+                <a:path w="124358" h="186538">
+                  <a:moveTo>
+                    <a:pt x="23317" y="0"/>
+                  </a:moveTo>
+                  <a:lnTo>
+                    <a:pt x="116586" y="0"/>
+                  </a:lnTo>
+                  <a:lnTo>
+                    <a:pt x="69952" y="69952"/>
+                  </a:lnTo>
+                  <a:lnTo>
+                    <a:pt x="124358" y="69952"/>
+                  </a:lnTo>
+                  <a:lnTo>
+                    <a:pt x="15545" y="186538"/>
+                  </a:lnTo>
+                  <a:lnTo>
+                    <a:pt x="54407" y="93269"/>
+                  </a:lnTo>
+                  <a:lnTo>
+                    <a:pt x="0" y="93269"/>
+                  </a:lnTo>
+                  <a:close/>
+                </a:path>
+              </a:pathLst>
+            </a:custGeom>
+            <a:solidFill>
+              <a:srgbClr val="CB001C"/>
+            </a:solidFill>
+            <a:ln w="6350">
+              <a:solidFill>
+                <a:srgbClr val="FFFFFF"/>
+              </a:solidFill>
+            </a:ln>
+            <a:effectLst/>
+          </p:spPr>
+          <p:style>
+            <a:lnRef idx="1">
+              <a:schemeClr val="accent1"/>
+            </a:lnRef>
+            <a:fillRef idx="3">
+              <a:schemeClr val="accent1"/>
+            </a:fillRef>
+            <a:effectRef idx="2">
+              <a:schemeClr val="accent1"/>
+            </a:effectRef>
+            <a:fontRef idx="minor">
+              <a:schemeClr val="lt1"/>
+            </a:fontRef>
+          </p:style>
+          <p:txBody>
+            <a:bodyPr rtlCol="0" anchor="ctr"/>
+            <a:lstStyle/>
+            <a:p>
+              <a:pPr algn="ctr"/>
+            </a:p>
+          </p:txBody>
+        </p:sp>
+        <p:sp>
+          <p:nvSpPr>
+            <p:cNvPr id="15" name="TextBox 14"/>
+            <p:cNvSpPr txBox="1"/>
+            <p:nvPr/>
+          </p:nvSpPr>
+          <p:spPr>
+            <a:xfrm>
+              <a:off x="1042416" y="3163824"/>
+              <a:ext cx="731520" cy="182880"/>
+            </a:xfrm>
+            <a:prstGeom prst="rect">
+              <a:avLst/>
+            </a:prstGeom>
+            <a:noFill/>
+          </p:spPr>
+          <p:txBody>
+            <a:bodyPr wrap="none" lIns="0" rIns="0" tIns="0" bIns="0" anchor="ctr">
+              <a:noAutofit/>
+            </a:bodyPr>
+            <a:lstStyle/>
+            <a:p>
+              <a:pPr algn="ctr"/>
+              <a:r>
+                <a:rPr sz="950" b="0" i="0">
+                  <a:solidFill>
+                    <a:srgbClr val="595959"/>
+                  </a:solidFill>
+                  <a:latin typeface="Times New Roman"/>
+                  <a:ea typeface="Times New Roman"/>
+                  <a:cs typeface="Times New Roman"/>
+                </a:rPr>
+                <a:t>Machine</a:t>
+              </a:r>
+            </a:p>
+          </p:txBody>
+        </p:sp>
+        <p:pic>
+          <p:nvPicPr>
+            <p:cNvPr id="16" name="Picture 15" descr="icon_material.png"/>
+            <p:cNvPicPr>
+              <a:picLocks noChangeAspect="1"/>
+            </p:cNvPicPr>
+            <p:nvPr/>
+          </p:nvPicPr>
+          <p:blipFill>
+            <a:blip r:embed="rId5"/>
+            <a:stretch>
+              <a:fillRect/>
+            </a:stretch>
+          </p:blipFill>
+          <p:spPr>
+            <a:xfrm>
+              <a:off x="429768" y="3392424"/>
+              <a:ext cx="457200" cy="457200"/>
+            </a:xfrm>
+            <a:prstGeom prst="rect">
+              <a:avLst/>
+            </a:prstGeom>
+          </p:spPr>
+        </p:pic>
+        <p:sp>
+          <p:nvSpPr>
+            <p:cNvPr id="17" name="Freeform 16"/>
+            <p:cNvSpPr/>
+            <p:nvPr/>
+          </p:nvSpPr>
+          <p:spPr>
+            <a:xfrm>
+              <a:off x="841248" y="3392424"/>
+              <a:ext cx="124358" cy="186538"/>
+            </a:xfrm>
+            <a:custGeom>
+              <a:avLst/>
+              <a:gdLst/>
+              <a:ahLst/>
+              <a:cxnLst/>
+              <a:rect l="l" t="t" r="r" b="b"/>
+              <a:pathLst>
+                <a:path w="124358" h="186538">
+                  <a:moveTo>
+                    <a:pt x="23317" y="0"/>
+                  </a:moveTo>
+                  <a:lnTo>
+                    <a:pt x="116586" y="0"/>
+                  </a:lnTo>
+                  <a:lnTo>
+                    <a:pt x="69952" y="69952"/>
+                  </a:lnTo>
+                  <a:lnTo>
+                    <a:pt x="124358" y="69952"/>
+                  </a:lnTo>
+                  <a:lnTo>
+                    <a:pt x="15545" y="186538"/>
+                  </a:lnTo>
+                  <a:lnTo>
+                    <a:pt x="54407" y="93269"/>
+                  </a:lnTo>
+                  <a:lnTo>
+                    <a:pt x="0" y="93269"/>
+                  </a:lnTo>
+                  <a:close/>
+                </a:path>
+              </a:pathLst>
+            </a:custGeom>
+            <a:solidFill>
+              <a:srgbClr val="CB001C"/>
+            </a:solidFill>
+            <a:ln w="6350">
+              <a:solidFill>
+                <a:srgbClr val="FFFFFF"/>
+              </a:solidFill>
+            </a:ln>
+            <a:effectLst/>
+          </p:spPr>
+          <p:style>
+            <a:lnRef idx="1">
+              <a:schemeClr val="accent1"/>
+            </a:lnRef>
+            <a:fillRef idx="3">
+              <a:schemeClr val="accent1"/>
+            </a:fillRef>
+            <a:effectRef idx="2">
+              <a:schemeClr val="accent1"/>
+            </a:effectRef>
+            <a:fontRef idx="minor">
+              <a:schemeClr val="lt1"/>
+            </a:fontRef>
+          </p:style>
+          <p:txBody>
+            <a:bodyPr rtlCol="0" anchor="ctr"/>
+            <a:lstStyle/>
+            <a:p>
+              <a:pPr algn="ctr"/>
+            </a:p>
+          </p:txBody>
+        </p:sp>
+        <p:sp>
+          <p:nvSpPr>
+            <p:cNvPr id="18" name="TextBox 17"/>
+            <p:cNvSpPr txBox="1"/>
+            <p:nvPr/>
+          </p:nvSpPr>
+          <p:spPr>
+            <a:xfrm>
+              <a:off x="292608" y="3858768"/>
+              <a:ext cx="731520" cy="182880"/>
+            </a:xfrm>
+            <a:prstGeom prst="rect">
+              <a:avLst/>
+            </a:prstGeom>
+            <a:noFill/>
+          </p:spPr>
+          <p:txBody>
+            <a:bodyPr wrap="none" lIns="0" rIns="0" tIns="0" bIns="0" anchor="ctr">
+              <a:noAutofit/>
+            </a:bodyPr>
+            <a:lstStyle/>
+            <a:p>
+              <a:pPr algn="ctr"/>
+              <a:r>
+                <a:rPr sz="950" b="0" i="0">
+                  <a:solidFill>
+                    <a:srgbClr val="595959"/>
+                  </a:solidFill>
+                  <a:latin typeface="Times New Roman"/>
+                  <a:ea typeface="Times New Roman"/>
+                  <a:cs typeface="Times New Roman"/>
+                </a:rPr>
+                <a:t>Material</a:t>
+              </a:r>
+            </a:p>
+          </p:txBody>
+        </p:sp>
+        <p:pic>
+          <p:nvPicPr>
+            <p:cNvPr id="19" name="Picture 18" descr="icon_agv.png"/>
+            <p:cNvPicPr>
+              <a:picLocks noChangeAspect="1"/>
+            </p:cNvPicPr>
+            <p:nvPr/>
+          </p:nvPicPr>
+          <p:blipFill>
+            <a:blip r:embed="rId6"/>
+            <a:stretch>
+              <a:fillRect/>
+            </a:stretch>
+          </p:blipFill>
+          <p:spPr>
+            <a:xfrm>
+              <a:off x="1179576" y="3392424"/>
+              <a:ext cx="457200" cy="457200"/>
+            </a:xfrm>
+            <a:prstGeom prst="rect">
+              <a:avLst/>
+            </a:prstGeom>
+          </p:spPr>
+        </p:pic>
+        <p:sp>
+          <p:nvSpPr>
+            <p:cNvPr id="20" name="Freeform 19"/>
+            <p:cNvSpPr/>
+            <p:nvPr/>
+          </p:nvSpPr>
+          <p:spPr>
+            <a:xfrm>
+              <a:off x="1591056" y="3392424"/>
+              <a:ext cx="124358" cy="186538"/>
+            </a:xfrm>
+            <a:custGeom>
+              <a:avLst/>
+              <a:gdLst/>
+              <a:ahLst/>
+              <a:cxnLst/>
+              <a:rect l="l" t="t" r="r" b="b"/>
+              <a:pathLst>
+                <a:path w="124358" h="186538">
+                  <a:moveTo>
+                    <a:pt x="23317" y="0"/>
+                  </a:moveTo>
+                  <a:lnTo>
+                    <a:pt x="116586" y="0"/>
+                  </a:lnTo>
+                  <a:lnTo>
+                    <a:pt x="69952" y="69952"/>
+                  </a:lnTo>
+                  <a:lnTo>
+                    <a:pt x="124358" y="69952"/>
+                  </a:lnTo>
+                  <a:lnTo>
+                    <a:pt x="15545" y="186538"/>
+                  </a:lnTo>
+                  <a:lnTo>
+                    <a:pt x="54407" y="93269"/>
+                  </a:lnTo>
+                  <a:lnTo>
+                    <a:pt x="0" y="93269"/>
+                  </a:lnTo>
+                  <a:close/>
+                </a:path>
+              </a:pathLst>
+            </a:custGeom>
+            <a:solidFill>
+              <a:srgbClr val="CB001C"/>
+            </a:solidFill>
+            <a:ln w="6350">
+              <a:solidFill>
+                <a:srgbClr val="FFFFFF"/>
+              </a:solidFill>
+            </a:ln>
+            <a:effectLst/>
+          </p:spPr>
+          <p:style>
+            <a:lnRef idx="1">
+              <a:schemeClr val="accent1"/>
+            </a:lnRef>
+            <a:fillRef idx="3">
+              <a:schemeClr val="accent1"/>
+            </a:fillRef>
+            <a:effectRef idx="2">
+              <a:schemeClr val="accent1"/>
+            </a:effectRef>
+            <a:fontRef idx="minor">
+              <a:schemeClr val="lt1"/>
+            </a:fontRef>
+          </p:style>
+          <p:txBody>
+            <a:bodyPr rtlCol="0" anchor="ctr"/>
+            <a:lstStyle/>
+            <a:p>
+              <a:pPr algn="ctr"/>
+            </a:p>
+          </p:txBody>
+        </p:sp>
+        <p:sp>
+          <p:nvSpPr>
+            <p:cNvPr id="21" name="TextBox 20"/>
+            <p:cNvSpPr txBox="1"/>
+            <p:nvPr/>
+          </p:nvSpPr>
+          <p:spPr>
+            <a:xfrm>
+              <a:off x="1042416" y="3858768"/>
+              <a:ext cx="731520" cy="182880"/>
+            </a:xfrm>
+            <a:prstGeom prst="rect">
+              <a:avLst/>
+            </a:prstGeom>
+            <a:noFill/>
+          </p:spPr>
+          <p:txBody>
+            <a:bodyPr wrap="none" lIns="0" rIns="0" tIns="0" bIns="0" anchor="ctr">
+              <a:noAutofit/>
+            </a:bodyPr>
+            <a:lstStyle/>
+            <a:p>
+              <a:pPr algn="ctr"/>
+              <a:r>
+                <a:rPr sz="950" b="0" i="0">
+                  <a:solidFill>
+                    <a:srgbClr val="595959"/>
+                  </a:solidFill>
+                  <a:latin typeface="Times New Roman"/>
+                  <a:ea typeface="Times New Roman"/>
+                  <a:cs typeface="Times New Roman"/>
+                </a:rPr>
+                <a:t>Logistics</a:t>
+              </a:r>
+            </a:p>
+          </p:txBody>
+        </p:sp>
+        <p:pic>
+          <p:nvPicPr>
+            <p:cNvPr id="22" name="Picture 21" descr="tensor_0.png"/>
+            <p:cNvPicPr>
+              <a:picLocks noChangeAspect="1"/>
+            </p:cNvPicPr>
+            <p:nvPr/>
+          </p:nvPicPr>
+          <p:blipFill>
+            <a:blip r:embed="rId7"/>
+            <a:stretch>
+              <a:fillRect/>
+            </a:stretch>
+          </p:blipFill>
+          <p:spPr>
+            <a:xfrm>
+              <a:off x="2203704" y="2596896"/>
+              <a:ext cx="1207008" cy="914400"/>
+            </a:xfrm>
+            <a:prstGeom prst="rect">
+              <a:avLst/>
+            </a:prstGeom>
+          </p:spPr>
+        </p:pic>
+        <p:sp>
+          <p:nvSpPr>
+            <p:cNvPr id="23" name="Rectangle 22"/>
+            <p:cNvSpPr/>
+            <p:nvPr/>
+          </p:nvSpPr>
+          <p:spPr>
+            <a:xfrm>
+              <a:off x="2203704" y="2596896"/>
+              <a:ext cx="1207008" cy="914400"/>
+            </a:xfrm>
+            <a:prstGeom prst="rect">
+              <a:avLst/>
+            </a:prstGeom>
+            <a:noFill/>
+            <a:ln w="7620">
+              <a:solidFill>
+                <a:srgbClr val="595959"/>
+              </a:solidFill>
+            </a:ln>
+            <a:effectLst/>
+          </p:spPr>
+          <p:style>
+            <a:lnRef idx="1">
+              <a:schemeClr val="accent1"/>
+            </a:lnRef>
+            <a:fillRef idx="3">
+              <a:schemeClr val="accent1"/>
+            </a:fillRef>
+            <a:effectRef idx="2">
+              <a:schemeClr val="accent1"/>
+            </a:effectRef>
+            <a:fontRef idx="minor">
+              <a:schemeClr val="lt1"/>
+            </a:fontRef>
+          </p:style>
+          <p:txBody>
+            <a:bodyPr rtlCol="0" anchor="ctr"/>
+            <a:lstStyle/>
+            <a:p>
+              <a:pPr algn="ctr"/>
+            </a:p>
+          </p:txBody>
+        </p:sp>
+        <p:pic>
+          <p:nvPicPr>
+            <p:cNvPr id="24" name="Picture 23" descr="tensor_1.png"/>
+            <p:cNvPicPr>
+              <a:picLocks noChangeAspect="1"/>
+            </p:cNvPicPr>
+            <p:nvPr/>
+          </p:nvPicPr>
+          <p:blipFill>
+            <a:blip r:embed="rId8"/>
+            <a:stretch>
+              <a:fillRect/>
+            </a:stretch>
+          </p:blipFill>
+          <p:spPr>
+            <a:xfrm>
+              <a:off x="2130552" y="2670048"/>
+              <a:ext cx="1207008" cy="914400"/>
+            </a:xfrm>
+            <a:prstGeom prst="rect">
+              <a:avLst/>
+            </a:prstGeom>
+          </p:spPr>
+        </p:pic>
+        <p:sp>
+          <p:nvSpPr>
+            <p:cNvPr id="25" name="Rectangle 24"/>
+            <p:cNvSpPr/>
+            <p:nvPr/>
+          </p:nvSpPr>
+          <p:spPr>
+            <a:xfrm>
+              <a:off x="2130552" y="2670048"/>
+              <a:ext cx="1207008" cy="914400"/>
+            </a:xfrm>
+            <a:prstGeom prst="rect">
+              <a:avLst/>
+            </a:prstGeom>
+            <a:noFill/>
+            <a:ln w="7620">
+              <a:solidFill>
+                <a:srgbClr val="595959"/>
+              </a:solidFill>
+            </a:ln>
+            <a:effectLst/>
+          </p:spPr>
+          <p:style>
+            <a:lnRef idx="1">
+              <a:schemeClr val="accent1"/>
+            </a:lnRef>
+            <a:fillRef idx="3">
+              <a:schemeClr val="accent1"/>
+            </a:fillRef>
+            <a:effectRef idx="2">
+              <a:schemeClr val="accent1"/>
+            </a:effectRef>
+            <a:fontRef idx="minor">
+              <a:schemeClr val="lt1"/>
+            </a:fontRef>
+          </p:style>
+          <p:txBody>
+            <a:bodyPr rtlCol="0" anchor="ctr"/>
+            <a:lstStyle/>
+            <a:p>
+              <a:pPr algn="ctr"/>
+            </a:p>
+          </p:txBody>
+        </p:sp>
+        <p:pic>
+          <p:nvPicPr>
+            <p:cNvPr id="26" name="Picture 25" descr="tensor_2.png"/>
+            <p:cNvPicPr>
+              <a:picLocks noChangeAspect="1"/>
+            </p:cNvPicPr>
+            <p:nvPr/>
+          </p:nvPicPr>
+          <p:blipFill>
+            <a:blip r:embed="rId9"/>
+            <a:stretch>
+              <a:fillRect/>
+            </a:stretch>
+          </p:blipFill>
+          <p:spPr>
+            <a:xfrm>
               <a:off x="2057400" y="2743200"/>
               <a:ext cx="1207008" cy="914400"/>
             </a:xfrm>
@@ -3888,7 +4376,7 @@
             <a:noFill/>
           </p:spPr>
           <p:txBody>
-            <a:bodyPr wrap="none" lIns="0" tIns="0" rIns="0" bIns="0" anchor="ctr">
+            <a:bodyPr wrap="none" lIns="0" rIns="0" tIns="0" bIns="0" anchor="ctr">
               <a:noAutofit/>
             </a:bodyPr>
             <a:lstStyle/>
@@ -3899,7 +4387,9 @@
                   <a:solidFill>
                     <a:srgbClr val="262626"/>
                   </a:solidFill>
-                  <a:latin typeface="Arial" panose="020B0604020202020204"/>
+                  <a:latin typeface="Times New Roman"/>
+                  <a:ea typeface="Times New Roman"/>
+                  <a:cs typeface="Times New Roman"/>
                 </a:rPr>
                 <a:t>X</a:t>
               </a:r>
@@ -3908,7 +4398,9 @@
                   <a:solidFill>
                     <a:srgbClr val="262626"/>
                   </a:solidFill>
-                  <a:latin typeface="Arial" panose="020B0604020202020204"/>
+                  <a:latin typeface="Times New Roman"/>
+                  <a:ea typeface="Times New Roman"/>
+                  <a:cs typeface="Times New Roman"/>
                 </a:rPr>
                 <a:t>t</a:t>
               </a:r>
@@ -3917,7 +4409,9 @@
                   <a:solidFill>
                     <a:srgbClr val="262626"/>
                   </a:solidFill>
-                  <a:latin typeface="Arial" panose="020B0604020202020204"/>
+                  <a:latin typeface="Times New Roman"/>
+                  <a:ea typeface="Times New Roman"/>
+                  <a:cs typeface="Times New Roman"/>
                 </a:rPr>
                 <a:t> </a:t>
               </a:r>
@@ -3926,25 +4420,34 @@
                   <a:solidFill>
                     <a:srgbClr val="262626"/>
                   </a:solidFill>
-                  <a:latin typeface="Cambria Math" panose="02040503050406030204"/>
+                  <a:latin typeface="Cambria Math"/>
+                  <a:ea typeface="Cambria Math"/>
+                  <a:cs typeface="Cambria Math"/>
                 </a:rPr>
-                <a:t>∈ ℝ</a:t>
+                <a:t>∈</a:t>
+              </a:r>
+              <a:r>
+                <a:rPr sz="1050" b="0" i="0">
+                  <a:solidFill>
+                    <a:srgbClr val="262626"/>
+                  </a:solidFill>
+                  <a:latin typeface="Times New Roman"/>
+                  <a:ea typeface="Times New Roman"/>
+                  <a:cs typeface="Times New Roman"/>
+                </a:rPr>
+                <a:t> ℝ</a:t>
               </a:r>
               <a:r>
                 <a:rPr sz="1050" b="0" i="0" baseline="30000">
                   <a:solidFill>
                     <a:srgbClr val="262626"/>
                   </a:solidFill>
-                  <a:latin typeface="Arial" panose="020B0604020202020204"/>
+                  <a:latin typeface="Times New Roman"/>
+                  <a:ea typeface="Times New Roman"/>
+                  <a:cs typeface="Times New Roman"/>
                 </a:rPr>
                 <a:t>30×38×27</a:t>
               </a:r>
-              <a:endParaRPr sz="1050" b="0" i="0" baseline="30000">
-                <a:solidFill>
-                  <a:srgbClr val="262626"/>
-                </a:solidFill>
-                <a:latin typeface="Arial" panose="020B0604020202020204"/>
-              </a:endParaRPr>
             </a:p>
           </p:txBody>
         </p:sp>
@@ -3965,7 +4468,7 @@
             <a:noFill/>
           </p:spPr>
           <p:txBody>
-            <a:bodyPr wrap="none" lIns="0" tIns="0" rIns="0" bIns="0" anchor="ctr">
+            <a:bodyPr wrap="none" lIns="0" rIns="0" tIns="0" bIns="0" anchor="ctr">
               <a:noAutofit/>
             </a:bodyPr>
             <a:lstStyle/>
@@ -3976,16 +4479,12 @@
                   <a:solidFill>
                     <a:srgbClr val="595959"/>
                   </a:solidFill>
-                  <a:latin typeface="Arial" panose="020B0604020202020204"/>
+                  <a:latin typeface="Times New Roman"/>
+                  <a:ea typeface="Times New Roman"/>
+                  <a:cs typeface="Times New Roman"/>
                 </a:rPr>
                 <a:t>resources × minutes × features</a:t>
               </a:r>
-              <a:endParaRPr sz="850" b="0" i="0">
-                <a:solidFill>
-                  <a:srgbClr val="595959"/>
-                </a:solidFill>
-                <a:latin typeface="Arial" panose="020B0604020202020204"/>
-              </a:endParaRPr>
             </a:p>
           </p:txBody>
         </p:sp>
@@ -4116,7 +4615,7 @@
             <a:noFill/>
           </p:spPr>
           <p:txBody>
-            <a:bodyPr wrap="none" lIns="0" tIns="0" rIns="0" bIns="0" anchor="ctr">
+            <a:bodyPr wrap="none" lIns="0" rIns="0" tIns="0" bIns="0" anchor="ctr">
               <a:noAutofit/>
             </a:bodyPr>
             <a:lstStyle/>
@@ -4127,16 +4626,23 @@
                   <a:solidFill>
                     <a:srgbClr val="FFFFFF"/>
                   </a:solidFill>
-                  <a:latin typeface="Arial" panose="020B0604020202020204"/>
+                  <a:latin typeface="Times New Roman"/>
+                  <a:ea typeface="Times New Roman"/>
+                  <a:cs typeface="Times New Roman"/>
                 </a:rPr>
-                <a:t>Multi-entity heterogeneous graph</a:t>
+                <a:t>Contribution 1</a:t>
               </a:r>
-              <a:endParaRPr sz="1150" b="1" i="0">
-                <a:solidFill>
-                  <a:srgbClr val="FFFFFF"/>
-                </a:solidFill>
-                <a:latin typeface="Arial" panose="020B0604020202020204"/>
-              </a:endParaRPr>
+              <a:r>
+                <a:rPr sz="1150" b="1" i="0">
+                  <a:solidFill>
+                    <a:srgbClr val="FFFFFF"/>
+                  </a:solidFill>
+                  <a:latin typeface="Times New Roman"/>
+                  <a:ea typeface="Times New Roman"/>
+                  <a:cs typeface="Times New Roman"/>
+                </a:rPr>
+                <a:t>  ·  Multi-entity heterogeneous graph</a:t>
+              </a:r>
             </a:p>
           </p:txBody>
         </p:sp>
@@ -4205,7 +4711,7 @@
             <a:noFill/>
           </p:spPr>
           <p:txBody>
-            <a:bodyPr wrap="none" lIns="0" tIns="0" rIns="0" bIns="0" anchor="ctr">
+            <a:bodyPr wrap="none" lIns="0" rIns="0" tIns="0" bIns="0" anchor="ctr">
               <a:noAutofit/>
             </a:bodyPr>
             <a:lstStyle/>
@@ -4216,7 +4722,9 @@
                   <a:solidFill>
                     <a:srgbClr val="CB001C"/>
                   </a:solidFill>
-                  <a:latin typeface="Segoe UI Symbol" panose="020B0502040204020203"/>
+                  <a:latin typeface="Segoe UI Symbol"/>
+                  <a:ea typeface="Segoe UI Symbol"/>
+                  <a:cs typeface="Segoe UI Symbol"/>
                 </a:rPr>
                 <a:t>✕ </a:t>
               </a:r>
@@ -4225,16 +4733,12 @@
                   <a:solidFill>
                     <a:srgbClr val="595959"/>
                   </a:solidFill>
-                  <a:latin typeface="Arial" panose="020B0604020202020204"/>
+                  <a:latin typeface="Times New Roman"/>
+                  <a:ea typeface="Times New Roman"/>
+                  <a:cs typeface="Times New Roman"/>
                 </a:rPr>
                 <a:t>Prior work</a:t>
               </a:r>
-              <a:endParaRPr sz="1000" b="1" i="0">
-                <a:solidFill>
-                  <a:srgbClr val="595959"/>
-                </a:solidFill>
-                <a:latin typeface="Arial" panose="020B0604020202020204"/>
-              </a:endParaRPr>
             </a:p>
           </p:txBody>
         </p:sp>
@@ -4428,7 +4932,7 @@
             <a:noFill/>
           </p:spPr>
           <p:txBody>
-            <a:bodyPr wrap="none" lIns="0" tIns="0" rIns="0" bIns="0" anchor="ctr">
+            <a:bodyPr wrap="none" lIns="0" rIns="0" tIns="0" bIns="0" anchor="ctr">
               <a:noAutofit/>
             </a:bodyPr>
             <a:lstStyle/>
@@ -4439,16 +4943,12 @@
                   <a:solidFill>
                     <a:srgbClr val="595959"/>
                   </a:solidFill>
-                  <a:latin typeface="Arial" panose="020B0604020202020204"/>
+                  <a:latin typeface="Times New Roman"/>
+                  <a:ea typeface="Times New Roman"/>
+                  <a:cs typeface="Times New Roman"/>
                 </a:rPr>
                 <a:t>machine-only nodes</a:t>
               </a:r>
-              <a:endParaRPr sz="950" b="0" i="0">
-                <a:solidFill>
-                  <a:srgbClr val="595959"/>
-                </a:solidFill>
-                <a:latin typeface="Arial" panose="020B0604020202020204"/>
-              </a:endParaRPr>
             </a:p>
           </p:txBody>
         </p:sp>
@@ -4553,7 +5053,7 @@
             <a:noFill/>
           </p:spPr>
           <p:txBody>
-            <a:bodyPr wrap="none" lIns="0" tIns="0" rIns="0" bIns="0" anchor="ctr">
+            <a:bodyPr wrap="none" lIns="0" rIns="0" tIns="0" bIns="0" anchor="ctr">
               <a:noAutofit/>
             </a:bodyPr>
             <a:lstStyle/>
@@ -4564,7 +5064,9 @@
                   <a:solidFill>
                     <a:srgbClr val="3D6EB4"/>
                   </a:solidFill>
-                  <a:latin typeface="Segoe UI Symbol" panose="020B0502040204020203"/>
+                  <a:latin typeface="Segoe UI Symbol"/>
+                  <a:ea typeface="Segoe UI Symbol"/>
+                  <a:cs typeface="Segoe UI Symbol"/>
                 </a:rPr>
                 <a:t>✓ </a:t>
               </a:r>
@@ -4573,16 +5075,12 @@
                   <a:solidFill>
                     <a:srgbClr val="3D6EB4"/>
                   </a:solidFill>
-                  <a:latin typeface="Arial" panose="020B0604020202020204"/>
+                  <a:latin typeface="Times New Roman"/>
+                  <a:ea typeface="Times New Roman"/>
+                  <a:cs typeface="Times New Roman"/>
                 </a:rPr>
-                <a:t>PHAST-DP</a:t>
+                <a:t>PHGST-DP</a:t>
               </a:r>
-              <a:endParaRPr sz="1000" b="1" i="0">
-                <a:solidFill>
-                  <a:srgbClr val="3D6EB4"/>
-                </a:solidFill>
-                <a:latin typeface="Arial" panose="020B0604020202020204"/>
-              </a:endParaRPr>
             </a:p>
           </p:txBody>
         </p:sp>
@@ -5223,7 +5721,7 @@
             <a:noFill/>
           </p:spPr>
           <p:txBody>
-            <a:bodyPr wrap="none" lIns="0" tIns="0" rIns="0" bIns="0" anchor="ctr">
+            <a:bodyPr wrap="none" lIns="0" rIns="0" tIns="0" bIns="0" anchor="ctr">
               <a:noAutofit/>
             </a:bodyPr>
             <a:lstStyle/>
@@ -5234,16 +5732,12 @@
                   <a:solidFill>
                     <a:srgbClr val="3D6EB4"/>
                   </a:solidFill>
-                  <a:latin typeface="Arial" panose="020B0604020202020204"/>
+                  <a:latin typeface="Times New Roman"/>
+                  <a:ea typeface="Times New Roman"/>
+                  <a:cs typeface="Times New Roman"/>
                 </a:rPr>
                 <a:t>5 entity types, typed edges</a:t>
               </a:r>
-              <a:endParaRPr sz="950" b="1" i="0">
-                <a:solidFill>
-                  <a:srgbClr val="3D6EB4"/>
-                </a:solidFill>
-                <a:latin typeface="Arial" panose="020B0604020202020204"/>
-              </a:endParaRPr>
             </a:p>
           </p:txBody>
         </p:sp>
@@ -6789,7 +7283,7 @@
             <a:noFill/>
           </p:spPr>
           <p:txBody>
-            <a:bodyPr wrap="none" lIns="0" tIns="0" rIns="0" bIns="0" anchor="ctr">
+            <a:bodyPr wrap="none" lIns="0" rIns="0" tIns="0" bIns="0" anchor="ctr">
               <a:noAutofit/>
             </a:bodyPr>
             <a:lstStyle/>
@@ -6800,7 +7294,9 @@
                   <a:solidFill>
                     <a:srgbClr val="595959"/>
                   </a:solidFill>
-                  <a:latin typeface="Arial" panose="020B0604020202020204"/>
+                  <a:latin typeface="Times New Roman"/>
+                  <a:ea typeface="Times New Roman"/>
+                  <a:cs typeface="Times New Roman"/>
                 </a:rPr>
                 <a:t>M</a:t>
               </a:r>
@@ -6809,7 +7305,9 @@
                   <a:solidFill>
                     <a:srgbClr val="595959"/>
                   </a:solidFill>
-                  <a:latin typeface="Arial" panose="020B0604020202020204"/>
+                  <a:latin typeface="Times New Roman"/>
+                  <a:ea typeface="Times New Roman"/>
+                  <a:cs typeface="Times New Roman"/>
                 </a:rPr>
                 <a:t>G</a:t>
               </a:r>
@@ -6818,16 +7316,12 @@
                   <a:solidFill>
                     <a:srgbClr val="595959"/>
                   </a:solidFill>
-                  <a:latin typeface="Arial" panose="020B0604020202020204"/>
+                  <a:latin typeface="Times New Roman"/>
+                  <a:ea typeface="Times New Roman"/>
+                  <a:cs typeface="Times New Roman"/>
                 </a:rPr>
                 <a:t>: &lt; 4-hop neighbours</a:t>
               </a:r>
-              <a:endParaRPr sz="950" b="0" i="0">
-                <a:solidFill>
-                  <a:srgbClr val="595959"/>
-                </a:solidFill>
-                <a:latin typeface="Arial" panose="020B0604020202020204"/>
-              </a:endParaRPr>
             </a:p>
           </p:txBody>
         </p:sp>
@@ -6848,7 +7342,7 @@
             <a:noFill/>
           </p:spPr>
           <p:txBody>
-            <a:bodyPr wrap="none" lIns="0" tIns="0" rIns="0" bIns="0" anchor="ctr">
+            <a:bodyPr wrap="none" lIns="0" rIns="0" tIns="0" bIns="0" anchor="ctr">
               <a:noAutofit/>
             </a:bodyPr>
             <a:lstStyle/>
@@ -6859,7 +7353,9 @@
                   <a:solidFill>
                     <a:srgbClr val="595959"/>
                   </a:solidFill>
-                  <a:latin typeface="Arial" panose="020B0604020202020204"/>
+                  <a:latin typeface="Times New Roman"/>
+                  <a:ea typeface="Times New Roman"/>
+                  <a:cs typeface="Times New Roman"/>
                 </a:rPr>
                 <a:t>M</a:t>
               </a:r>
@@ -6868,7 +7364,9 @@
                   <a:solidFill>
                     <a:srgbClr val="595959"/>
                   </a:solidFill>
-                  <a:latin typeface="Arial" panose="020B0604020202020204"/>
+                  <a:latin typeface="Times New Roman"/>
+                  <a:ea typeface="Times New Roman"/>
+                  <a:cs typeface="Times New Roman"/>
                 </a:rPr>
                 <a:t>S</a:t>
               </a:r>
@@ -6877,16 +7375,12 @@
                   <a:solidFill>
                     <a:srgbClr val="595959"/>
                   </a:solidFill>
-                  <a:latin typeface="Arial" panose="020B0604020202020204"/>
+                  <a:latin typeface="Times New Roman"/>
+                  <a:ea typeface="Times New Roman"/>
+                  <a:cs typeface="Times New Roman"/>
                 </a:rPr>
                 <a:t>: top-5 trajectory correlation</a:t>
               </a:r>
-              <a:endParaRPr sz="950" b="0" i="0">
-                <a:solidFill>
-                  <a:srgbClr val="595959"/>
-                </a:solidFill>
-                <a:latin typeface="Arial" panose="020B0604020202020204"/>
-              </a:endParaRPr>
             </a:p>
           </p:txBody>
         </p:sp>
@@ -8343,7 +8837,7 @@
             <a:noFill/>
           </p:spPr>
           <p:txBody>
-            <a:bodyPr wrap="none" lIns="0" tIns="0" rIns="0" bIns="0" anchor="ctr">
+            <a:bodyPr wrap="none" lIns="0" rIns="0" tIns="0" bIns="0" anchor="ctr">
               <a:noAutofit/>
             </a:bodyPr>
             <a:lstStyle/>
@@ -8354,16 +8848,12 @@
                   <a:solidFill>
                     <a:srgbClr val="FFFFFF"/>
                   </a:solidFill>
-                  <a:latin typeface="Arial" panose="020B0604020202020204"/>
+                  <a:latin typeface="Times New Roman"/>
+                  <a:ea typeface="Times New Roman"/>
+                  <a:cs typeface="Times New Roman"/>
                 </a:rPr>
                 <a:t>M1</a:t>
               </a:r>
-              <a:endParaRPr sz="850" b="1" i="0">
-                <a:solidFill>
-                  <a:srgbClr val="FFFFFF"/>
-                </a:solidFill>
-                <a:latin typeface="Arial" panose="020B0604020202020204"/>
-              </a:endParaRPr>
             </a:p>
           </p:txBody>
         </p:sp>
@@ -8430,7 +8920,7 @@
             <a:noFill/>
           </p:spPr>
           <p:txBody>
-            <a:bodyPr wrap="none" lIns="0" tIns="0" rIns="0" bIns="0" anchor="ctr">
+            <a:bodyPr wrap="none" lIns="0" rIns="0" tIns="0" bIns="0" anchor="ctr">
               <a:noAutofit/>
             </a:bodyPr>
             <a:lstStyle/>
@@ -8441,16 +8931,12 @@
                   <a:solidFill>
                     <a:srgbClr val="FFFFFF"/>
                   </a:solidFill>
-                  <a:latin typeface="Arial" panose="020B0604020202020204"/>
+                  <a:latin typeface="Times New Roman"/>
+                  <a:ea typeface="Times New Roman"/>
+                  <a:cs typeface="Times New Roman"/>
                 </a:rPr>
                 <a:t>M2</a:t>
               </a:r>
-              <a:endParaRPr sz="850" b="1" i="0">
-                <a:solidFill>
-                  <a:srgbClr val="FFFFFF"/>
-                </a:solidFill>
-                <a:latin typeface="Arial" panose="020B0604020202020204"/>
-              </a:endParaRPr>
             </a:p>
           </p:txBody>
         </p:sp>
@@ -8517,7 +9003,7 @@
             <a:noFill/>
           </p:spPr>
           <p:txBody>
-            <a:bodyPr wrap="none" lIns="0" tIns="0" rIns="0" bIns="0" anchor="ctr">
+            <a:bodyPr wrap="none" lIns="0" rIns="0" tIns="0" bIns="0" anchor="ctr">
               <a:noAutofit/>
             </a:bodyPr>
             <a:lstStyle/>
@@ -8528,16 +9014,12 @@
                   <a:solidFill>
                     <a:srgbClr val="FFFFFF"/>
                   </a:solidFill>
-                  <a:latin typeface="Arial" panose="020B0604020202020204"/>
+                  <a:latin typeface="Times New Roman"/>
+                  <a:ea typeface="Times New Roman"/>
+                  <a:cs typeface="Times New Roman"/>
                 </a:rPr>
                 <a:t>M3</a:t>
               </a:r>
-              <a:endParaRPr sz="850" b="1" i="0">
-                <a:solidFill>
-                  <a:srgbClr val="FFFFFF"/>
-                </a:solidFill>
-                <a:latin typeface="Arial" panose="020B0604020202020204"/>
-              </a:endParaRPr>
             </a:p>
           </p:txBody>
         </p:sp>
@@ -8604,7 +9086,7 @@
             <a:noFill/>
           </p:spPr>
           <p:txBody>
-            <a:bodyPr wrap="none" lIns="0" tIns="0" rIns="0" bIns="0" anchor="ctr">
+            <a:bodyPr wrap="none" lIns="0" rIns="0" tIns="0" bIns="0" anchor="ctr">
               <a:noAutofit/>
             </a:bodyPr>
             <a:lstStyle/>
@@ -8615,16 +9097,12 @@
                   <a:solidFill>
                     <a:srgbClr val="FFFFFF"/>
                   </a:solidFill>
-                  <a:latin typeface="Arial" panose="020B0604020202020204"/>
+                  <a:latin typeface="Times New Roman"/>
+                  <a:ea typeface="Times New Roman"/>
+                  <a:cs typeface="Times New Roman"/>
                 </a:rPr>
                 <a:t>M4</a:t>
               </a:r>
-              <a:endParaRPr sz="850" b="1" i="0">
-                <a:solidFill>
-                  <a:srgbClr val="FFFFFF"/>
-                </a:solidFill>
-                <a:latin typeface="Arial" panose="020B0604020202020204"/>
-              </a:endParaRPr>
             </a:p>
           </p:txBody>
         </p:sp>
@@ -8691,7 +9169,7 @@
             <a:noFill/>
           </p:spPr>
           <p:txBody>
-            <a:bodyPr wrap="none" lIns="0" tIns="0" rIns="0" bIns="0" anchor="ctr">
+            <a:bodyPr wrap="none" lIns="0" rIns="0" tIns="0" bIns="0" anchor="ctr">
               <a:noAutofit/>
             </a:bodyPr>
             <a:lstStyle/>
@@ -8702,16 +9180,12 @@
                   <a:solidFill>
                     <a:srgbClr val="FFFFFF"/>
                   </a:solidFill>
-                  <a:latin typeface="Arial" panose="020B0604020202020204"/>
+                  <a:latin typeface="Times New Roman"/>
+                  <a:ea typeface="Times New Roman"/>
+                  <a:cs typeface="Times New Roman"/>
                 </a:rPr>
                 <a:t>M5</a:t>
               </a:r>
-              <a:endParaRPr sz="850" b="1" i="0">
-                <a:solidFill>
-                  <a:srgbClr val="FFFFFF"/>
-                </a:solidFill>
-                <a:latin typeface="Arial" panose="020B0604020202020204"/>
-              </a:endParaRPr>
             </a:p>
           </p:txBody>
         </p:sp>
@@ -8778,7 +9252,7 @@
             <a:noFill/>
           </p:spPr>
           <p:txBody>
-            <a:bodyPr wrap="none" lIns="0" tIns="0" rIns="0" bIns="0" anchor="ctr">
+            <a:bodyPr wrap="none" lIns="0" rIns="0" tIns="0" bIns="0" anchor="ctr">
               <a:noAutofit/>
             </a:bodyPr>
             <a:lstStyle/>
@@ -8789,16 +9263,12 @@
                   <a:solidFill>
                     <a:srgbClr val="FFFFFF"/>
                   </a:solidFill>
-                  <a:latin typeface="Arial" panose="020B0604020202020204"/>
+                  <a:latin typeface="Times New Roman"/>
+                  <a:ea typeface="Times New Roman"/>
+                  <a:cs typeface="Times New Roman"/>
                 </a:rPr>
                 <a:t>M6</a:t>
               </a:r>
-              <a:endParaRPr sz="850" b="1" i="0">
-                <a:solidFill>
-                  <a:srgbClr val="FFFFFF"/>
-                </a:solidFill>
-                <a:latin typeface="Arial" panose="020B0604020202020204"/>
-              </a:endParaRPr>
             </a:p>
           </p:txBody>
         </p:sp>
@@ -8865,7 +9335,7 @@
             <a:noFill/>
           </p:spPr>
           <p:txBody>
-            <a:bodyPr wrap="none" lIns="0" tIns="0" rIns="0" bIns="0" anchor="ctr">
+            <a:bodyPr wrap="none" lIns="0" rIns="0" tIns="0" bIns="0" anchor="ctr">
               <a:noAutofit/>
             </a:bodyPr>
             <a:lstStyle/>
@@ -8876,16 +9346,12 @@
                   <a:solidFill>
                     <a:srgbClr val="FFFFFF"/>
                   </a:solidFill>
-                  <a:latin typeface="Arial" panose="020B0604020202020204"/>
+                  <a:latin typeface="Times New Roman"/>
+                  <a:ea typeface="Times New Roman"/>
+                  <a:cs typeface="Times New Roman"/>
                 </a:rPr>
                 <a:t>M7</a:t>
               </a:r>
-              <a:endParaRPr sz="850" b="1" i="0">
-                <a:solidFill>
-                  <a:srgbClr val="FFFFFF"/>
-                </a:solidFill>
-                <a:latin typeface="Arial" panose="020B0604020202020204"/>
-              </a:endParaRPr>
             </a:p>
           </p:txBody>
         </p:sp>
@@ -8950,7 +9416,7 @@
             <a:noFill/>
           </p:spPr>
           <p:txBody>
-            <a:bodyPr wrap="none" lIns="0" tIns="0" rIns="0" bIns="0" anchor="ctr">
+            <a:bodyPr wrap="none" lIns="0" rIns="0" tIns="0" bIns="0" anchor="ctr">
               <a:noAutofit/>
             </a:bodyPr>
             <a:lstStyle/>
@@ -8961,16 +9427,12 @@
                   <a:solidFill>
                     <a:srgbClr val="595959"/>
                   </a:solidFill>
-                  <a:latin typeface="Arial" panose="020B0604020202020204"/>
+                  <a:latin typeface="Times New Roman"/>
+                  <a:ea typeface="Times New Roman"/>
+                  <a:cs typeface="Times New Roman"/>
                 </a:rPr>
                 <a:t>machine</a:t>
               </a:r>
-              <a:endParaRPr sz="950" b="0" i="0">
-                <a:solidFill>
-                  <a:srgbClr val="595959"/>
-                </a:solidFill>
-                <a:latin typeface="Arial" panose="020B0604020202020204"/>
-              </a:endParaRPr>
             </a:p>
           </p:txBody>
         </p:sp>
@@ -9035,7 +9497,7 @@
             <a:noFill/>
           </p:spPr>
           <p:txBody>
-            <a:bodyPr wrap="none" lIns="0" tIns="0" rIns="0" bIns="0" anchor="ctr">
+            <a:bodyPr wrap="none" lIns="0" rIns="0" tIns="0" bIns="0" anchor="ctr">
               <a:noAutofit/>
             </a:bodyPr>
             <a:lstStyle/>
@@ -9046,16 +9508,12 @@
                   <a:solidFill>
                     <a:srgbClr val="595959"/>
                   </a:solidFill>
-                  <a:latin typeface="Arial" panose="020B0604020202020204"/>
+                  <a:latin typeface="Times New Roman"/>
+                  <a:ea typeface="Times New Roman"/>
+                  <a:cs typeface="Times New Roman"/>
                 </a:rPr>
                 <a:t>gantry</a:t>
               </a:r>
-              <a:endParaRPr sz="950" b="0" i="0">
-                <a:solidFill>
-                  <a:srgbClr val="595959"/>
-                </a:solidFill>
-                <a:latin typeface="Arial" panose="020B0604020202020204"/>
-              </a:endParaRPr>
             </a:p>
           </p:txBody>
         </p:sp>
@@ -9122,7 +9580,7 @@
             <a:noFill/>
           </p:spPr>
           <p:txBody>
-            <a:bodyPr wrap="none" lIns="0" tIns="0" rIns="0" bIns="0" anchor="ctr">
+            <a:bodyPr wrap="none" lIns="0" rIns="0" tIns="0" bIns="0" anchor="ctr">
               <a:noAutofit/>
             </a:bodyPr>
             <a:lstStyle/>
@@ -9133,16 +9591,12 @@
                   <a:solidFill>
                     <a:srgbClr val="595959"/>
                   </a:solidFill>
-                  <a:latin typeface="Arial" panose="020B0604020202020204"/>
+                  <a:latin typeface="Times New Roman"/>
+                  <a:ea typeface="Times New Roman"/>
+                  <a:cs typeface="Times New Roman"/>
                 </a:rPr>
                 <a:t>robot</a:t>
               </a:r>
-              <a:endParaRPr sz="950" b="0" i="0">
-                <a:solidFill>
-                  <a:srgbClr val="595959"/>
-                </a:solidFill>
-                <a:latin typeface="Arial" panose="020B0604020202020204"/>
-              </a:endParaRPr>
             </a:p>
           </p:txBody>
         </p:sp>
@@ -9207,7 +9661,7 @@
             <a:noFill/>
           </p:spPr>
           <p:txBody>
-            <a:bodyPr wrap="none" lIns="0" tIns="0" rIns="0" bIns="0" anchor="ctr">
+            <a:bodyPr wrap="none" lIns="0" rIns="0" tIns="0" bIns="0" anchor="ctr">
               <a:noAutofit/>
             </a:bodyPr>
             <a:lstStyle/>
@@ -9218,16 +9672,12 @@
                   <a:solidFill>
                     <a:srgbClr val="595959"/>
                   </a:solidFill>
-                  <a:latin typeface="Arial" panose="020B0604020202020204"/>
+                  <a:latin typeface="Times New Roman"/>
+                  <a:ea typeface="Times New Roman"/>
+                  <a:cs typeface="Times New Roman"/>
                 </a:rPr>
                 <a:t>human</a:t>
               </a:r>
-              <a:endParaRPr sz="950" b="0" i="0">
-                <a:solidFill>
-                  <a:srgbClr val="595959"/>
-                </a:solidFill>
-                <a:latin typeface="Arial" panose="020B0604020202020204"/>
-              </a:endParaRPr>
             </a:p>
           </p:txBody>
         </p:sp>
@@ -9292,7 +9742,7 @@
             <a:noFill/>
           </p:spPr>
           <p:txBody>
-            <a:bodyPr wrap="none" lIns="0" tIns="0" rIns="0" bIns="0" anchor="ctr">
+            <a:bodyPr wrap="none" lIns="0" rIns="0" tIns="0" bIns="0" anchor="ctr">
               <a:noAutofit/>
             </a:bodyPr>
             <a:lstStyle/>
@@ -9303,16 +9753,12 @@
                   <a:solidFill>
                     <a:srgbClr val="595959"/>
                   </a:solidFill>
-                  <a:latin typeface="Arial" panose="020B0604020202020204"/>
+                  <a:latin typeface="Times New Roman"/>
+                  <a:ea typeface="Times New Roman"/>
+                  <a:cs typeface="Times New Roman"/>
                 </a:rPr>
                 <a:t>buffer</a:t>
               </a:r>
-              <a:endParaRPr sz="950" b="0" i="0">
-                <a:solidFill>
-                  <a:srgbClr val="595959"/>
-                </a:solidFill>
-                <a:latin typeface="Arial" panose="020B0604020202020204"/>
-              </a:endParaRPr>
             </a:p>
           </p:txBody>
         </p:sp>
@@ -9368,7 +9814,7 @@
             <a:noFill/>
           </p:spPr>
           <p:txBody>
-            <a:bodyPr wrap="none" lIns="0" tIns="0" rIns="0" bIns="0" anchor="ctr">
+            <a:bodyPr wrap="none" lIns="0" rIns="0" tIns="0" bIns="0" anchor="ctr">
               <a:noAutofit/>
             </a:bodyPr>
             <a:lstStyle/>
@@ -9379,16 +9825,12 @@
                   <a:solidFill>
                     <a:srgbClr val="595959"/>
                   </a:solidFill>
-                  <a:latin typeface="Arial" panose="020B0604020202020204"/>
+                  <a:latin typeface="Times New Roman"/>
+                  <a:ea typeface="Times New Roman"/>
+                  <a:cs typeface="Times New Roman"/>
                 </a:rPr>
                 <a:t>process</a:t>
               </a:r>
-              <a:endParaRPr sz="950" b="0" i="0">
-                <a:solidFill>
-                  <a:srgbClr val="595959"/>
-                </a:solidFill>
-                <a:latin typeface="Arial" panose="020B0604020202020204"/>
-              </a:endParaRPr>
             </a:p>
           </p:txBody>
         </p:sp>
@@ -9445,7 +9887,7 @@
             <a:noFill/>
           </p:spPr>
           <p:txBody>
-            <a:bodyPr wrap="none" lIns="0" tIns="0" rIns="0" bIns="0" anchor="ctr">
+            <a:bodyPr wrap="none" lIns="0" rIns="0" tIns="0" bIns="0" anchor="ctr">
               <a:noAutofit/>
             </a:bodyPr>
             <a:lstStyle/>
@@ -9456,16 +9898,12 @@
                   <a:solidFill>
                     <a:srgbClr val="595959"/>
                   </a:solidFill>
-                  <a:latin typeface="Arial" panose="020B0604020202020204"/>
+                  <a:latin typeface="Times New Roman"/>
+                  <a:ea typeface="Times New Roman"/>
+                  <a:cs typeface="Times New Roman"/>
                 </a:rPr>
                 <a:t>handling</a:t>
               </a:r>
-              <a:endParaRPr sz="950" b="0" i="0">
-                <a:solidFill>
-                  <a:srgbClr val="595959"/>
-                </a:solidFill>
-                <a:latin typeface="Arial" panose="020B0604020202020204"/>
-              </a:endParaRPr>
             </a:p>
           </p:txBody>
         </p:sp>
@@ -9522,7 +9960,7 @@
             <a:noFill/>
           </p:spPr>
           <p:txBody>
-            <a:bodyPr wrap="none" lIns="0" tIns="0" rIns="0" bIns="0" anchor="ctr">
+            <a:bodyPr wrap="none" lIns="0" rIns="0" tIns="0" bIns="0" anchor="ctr">
               <a:noAutofit/>
             </a:bodyPr>
             <a:lstStyle/>
@@ -9533,16 +9971,12 @@
                   <a:solidFill>
                     <a:srgbClr val="595959"/>
                   </a:solidFill>
-                  <a:latin typeface="Arial" panose="020B0604020202020204"/>
+                  <a:latin typeface="Times New Roman"/>
+                  <a:ea typeface="Times New Roman"/>
+                  <a:cs typeface="Times New Roman"/>
                 </a:rPr>
                 <a:t>weak</a:t>
               </a:r>
-              <a:endParaRPr sz="950" b="0" i="0">
-                <a:solidFill>
-                  <a:srgbClr val="595959"/>
-                </a:solidFill>
-                <a:latin typeface="Arial" panose="020B0604020202020204"/>
-              </a:endParaRPr>
             </a:p>
           </p:txBody>
         </p:sp>
@@ -9598,7 +10032,7 @@
             <a:noFill/>
           </p:spPr>
           <p:txBody>
-            <a:bodyPr wrap="none" lIns="0" tIns="0" rIns="0" bIns="0" anchor="ctr">
+            <a:bodyPr wrap="none" lIns="0" rIns="0" tIns="0" bIns="0" anchor="ctr">
               <a:noAutofit/>
             </a:bodyPr>
             <a:lstStyle/>
@@ -9609,16 +10043,12 @@
                   <a:solidFill>
                     <a:srgbClr val="595959"/>
                   </a:solidFill>
-                  <a:latin typeface="Arial" panose="020B0604020202020204"/>
+                  <a:latin typeface="Times New Roman"/>
+                  <a:ea typeface="Times New Roman"/>
+                  <a:cs typeface="Times New Roman"/>
                 </a:rPr>
                 <a:t>buffer link</a:t>
               </a:r>
-              <a:endParaRPr sz="950" b="0" i="0">
-                <a:solidFill>
-                  <a:srgbClr val="595959"/>
-                </a:solidFill>
-                <a:latin typeface="Arial" panose="020B0604020202020204"/>
-              </a:endParaRPr>
             </a:p>
           </p:txBody>
         </p:sp>
@@ -9749,7 +10179,7 @@
             <a:noFill/>
           </p:spPr>
           <p:txBody>
-            <a:bodyPr wrap="none" lIns="0" tIns="0" rIns="0" bIns="0" anchor="ctr">
+            <a:bodyPr wrap="none" lIns="0" rIns="0" tIns="0" bIns="0" anchor="ctr">
               <a:noAutofit/>
             </a:bodyPr>
             <a:lstStyle/>
@@ -9760,16 +10190,23 @@
                   <a:solidFill>
                     <a:srgbClr val="FFFFFF"/>
                   </a:solidFill>
-                  <a:latin typeface="Arial" panose="020B0604020202020204"/>
+                  <a:latin typeface="Times New Roman"/>
+                  <a:ea typeface="Times New Roman"/>
+                  <a:cs typeface="Times New Roman"/>
                 </a:rPr>
-                <a:t>Process-informed event labels</a:t>
+                <a:t>Contribution 2</a:t>
               </a:r>
-              <a:endParaRPr sz="1150" b="1" i="0">
-                <a:solidFill>
-                  <a:srgbClr val="FFFFFF"/>
-                </a:solidFill>
-                <a:latin typeface="Arial" panose="020B0604020202020204"/>
-              </a:endParaRPr>
+              <a:r>
+                <a:rPr sz="1150" b="1" i="0">
+                  <a:solidFill>
+                    <a:srgbClr val="FFFFFF"/>
+                  </a:solidFill>
+                  <a:latin typeface="Times New Roman"/>
+                  <a:ea typeface="Times New Roman"/>
+                  <a:cs typeface="Times New Roman"/>
+                </a:rPr>
+                <a:t>  ·  Process-informed event labels</a:t>
+              </a:r>
             </a:p>
           </p:txBody>
         </p:sp>
@@ -9838,7 +10275,7 @@
             <a:noFill/>
           </p:spPr>
           <p:txBody>
-            <a:bodyPr wrap="none" lIns="0" tIns="0" rIns="0" bIns="0" anchor="ctr">
+            <a:bodyPr wrap="none" lIns="0" rIns="0" tIns="0" bIns="0" anchor="ctr">
               <a:noAutofit/>
             </a:bodyPr>
             <a:lstStyle/>
@@ -9849,7 +10286,9 @@
                   <a:solidFill>
                     <a:srgbClr val="CB001C"/>
                   </a:solidFill>
-                  <a:latin typeface="Segoe UI Symbol" panose="020B0502040204020203"/>
+                  <a:latin typeface="Segoe UI Symbol"/>
+                  <a:ea typeface="Segoe UI Symbol"/>
+                  <a:cs typeface="Segoe UI Symbol"/>
                 </a:rPr>
                 <a:t>✕ </a:t>
               </a:r>
@@ -9858,16 +10297,12 @@
                   <a:solidFill>
                     <a:srgbClr val="595959"/>
                   </a:solidFill>
-                  <a:latin typeface="Arial" panose="020B0604020202020204"/>
+                  <a:latin typeface="Times New Roman"/>
+                  <a:ea typeface="Times New Roman"/>
+                  <a:cs typeface="Times New Roman"/>
                 </a:rPr>
                 <a:t>Prior work</a:t>
               </a:r>
-              <a:endParaRPr sz="1000" b="1" i="0">
-                <a:solidFill>
-                  <a:srgbClr val="595959"/>
-                </a:solidFill>
-                <a:latin typeface="Arial" panose="020B0604020202020204"/>
-              </a:endParaRPr>
             </a:p>
           </p:txBody>
         </p:sp>
@@ -10021,7 +10456,7 @@
             <a:noFill/>
           </p:spPr>
           <p:txBody>
-            <a:bodyPr wrap="none" lIns="0" tIns="0" rIns="0" bIns="0" anchor="ctr">
+            <a:bodyPr wrap="none" lIns="0" rIns="0" tIns="0" bIns="0" anchor="ctr">
               <a:noAutofit/>
             </a:bodyPr>
             <a:lstStyle/>
@@ -10032,16 +10467,12 @@
                   <a:solidFill>
                     <a:srgbClr val="CB001C"/>
                   </a:solidFill>
-                  <a:latin typeface="Arial" panose="020B0604020202020204"/>
+                  <a:latin typeface="Times New Roman"/>
+                  <a:ea typeface="Times New Roman"/>
+                  <a:cs typeface="Times New Roman"/>
                 </a:rPr>
                 <a:t>×</a:t>
               </a:r>
-              <a:endParaRPr sz="900" b="1" i="0">
-                <a:solidFill>
-                  <a:srgbClr val="CB001C"/>
-                </a:solidFill>
-                <a:latin typeface="Arial" panose="020B0604020202020204"/>
-              </a:endParaRPr>
             </a:p>
           </p:txBody>
         </p:sp>
@@ -10062,7 +10493,7 @@
             <a:noFill/>
           </p:spPr>
           <p:txBody>
-            <a:bodyPr wrap="none" lIns="0" tIns="0" rIns="0" bIns="0" anchor="ctr">
+            <a:bodyPr wrap="none" lIns="0" rIns="0" tIns="0" bIns="0" anchor="ctr">
               <a:noAutofit/>
             </a:bodyPr>
             <a:lstStyle/>
@@ -10073,16 +10504,12 @@
                   <a:solidFill>
                     <a:srgbClr val="CB001C"/>
                   </a:solidFill>
-                  <a:latin typeface="Arial" panose="020B0604020202020204"/>
+                  <a:latin typeface="Times New Roman"/>
+                  <a:ea typeface="Times New Roman"/>
+                  <a:cs typeface="Times New Roman"/>
                 </a:rPr>
                 <a:t>×</a:t>
               </a:r>
-              <a:endParaRPr sz="900" b="1" i="0">
-                <a:solidFill>
-                  <a:srgbClr val="CB001C"/>
-                </a:solidFill>
-                <a:latin typeface="Arial" panose="020B0604020202020204"/>
-              </a:endParaRPr>
             </a:p>
           </p:txBody>
         </p:sp>
@@ -10103,7 +10530,7 @@
             <a:noFill/>
           </p:spPr>
           <p:txBody>
-            <a:bodyPr wrap="none" lIns="0" tIns="0" rIns="0" bIns="0" anchor="ctr">
+            <a:bodyPr wrap="none" lIns="0" rIns="0" tIns="0" bIns="0" anchor="ctr">
               <a:noAutofit/>
             </a:bodyPr>
             <a:lstStyle/>
@@ -10114,16 +10541,12 @@
                   <a:solidFill>
                     <a:srgbClr val="CB001C"/>
                   </a:solidFill>
-                  <a:latin typeface="Arial" panose="020B0604020202020204"/>
+                  <a:latin typeface="Times New Roman"/>
+                  <a:ea typeface="Times New Roman"/>
+                  <a:cs typeface="Times New Roman"/>
                 </a:rPr>
                 <a:t>×</a:t>
               </a:r>
-              <a:endParaRPr sz="900" b="1" i="0">
-                <a:solidFill>
-                  <a:srgbClr val="CB001C"/>
-                </a:solidFill>
-                <a:latin typeface="Arial" panose="020B0604020202020204"/>
-              </a:endParaRPr>
             </a:p>
           </p:txBody>
         </p:sp>
@@ -10144,7 +10567,7 @@
             <a:noFill/>
           </p:spPr>
           <p:txBody>
-            <a:bodyPr wrap="none" lIns="0" tIns="0" rIns="0" bIns="0" anchor="ctr">
+            <a:bodyPr wrap="none" lIns="0" rIns="0" tIns="0" bIns="0" anchor="ctr">
               <a:noAutofit/>
             </a:bodyPr>
             <a:lstStyle/>
@@ -10155,16 +10578,12 @@
                   <a:solidFill>
                     <a:srgbClr val="595959"/>
                   </a:solidFill>
-                  <a:latin typeface="Arial" panose="020B0604020202020204"/>
+                  <a:latin typeface="Times New Roman"/>
+                  <a:ea typeface="Times New Roman"/>
+                  <a:cs typeface="Times New Roman"/>
                 </a:rPr>
                 <a:t>threshold spikes ≠ bottleneck</a:t>
               </a:r>
-              <a:endParaRPr sz="950" b="0" i="0">
-                <a:solidFill>
-                  <a:srgbClr val="595959"/>
-                </a:solidFill>
-                <a:latin typeface="Arial" panose="020B0604020202020204"/>
-              </a:endParaRPr>
             </a:p>
           </p:txBody>
         </p:sp>
@@ -10269,7 +10688,7 @@
             <a:noFill/>
           </p:spPr>
           <p:txBody>
-            <a:bodyPr wrap="none" lIns="0" tIns="0" rIns="0" bIns="0" anchor="ctr">
+            <a:bodyPr wrap="none" lIns="0" rIns="0" tIns="0" bIns="0" anchor="ctr">
               <a:noAutofit/>
             </a:bodyPr>
             <a:lstStyle/>
@@ -10280,7 +10699,9 @@
                   <a:solidFill>
                     <a:srgbClr val="F26121"/>
                   </a:solidFill>
-                  <a:latin typeface="Segoe UI Symbol" panose="020B0502040204020203"/>
+                  <a:latin typeface="Segoe UI Symbol"/>
+                  <a:ea typeface="Segoe UI Symbol"/>
+                  <a:cs typeface="Segoe UI Symbol"/>
                 </a:rPr>
                 <a:t>✓ </a:t>
               </a:r>
@@ -10289,16 +10710,12 @@
                   <a:solidFill>
                     <a:srgbClr val="F26121"/>
                   </a:solidFill>
-                  <a:latin typeface="Arial" panose="020B0604020202020204"/>
+                  <a:latin typeface="Times New Roman"/>
+                  <a:ea typeface="Times New Roman"/>
+                  <a:cs typeface="Times New Roman"/>
                 </a:rPr>
-                <a:t>PHAST-DP</a:t>
+                <a:t>PHGST-DP</a:t>
               </a:r>
-              <a:endParaRPr sz="1000" b="1" i="0">
-                <a:solidFill>
-                  <a:srgbClr val="F26121"/>
-                </a:solidFill>
-                <a:latin typeface="Arial" panose="020B0604020202020204"/>
-              </a:endParaRPr>
             </a:p>
           </p:txBody>
         </p:sp>
@@ -10963,7 +11380,7 @@
             <a:noFill/>
           </p:spPr>
           <p:txBody>
-            <a:bodyPr wrap="none" lIns="0" tIns="0" rIns="0" bIns="0" anchor="ctr">
+            <a:bodyPr wrap="none" lIns="0" rIns="0" tIns="0" bIns="0" anchor="ctr">
               <a:noAutofit/>
             </a:bodyPr>
             <a:lstStyle/>
@@ -10974,16 +11391,12 @@
                   <a:solidFill>
                     <a:srgbClr val="F26121"/>
                   </a:solidFill>
-                  <a:latin typeface="Arial" panose="020B0604020202020204"/>
+                  <a:latin typeface="Times New Roman"/>
+                  <a:ea typeface="Times New Roman"/>
+                  <a:cs typeface="Times New Roman"/>
                 </a:rPr>
                 <a:t>sustained events, 8-min rule</a:t>
               </a:r>
-              <a:endParaRPr sz="950" b="1" i="0">
-                <a:solidFill>
-                  <a:srgbClr val="F26121"/>
-                </a:solidFill>
-                <a:latin typeface="Arial" panose="020B0604020202020204"/>
-              </a:endParaRPr>
             </a:p>
           </p:txBody>
         </p:sp>
@@ -11052,7 +11465,7 @@
             <a:noFill/>
           </p:spPr>
           <p:txBody>
-            <a:bodyPr wrap="none" lIns="0" tIns="0" rIns="0" bIns="0" anchor="t">
+            <a:bodyPr wrap="none" lIns="0" rIns="0" tIns="0" bIns="0" anchor="t">
               <a:noAutofit/>
             </a:bodyPr>
             <a:lstStyle/>
@@ -11063,16 +11476,12 @@
                   <a:solidFill>
                     <a:srgbClr val="262626"/>
                   </a:solidFill>
-                  <a:latin typeface="Arial" panose="020B0604020202020204"/>
+                  <a:latin typeface="Times New Roman"/>
+                  <a:ea typeface="Times New Roman"/>
+                  <a:cs typeface="Times New Roman"/>
                 </a:rPr>
                 <a:t>Short-pattern</a:t>
               </a:r>
-              <a:endParaRPr sz="1000" b="1" i="0">
-                <a:solidFill>
-                  <a:srgbClr val="262626"/>
-                </a:solidFill>
-                <a:latin typeface="Arial" panose="020B0604020202020204"/>
-              </a:endParaRPr>
             </a:p>
             <a:p>
               <a:pPr algn="ctr"/>
@@ -11081,16 +11490,12 @@
                   <a:solidFill>
                     <a:srgbClr val="262626"/>
                   </a:solidFill>
-                  <a:latin typeface="Arial" panose="020B0604020202020204"/>
+                  <a:latin typeface="Times New Roman"/>
+                  <a:ea typeface="Times New Roman"/>
+                  <a:cs typeface="Times New Roman"/>
                 </a:rPr>
                 <a:t>clustering</a:t>
               </a:r>
-              <a:endParaRPr sz="1000" b="1" i="0">
-                <a:solidFill>
-                  <a:srgbClr val="262626"/>
-                </a:solidFill>
-                <a:latin typeface="Arial" panose="020B0604020202020204"/>
-              </a:endParaRPr>
             </a:p>
           </p:txBody>
         </p:sp>
@@ -13055,7 +13460,7 @@
             <a:noFill/>
           </p:spPr>
           <p:txBody>
-            <a:bodyPr wrap="none" lIns="0" tIns="0" rIns="0" bIns="0" anchor="ctr">
+            <a:bodyPr wrap="none" lIns="0" rIns="0" tIns="0" bIns="0" anchor="ctr">
               <a:noAutofit/>
             </a:bodyPr>
             <a:lstStyle/>
@@ -13066,7 +13471,9 @@
                   <a:solidFill>
                     <a:srgbClr val="262626"/>
                   </a:solidFill>
-                  <a:latin typeface="Arial" panose="020B0604020202020204"/>
+                  <a:latin typeface="Times New Roman"/>
+                  <a:ea typeface="Times New Roman"/>
+                  <a:cs typeface="Times New Roman"/>
                 </a:rPr>
                 <a:t>16 pattern keys K</a:t>
               </a:r>
@@ -13075,16 +13482,12 @@
                   <a:solidFill>
                     <a:srgbClr val="262626"/>
                   </a:solidFill>
-                  <a:latin typeface="Arial" panose="020B0604020202020204"/>
+                  <a:latin typeface="Times New Roman"/>
+                  <a:ea typeface="Times New Roman"/>
+                  <a:cs typeface="Times New Roman"/>
                 </a:rPr>
                 <a:t>P</a:t>
               </a:r>
-              <a:endParaRPr sz="950" b="0" i="0" baseline="30000">
-                <a:solidFill>
-                  <a:srgbClr val="262626"/>
-                </a:solidFill>
-                <a:latin typeface="Arial" panose="020B0604020202020204"/>
-              </a:endParaRPr>
             </a:p>
           </p:txBody>
         </p:sp>
@@ -13105,7 +13508,7 @@
             <a:noFill/>
           </p:spPr>
           <p:txBody>
-            <a:bodyPr wrap="none" lIns="0" tIns="0" rIns="0" bIns="0" anchor="ctr">
+            <a:bodyPr wrap="none" lIns="0" rIns="0" tIns="0" bIns="0" anchor="ctr">
               <a:noAutofit/>
             </a:bodyPr>
             <a:lstStyle/>
@@ -13116,16 +13519,12 @@
                   <a:solidFill>
                     <a:srgbClr val="595959"/>
                   </a:solidFill>
-                  <a:latin typeface="Arial" panose="020B0604020202020204"/>
+                  <a:latin typeface="Times New Roman"/>
+                  <a:ea typeface="Times New Roman"/>
+                  <a:cs typeface="Times New Roman"/>
                 </a:rPr>
                 <a:t>regimes, not labels</a:t>
               </a:r>
-              <a:endParaRPr sz="900" b="0" i="1">
-                <a:solidFill>
-                  <a:srgbClr val="595959"/>
-                </a:solidFill>
-                <a:latin typeface="Arial" panose="020B0604020202020204"/>
-              </a:endParaRPr>
             </a:p>
           </p:txBody>
         </p:sp>
@@ -13146,7 +13545,7 @@
             <a:noFill/>
           </p:spPr>
           <p:txBody>
-            <a:bodyPr wrap="none" lIns="0" tIns="0" rIns="0" bIns="0" anchor="ctr">
+            <a:bodyPr wrap="none" lIns="0" rIns="0" tIns="0" bIns="0" anchor="ctr">
               <a:noAutofit/>
             </a:bodyPr>
             <a:lstStyle/>
@@ -13157,7 +13556,9 @@
                   <a:solidFill>
                     <a:srgbClr val="262626"/>
                   </a:solidFill>
-                  <a:latin typeface="Arial" panose="020B0604020202020204"/>
+                  <a:latin typeface="Times New Roman"/>
+                  <a:ea typeface="Times New Roman"/>
+                  <a:cs typeface="Times New Roman"/>
                 </a:rPr>
                 <a:t>Type-specific rule </a:t>
               </a:r>
@@ -13166,7 +13567,9 @@
                   <a:solidFill>
                     <a:srgbClr val="262626"/>
                   </a:solidFill>
-                  <a:latin typeface="Arial" panose="020B0604020202020204"/>
+                  <a:latin typeface="Times New Roman"/>
+                  <a:ea typeface="Times New Roman"/>
+                  <a:cs typeface="Times New Roman"/>
                 </a:rPr>
                 <a:t>b</a:t>
               </a:r>
@@ -13175,16 +13578,12 @@
                   <a:solidFill>
                     <a:srgbClr val="262626"/>
                   </a:solidFill>
-                  <a:latin typeface="Arial" panose="020B0604020202020204"/>
+                  <a:latin typeface="Times New Roman"/>
+                  <a:ea typeface="Times New Roman"/>
+                  <a:cs typeface="Times New Roman"/>
                 </a:rPr>
                 <a:t>raw</a:t>
               </a:r>
-              <a:endParaRPr sz="1000" b="0" i="0" baseline="30000">
-                <a:solidFill>
-                  <a:srgbClr val="262626"/>
-                </a:solidFill>
-                <a:latin typeface="Arial" panose="020B0604020202020204"/>
-              </a:endParaRPr>
             </a:p>
           </p:txBody>
         </p:sp>
@@ -14161,7 +14560,7 @@
             <a:noFill/>
           </p:spPr>
           <p:txBody>
-            <a:bodyPr wrap="none" lIns="0" tIns="0" rIns="0" bIns="0" anchor="ctr">
+            <a:bodyPr wrap="none" lIns="0" rIns="0" tIns="0" bIns="0" anchor="ctr">
               <a:noAutofit/>
             </a:bodyPr>
             <a:lstStyle/>
@@ -14172,16 +14571,12 @@
                   <a:solidFill>
                     <a:srgbClr val="595959"/>
                   </a:solidFill>
-                  <a:latin typeface="Arial" panose="020B0604020202020204"/>
+                  <a:latin typeface="Times New Roman"/>
+                  <a:ea typeface="Times New Roman"/>
+                  <a:cs typeface="Times New Roman"/>
                 </a:rPr>
                 <a:t>persistence</a:t>
               </a:r>
-              <a:endParaRPr sz="950" b="0" i="0">
-                <a:solidFill>
-                  <a:srgbClr val="595959"/>
-                </a:solidFill>
-                <a:latin typeface="Arial" panose="020B0604020202020204"/>
-              </a:endParaRPr>
             </a:p>
           </p:txBody>
         </p:sp>
@@ -14202,7 +14597,7 @@
             <a:noFill/>
           </p:spPr>
           <p:txBody>
-            <a:bodyPr wrap="none" lIns="0" tIns="0" rIns="0" bIns="0" anchor="ctr">
+            <a:bodyPr wrap="none" lIns="0" rIns="0" tIns="0" bIns="0" anchor="ctr">
               <a:noAutofit/>
             </a:bodyPr>
             <a:lstStyle/>
@@ -14213,16 +14608,12 @@
                   <a:solidFill>
                     <a:srgbClr val="595959"/>
                   </a:solidFill>
-                  <a:latin typeface="Arial" panose="020B0604020202020204"/>
+                  <a:latin typeface="Times New Roman"/>
+                  <a:ea typeface="Times New Roman"/>
+                  <a:cs typeface="Times New Roman"/>
                 </a:rPr>
                 <a:t>m = 8,  g = 1</a:t>
               </a:r>
-              <a:endParaRPr sz="950" b="0" i="0">
-                <a:solidFill>
-                  <a:srgbClr val="595959"/>
-                </a:solidFill>
-                <a:latin typeface="Arial" panose="020B0604020202020204"/>
-              </a:endParaRPr>
             </a:p>
           </p:txBody>
         </p:sp>
@@ -15163,7 +15554,7 @@
             <a:noFill/>
           </p:spPr>
           <p:txBody>
-            <a:bodyPr wrap="none" lIns="0" tIns="0" rIns="0" bIns="0" anchor="ctr">
+            <a:bodyPr wrap="none" lIns="0" rIns="0" tIns="0" bIns="0" anchor="ctr">
               <a:noAutofit/>
             </a:bodyPr>
             <a:lstStyle/>
@@ -15174,7 +15565,9 @@
                   <a:solidFill>
                     <a:srgbClr val="262626"/>
                   </a:solidFill>
-                  <a:latin typeface="Arial" panose="020B0604020202020204"/>
+                  <a:latin typeface="Times New Roman"/>
+                  <a:ea typeface="Times New Roman"/>
+                  <a:cs typeface="Times New Roman"/>
                 </a:rPr>
                 <a:t>Event target </a:t>
               </a:r>
@@ -15183,16 +15576,12 @@
                   <a:solidFill>
                     <a:srgbClr val="262626"/>
                   </a:solidFill>
-                  <a:latin typeface="Arial" panose="020B0604020202020204"/>
+                  <a:latin typeface="Times New Roman"/>
+                  <a:ea typeface="Times New Roman"/>
+                  <a:cs typeface="Times New Roman"/>
                 </a:rPr>
                 <a:t>(w, s, d)</a:t>
               </a:r>
-              <a:endParaRPr sz="1000" b="0" i="0">
-                <a:solidFill>
-                  <a:srgbClr val="262626"/>
-                </a:solidFill>
-                <a:latin typeface="Arial" panose="020B0604020202020204"/>
-              </a:endParaRPr>
             </a:p>
           </p:txBody>
         </p:sp>
@@ -16168,7 +16557,7 @@
             <a:noFill/>
           </p:spPr>
           <p:txBody>
-            <a:bodyPr wrap="none" lIns="0" tIns="0" rIns="0" bIns="0" anchor="ctr">
+            <a:bodyPr wrap="none" lIns="0" rIns="0" tIns="0" bIns="0" anchor="ctr">
               <a:noAutofit/>
             </a:bodyPr>
             <a:lstStyle/>
@@ -16179,16 +16568,12 @@
                   <a:solidFill>
                     <a:srgbClr val="595959"/>
                   </a:solidFill>
-                  <a:latin typeface="Arial" panose="020B0604020202020204"/>
+                  <a:latin typeface="Times New Roman"/>
+                  <a:ea typeface="Times New Roman"/>
+                  <a:cs typeface="Times New Roman"/>
                 </a:rPr>
                 <a:t>history</a:t>
               </a:r>
-              <a:endParaRPr sz="850" b="0" i="0">
-                <a:solidFill>
-                  <a:srgbClr val="595959"/>
-                </a:solidFill>
-                <a:latin typeface="Arial" panose="020B0604020202020204"/>
-              </a:endParaRPr>
             </a:p>
           </p:txBody>
         </p:sp>
@@ -16273,7 +16658,7 @@
             <a:noFill/>
           </p:spPr>
           <p:txBody>
-            <a:bodyPr wrap="none" lIns="0" tIns="0" rIns="0" bIns="0" anchor="ctr">
+            <a:bodyPr wrap="none" lIns="0" rIns="0" tIns="0" bIns="0" anchor="ctr">
               <a:noAutofit/>
             </a:bodyPr>
             <a:lstStyle/>
@@ -16284,16 +16669,12 @@
                   <a:solidFill>
                     <a:srgbClr val="CB001C"/>
                   </a:solidFill>
-                  <a:latin typeface="Arial" panose="020B0604020202020204"/>
+                  <a:latin typeface="Times New Roman"/>
+                  <a:ea typeface="Times New Roman"/>
+                  <a:cs typeface="Times New Roman"/>
                 </a:rPr>
                 <a:t>s</a:t>
               </a:r>
-              <a:endParaRPr sz="1000" b="1" i="0">
-                <a:solidFill>
-                  <a:srgbClr val="CB001C"/>
-                </a:solidFill>
-                <a:latin typeface="Arial" panose="020B0604020202020204"/>
-              </a:endParaRPr>
             </a:p>
           </p:txBody>
         </p:sp>
@@ -16378,7 +16759,7 @@
             <a:noFill/>
           </p:spPr>
           <p:txBody>
-            <a:bodyPr wrap="none" lIns="0" tIns="0" rIns="0" bIns="0" anchor="ctr">
+            <a:bodyPr wrap="none" lIns="0" rIns="0" tIns="0" bIns="0" anchor="ctr">
               <a:noAutofit/>
             </a:bodyPr>
             <a:lstStyle/>
@@ -16389,16 +16770,12 @@
                   <a:solidFill>
                     <a:srgbClr val="CB001C"/>
                   </a:solidFill>
-                  <a:latin typeface="Arial" panose="020B0604020202020204"/>
+                  <a:latin typeface="Times New Roman"/>
+                  <a:ea typeface="Times New Roman"/>
+                  <a:cs typeface="Times New Roman"/>
                 </a:rPr>
                 <a:t>d</a:t>
               </a:r>
-              <a:endParaRPr sz="1000" b="1" i="0">
-                <a:solidFill>
-                  <a:srgbClr val="CB001C"/>
-                </a:solidFill>
-                <a:latin typeface="Arial" panose="020B0604020202020204"/>
-              </a:endParaRPr>
             </a:p>
           </p:txBody>
         </p:sp>
@@ -16419,7 +16796,7 @@
             <a:noFill/>
           </p:spPr>
           <p:txBody>
-            <a:bodyPr wrap="none" lIns="0" tIns="0" rIns="0" bIns="0" anchor="ctr">
+            <a:bodyPr wrap="none" lIns="0" rIns="0" tIns="0" bIns="0" anchor="ctr">
               <a:noAutofit/>
             </a:bodyPr>
             <a:lstStyle/>
@@ -16430,16 +16807,12 @@
                   <a:solidFill>
                     <a:srgbClr val="595959"/>
                   </a:solidFill>
-                  <a:latin typeface="Arial" panose="020B0604020202020204"/>
+                  <a:latin typeface="Times New Roman"/>
+                  <a:ea typeface="Times New Roman"/>
+                  <a:cs typeface="Times New Roman"/>
                 </a:rPr>
                 <a:t>ongoing: hot at history end</a:t>
               </a:r>
-              <a:endParaRPr sz="950" b="0" i="0">
-                <a:solidFill>
-                  <a:srgbClr val="595959"/>
-                </a:solidFill>
-                <a:latin typeface="Arial" panose="020B0604020202020204"/>
-              </a:endParaRPr>
             </a:p>
           </p:txBody>
         </p:sp>
@@ -16460,7 +16833,7 @@
             <a:noFill/>
           </p:spPr>
           <p:txBody>
-            <a:bodyPr wrap="none" lIns="0" tIns="0" rIns="0" bIns="0" anchor="ctr">
+            <a:bodyPr wrap="none" lIns="0" rIns="0" tIns="0" bIns="0" anchor="ctr">
               <a:noAutofit/>
             </a:bodyPr>
             <a:lstStyle/>
@@ -16471,16 +16844,12 @@
                   <a:solidFill>
                     <a:srgbClr val="595959"/>
                   </a:solidFill>
-                  <a:latin typeface="Arial" panose="020B0604020202020204"/>
+                  <a:latin typeface="Times New Roman"/>
+                  <a:ea typeface="Times New Roman"/>
+                  <a:cs typeface="Times New Roman"/>
                 </a:rPr>
                 <a:t>upcoming: s &gt; 0,  d ≥ 8 min</a:t>
               </a:r>
-              <a:endParaRPr sz="950" b="0" i="0">
-                <a:solidFill>
-                  <a:srgbClr val="595959"/>
-                </a:solidFill>
-                <a:latin typeface="Arial" panose="020B0604020202020204"/>
-              </a:endParaRPr>
             </a:p>
           </p:txBody>
         </p:sp>
@@ -16501,7 +16870,7 @@
             <a:noFill/>
           </p:spPr>
           <p:txBody>
-            <a:bodyPr wrap="none" lIns="0" tIns="0" rIns="0" bIns="0" anchor="t">
+            <a:bodyPr wrap="none" lIns="0" rIns="0" tIns="0" bIns="0" anchor="t">
               <a:noAutofit/>
             </a:bodyPr>
             <a:lstStyle/>
@@ -16512,16 +16881,12 @@
                   <a:solidFill>
                     <a:srgbClr val="595959"/>
                   </a:solidFill>
-                  <a:latin typeface="Arial" panose="020B0604020202020204"/>
+                  <a:latin typeface="Times New Roman"/>
+                  <a:ea typeface="Times New Roman"/>
+                  <a:cs typeface="Times New Roman"/>
                 </a:rPr>
                 <a:t>+ cause: transport · shortage ·</a:t>
               </a:r>
-              <a:endParaRPr sz="950" b="0" i="0">
-                <a:solidFill>
-                  <a:srgbClr val="595959"/>
-                </a:solidFill>
-                <a:latin typeface="Arial" panose="020B0604020202020204"/>
-              </a:endParaRPr>
             </a:p>
             <a:p>
               <a:pPr algn="l"/>
@@ -16530,16 +16895,12 @@
                   <a:solidFill>
                     <a:srgbClr val="595959"/>
                   </a:solidFill>
-                  <a:latin typeface="Arial" panose="020B0604020202020204"/>
+                  <a:latin typeface="Times New Roman"/>
+                  <a:ea typeface="Times New Roman"/>
+                  <a:cs typeface="Times New Roman"/>
                 </a:rPr>
                 <a:t>   starvation · queue buildup</a:t>
               </a:r>
-              <a:endParaRPr sz="950" b="0" i="0">
-                <a:solidFill>
-                  <a:srgbClr val="595959"/>
-                </a:solidFill>
-                <a:latin typeface="Arial" panose="020B0604020202020204"/>
-              </a:endParaRPr>
             </a:p>
           </p:txBody>
         </p:sp>
@@ -16623,7 +16984,7 @@
             <a:noFill/>
           </p:spPr>
           <p:txBody>
-            <a:bodyPr wrap="none" lIns="0" tIns="0" rIns="0" bIns="0" anchor="ctr">
+            <a:bodyPr wrap="none" lIns="0" rIns="0" tIns="0" bIns="0" anchor="ctr">
               <a:noAutofit/>
             </a:bodyPr>
             <a:lstStyle/>
@@ -16634,16 +16995,12 @@
                   <a:solidFill>
                     <a:srgbClr val="3D6EB4"/>
                   </a:solidFill>
-                  <a:latin typeface="Arial" panose="020B0604020202020204"/>
+                  <a:latin typeface="Times New Roman"/>
+                  <a:ea typeface="Times New Roman"/>
+                  <a:cs typeface="Times New Roman"/>
                 </a:rPr>
-                <a:t>PHAST-DP</a:t>
+                <a:t>PHGST-DP</a:t>
               </a:r>
-              <a:endParaRPr sz="1300" b="1" i="0">
-                <a:solidFill>
-                  <a:srgbClr val="3D6EB4"/>
-                </a:solidFill>
-                <a:latin typeface="Arial" panose="020B0604020202020204"/>
-              </a:endParaRPr>
             </a:p>
           </p:txBody>
         </p:sp>
@@ -16712,7 +17069,7 @@
             <a:noFill/>
           </p:spPr>
           <p:txBody>
-            <a:bodyPr wrap="none" lIns="0" tIns="0" rIns="0" bIns="0" anchor="ctr">
+            <a:bodyPr wrap="none" lIns="0" rIns="0" tIns="0" bIns="0" anchor="ctr">
               <a:noAutofit/>
             </a:bodyPr>
             <a:lstStyle/>
@@ -16723,16 +17080,95 @@
                   <a:solidFill>
                     <a:srgbClr val="262626"/>
                   </a:solidFill>
-                  <a:latin typeface="Arial" panose="020B0604020202020204"/>
+                  <a:latin typeface="Times New Roman"/>
+                  <a:ea typeface="Times New Roman"/>
+                  <a:cs typeface="Times New Roman"/>
                 </a:rPr>
                 <a:t>Grouped embedding</a:t>
               </a:r>
-              <a:endParaRPr sz="1100" b="1" i="0">
-                <a:solidFill>
-                  <a:srgbClr val="262626"/>
-                </a:solidFill>
-                <a:latin typeface="Arial" panose="020B0604020202020204"/>
-              </a:endParaRPr>
+            </a:p>
+          </p:txBody>
+        </p:sp>
+        <p:sp>
+          <p:nvSpPr>
+            <p:cNvPr id="326" name="Rounded Rectangle 325"/>
+            <p:cNvSpPr/>
+            <p:nvPr/>
+          </p:nvSpPr>
+          <p:spPr>
+            <a:xfrm>
+              <a:off x="777240" y="5221224"/>
+              <a:ext cx="1143000" cy="210312"/>
+            </a:xfrm>
+            <a:prstGeom prst="roundRect">
+              <a:avLst>
+                <a:gd name="adj" fmla="val 47826"/>
+              </a:avLst>
+            </a:prstGeom>
+            <a:solidFill>
+              <a:srgbClr val="3D6EB4"/>
+            </a:solidFill>
+            <a:ln>
+              <a:noFill/>
+            </a:ln>
+            <a:effectLst/>
+          </p:spPr>
+          <p:style>
+            <a:lnRef idx="1">
+              <a:schemeClr val="accent1"/>
+            </a:lnRef>
+            <a:fillRef idx="3">
+              <a:schemeClr val="accent1"/>
+            </a:fillRef>
+            <a:effectRef idx="2">
+              <a:schemeClr val="accent1"/>
+            </a:effectRef>
+            <a:fontRef idx="minor">
+              <a:schemeClr val="lt1"/>
+            </a:fontRef>
+          </p:style>
+          <p:txBody>
+            <a:bodyPr rtlCol="0" anchor="ctr"/>
+            <a:lstStyle/>
+            <a:p>
+              <a:pPr algn="ctr"/>
+            </a:p>
+          </p:txBody>
+        </p:sp>
+        <p:sp>
+          <p:nvSpPr>
+            <p:cNvPr id="327" name="TextBox 326"/>
+            <p:cNvSpPr txBox="1"/>
+            <p:nvPr/>
+          </p:nvSpPr>
+          <p:spPr>
+            <a:xfrm>
+              <a:off x="777240" y="5221224"/>
+              <a:ext cx="1143000" cy="210312"/>
+            </a:xfrm>
+            <a:prstGeom prst="rect">
+              <a:avLst/>
+            </a:prstGeom>
+            <a:noFill/>
+          </p:spPr>
+          <p:txBody>
+            <a:bodyPr wrap="none" lIns="0" rIns="0" tIns="0" bIns="0" anchor="ctr">
+              <a:noAutofit/>
+            </a:bodyPr>
+            <a:lstStyle/>
+            <a:p>
+              <a:pPr algn="ctr"/>
+              <a:r>
+                <a:rPr sz="900" b="1" i="0">
+                  <a:solidFill>
+                    <a:srgbClr val="FFFFFF"/>
+                  </a:solidFill>
+                  <a:latin typeface="Times New Roman"/>
+                  <a:ea typeface="Times New Roman"/>
+                  <a:cs typeface="Times New Roman"/>
+                </a:rPr>
+                <a:t>Contribution 1</a:t>
+              </a:r>
             </a:p>
           </p:txBody>
         </p:sp>
@@ -16836,7 +17272,7 @@
             <a:noFill/>
           </p:spPr>
           <p:txBody>
-            <a:bodyPr wrap="none" lIns="0" tIns="0" rIns="0" bIns="0" anchor="ctr">
+            <a:bodyPr wrap="none" lIns="0" rIns="0" tIns="0" bIns="0" anchor="ctr">
               <a:noAutofit/>
             </a:bodyPr>
             <a:lstStyle/>
@@ -16847,16 +17283,12 @@
                   <a:solidFill>
                     <a:srgbClr val="262626"/>
                   </a:solidFill>
-                  <a:latin typeface="Arial" panose="020B0604020202020204"/>
+                  <a:latin typeface="Times New Roman"/>
+                  <a:ea typeface="Times New Roman"/>
+                  <a:cs typeface="Times New Roman"/>
                 </a:rPr>
                 <a:t>Queue</a:t>
               </a:r>
-              <a:endParaRPr sz="950" b="0" i="0">
-                <a:solidFill>
-                  <a:srgbClr val="262626"/>
-                </a:solidFill>
-                <a:latin typeface="Arial" panose="020B0604020202020204"/>
-              </a:endParaRPr>
             </a:p>
           </p:txBody>
         </p:sp>
@@ -16877,7 +17309,7 @@
             <a:noFill/>
           </p:spPr>
           <p:txBody>
-            <a:bodyPr wrap="none" lIns="0" tIns="0" rIns="0" bIns="0" anchor="ctr">
+            <a:bodyPr wrap="none" lIns="0" rIns="0" tIns="0" bIns="0" anchor="ctr">
               <a:noAutofit/>
             </a:bodyPr>
             <a:lstStyle/>
@@ -16888,16 +17320,12 @@
                   <a:solidFill>
                     <a:srgbClr val="595959"/>
                   </a:solidFill>
-                  <a:latin typeface="Arial" panose="020B0604020202020204"/>
+                  <a:latin typeface="Times New Roman"/>
+                  <a:ea typeface="Times New Roman"/>
+                  <a:cs typeface="Times New Roman"/>
                 </a:rPr>
                 <a:t>4</a:t>
               </a:r>
-              <a:endParaRPr sz="950" b="0" i="0">
-                <a:solidFill>
-                  <a:srgbClr val="595959"/>
-                </a:solidFill>
-                <a:latin typeface="Arial" panose="020B0604020202020204"/>
-              </a:endParaRPr>
             </a:p>
           </p:txBody>
         </p:sp>
@@ -17001,7 +17429,7 @@
             <a:noFill/>
           </p:spPr>
           <p:txBody>
-            <a:bodyPr wrap="none" lIns="0" tIns="0" rIns="0" bIns="0" anchor="ctr">
+            <a:bodyPr wrap="none" lIns="0" rIns="0" tIns="0" bIns="0" anchor="ctr">
               <a:noAutofit/>
             </a:bodyPr>
             <a:lstStyle/>
@@ -17012,16 +17440,12 @@
                   <a:solidFill>
                     <a:srgbClr val="262626"/>
                   </a:solidFill>
-                  <a:latin typeface="Arial" panose="020B0604020202020204"/>
+                  <a:latin typeface="Times New Roman"/>
+                  <a:ea typeface="Times New Roman"/>
+                  <a:cs typeface="Times New Roman"/>
                 </a:rPr>
                 <a:t>Stall</a:t>
               </a:r>
-              <a:endParaRPr sz="950" b="0" i="0">
-                <a:solidFill>
-                  <a:srgbClr val="262626"/>
-                </a:solidFill>
-                <a:latin typeface="Arial" panose="020B0604020202020204"/>
-              </a:endParaRPr>
             </a:p>
           </p:txBody>
         </p:sp>
@@ -17042,7 +17466,7 @@
             <a:noFill/>
           </p:spPr>
           <p:txBody>
-            <a:bodyPr wrap="none" lIns="0" tIns="0" rIns="0" bIns="0" anchor="ctr">
+            <a:bodyPr wrap="none" lIns="0" rIns="0" tIns="0" bIns="0" anchor="ctr">
               <a:noAutofit/>
             </a:bodyPr>
             <a:lstStyle/>
@@ -17053,16 +17477,12 @@
                   <a:solidFill>
                     <a:srgbClr val="595959"/>
                   </a:solidFill>
-                  <a:latin typeface="Arial" panose="020B0604020202020204"/>
+                  <a:latin typeface="Times New Roman"/>
+                  <a:ea typeface="Times New Roman"/>
+                  <a:cs typeface="Times New Roman"/>
                 </a:rPr>
                 <a:t>6</a:t>
               </a:r>
-              <a:endParaRPr sz="950" b="0" i="0">
-                <a:solidFill>
-                  <a:srgbClr val="595959"/>
-                </a:solidFill>
-                <a:latin typeface="Arial" panose="020B0604020202020204"/>
-              </a:endParaRPr>
             </a:p>
           </p:txBody>
         </p:sp>
@@ -17166,7 +17586,7 @@
             <a:noFill/>
           </p:spPr>
           <p:txBody>
-            <a:bodyPr wrap="none" lIns="0" tIns="0" rIns="0" bIns="0" anchor="ctr">
+            <a:bodyPr wrap="none" lIns="0" rIns="0" tIns="0" bIns="0" anchor="ctr">
               <a:noAutofit/>
             </a:bodyPr>
             <a:lstStyle/>
@@ -17177,16 +17597,12 @@
                   <a:solidFill>
                     <a:srgbClr val="262626"/>
                   </a:solidFill>
-                  <a:latin typeface="Arial" panose="020B0604020202020204"/>
+                  <a:latin typeface="Times New Roman"/>
+                  <a:ea typeface="Times New Roman"/>
+                  <a:cs typeface="Times New Roman"/>
                 </a:rPr>
                 <a:t>Logistics</a:t>
               </a:r>
-              <a:endParaRPr sz="950" b="0" i="0">
-                <a:solidFill>
-                  <a:srgbClr val="262626"/>
-                </a:solidFill>
-                <a:latin typeface="Arial" panose="020B0604020202020204"/>
-              </a:endParaRPr>
             </a:p>
           </p:txBody>
         </p:sp>
@@ -17207,7 +17623,7 @@
             <a:noFill/>
           </p:spPr>
           <p:txBody>
-            <a:bodyPr wrap="none" lIns="0" tIns="0" rIns="0" bIns="0" anchor="ctr">
+            <a:bodyPr wrap="none" lIns="0" rIns="0" tIns="0" bIns="0" anchor="ctr">
               <a:noAutofit/>
             </a:bodyPr>
             <a:lstStyle/>
@@ -17218,16 +17634,12 @@
                   <a:solidFill>
                     <a:srgbClr val="595959"/>
                   </a:solidFill>
-                  <a:latin typeface="Arial" panose="020B0604020202020204"/>
+                  <a:latin typeface="Times New Roman"/>
+                  <a:ea typeface="Times New Roman"/>
+                  <a:cs typeface="Times New Roman"/>
                 </a:rPr>
                 <a:t>4</a:t>
               </a:r>
-              <a:endParaRPr sz="950" b="0" i="0">
-                <a:solidFill>
-                  <a:srgbClr val="595959"/>
-                </a:solidFill>
-                <a:latin typeface="Arial" panose="020B0604020202020204"/>
-              </a:endParaRPr>
             </a:p>
           </p:txBody>
         </p:sp>
@@ -17331,7 +17743,7 @@
             <a:noFill/>
           </p:spPr>
           <p:txBody>
-            <a:bodyPr wrap="none" lIns="0" tIns="0" rIns="0" bIns="0" anchor="ctr">
+            <a:bodyPr wrap="none" lIns="0" rIns="0" tIns="0" bIns="0" anchor="ctr">
               <a:noAutofit/>
             </a:bodyPr>
             <a:lstStyle/>
@@ -17342,16 +17754,12 @@
                   <a:solidFill>
                     <a:srgbClr val="262626"/>
                   </a:solidFill>
-                  <a:latin typeface="Arial" panose="020B0604020202020204"/>
+                  <a:latin typeface="Times New Roman"/>
+                  <a:ea typeface="Times New Roman"/>
+                  <a:cs typeface="Times New Roman"/>
                 </a:rPr>
                 <a:t>Shortage</a:t>
               </a:r>
-              <a:endParaRPr sz="950" b="0" i="0">
-                <a:solidFill>
-                  <a:srgbClr val="262626"/>
-                </a:solidFill>
-                <a:latin typeface="Arial" panose="020B0604020202020204"/>
-              </a:endParaRPr>
             </a:p>
           </p:txBody>
         </p:sp>
@@ -17372,7 +17780,7 @@
             <a:noFill/>
           </p:spPr>
           <p:txBody>
-            <a:bodyPr wrap="none" lIns="0" tIns="0" rIns="0" bIns="0" anchor="ctr">
+            <a:bodyPr wrap="none" lIns="0" rIns="0" tIns="0" bIns="0" anchor="ctr">
               <a:noAutofit/>
             </a:bodyPr>
             <a:lstStyle/>
@@ -17383,16 +17791,12 @@
                   <a:solidFill>
                     <a:srgbClr val="595959"/>
                   </a:solidFill>
-                  <a:latin typeface="Arial" panose="020B0604020202020204"/>
+                  <a:latin typeface="Times New Roman"/>
+                  <a:ea typeface="Times New Roman"/>
+                  <a:cs typeface="Times New Roman"/>
                 </a:rPr>
                 <a:t>1</a:t>
               </a:r>
-              <a:endParaRPr sz="950" b="0" i="0">
-                <a:solidFill>
-                  <a:srgbClr val="595959"/>
-                </a:solidFill>
-                <a:latin typeface="Arial" panose="020B0604020202020204"/>
-              </a:endParaRPr>
             </a:p>
           </p:txBody>
         </p:sp>
@@ -17496,7 +17900,7 @@
             <a:noFill/>
           </p:spPr>
           <p:txBody>
-            <a:bodyPr wrap="none" lIns="0" tIns="0" rIns="0" bIns="0" anchor="ctr">
+            <a:bodyPr wrap="none" lIns="0" rIns="0" tIns="0" bIns="0" anchor="ctr">
               <a:noAutofit/>
             </a:bodyPr>
             <a:lstStyle/>
@@ -17507,16 +17911,12 @@
                   <a:solidFill>
                     <a:srgbClr val="262626"/>
                   </a:solidFill>
-                  <a:latin typeface="Arial" panose="020B0604020202020204"/>
+                  <a:latin typeface="Times New Roman"/>
+                  <a:ea typeface="Times New Roman"/>
+                  <a:cs typeface="Times New Roman"/>
                 </a:rPr>
                 <a:t>Context</a:t>
               </a:r>
-              <a:endParaRPr sz="950" b="0" i="0">
-                <a:solidFill>
-                  <a:srgbClr val="262626"/>
-                </a:solidFill>
-                <a:latin typeface="Arial" panose="020B0604020202020204"/>
-              </a:endParaRPr>
             </a:p>
           </p:txBody>
         </p:sp>
@@ -17537,7 +17937,7 @@
             <a:noFill/>
           </p:spPr>
           <p:txBody>
-            <a:bodyPr wrap="none" lIns="0" tIns="0" rIns="0" bIns="0" anchor="ctr">
+            <a:bodyPr wrap="none" lIns="0" rIns="0" tIns="0" bIns="0" anchor="ctr">
               <a:noAutofit/>
             </a:bodyPr>
             <a:lstStyle/>
@@ -17548,16 +17948,12 @@
                   <a:solidFill>
                     <a:srgbClr val="595959"/>
                   </a:solidFill>
-                  <a:latin typeface="Arial" panose="020B0604020202020204"/>
+                  <a:latin typeface="Times New Roman"/>
+                  <a:ea typeface="Times New Roman"/>
+                  <a:cs typeface="Times New Roman"/>
                 </a:rPr>
                 <a:t>7</a:t>
               </a:r>
-              <a:endParaRPr sz="950" b="0" i="0">
-                <a:solidFill>
-                  <a:srgbClr val="595959"/>
-                </a:solidFill>
-                <a:latin typeface="Arial" panose="020B0604020202020204"/>
-              </a:endParaRPr>
             </a:p>
           </p:txBody>
         </p:sp>
@@ -17661,7 +18057,7 @@
             <a:noFill/>
           </p:spPr>
           <p:txBody>
-            <a:bodyPr wrap="none" lIns="0" tIns="0" rIns="0" bIns="0" anchor="ctr">
+            <a:bodyPr wrap="none" lIns="0" rIns="0" tIns="0" bIns="0" anchor="ctr">
               <a:noAutofit/>
             </a:bodyPr>
             <a:lstStyle/>
@@ -17672,16 +18068,12 @@
                   <a:solidFill>
                     <a:srgbClr val="262626"/>
                   </a:solidFill>
-                  <a:latin typeface="Arial" panose="020B0604020202020204"/>
+                  <a:latin typeface="Times New Roman"/>
+                  <a:ea typeface="Times New Roman"/>
+                  <a:cs typeface="Times New Roman"/>
                 </a:rPr>
                 <a:t>Type</a:t>
               </a:r>
-              <a:endParaRPr sz="950" b="0" i="0">
-                <a:solidFill>
-                  <a:srgbClr val="262626"/>
-                </a:solidFill>
-                <a:latin typeface="Arial" panose="020B0604020202020204"/>
-              </a:endParaRPr>
             </a:p>
           </p:txBody>
         </p:sp>
@@ -17702,7 +18094,7 @@
             <a:noFill/>
           </p:spPr>
           <p:txBody>
-            <a:bodyPr wrap="none" lIns="0" tIns="0" rIns="0" bIns="0" anchor="ctr">
+            <a:bodyPr wrap="none" lIns="0" rIns="0" tIns="0" bIns="0" anchor="ctr">
               <a:noAutofit/>
             </a:bodyPr>
             <a:lstStyle/>
@@ -17713,16 +18105,12 @@
                   <a:solidFill>
                     <a:srgbClr val="595959"/>
                   </a:solidFill>
-                  <a:latin typeface="Arial" panose="020B0604020202020204"/>
+                  <a:latin typeface="Times New Roman"/>
+                  <a:ea typeface="Times New Roman"/>
+                  <a:cs typeface="Times New Roman"/>
                 </a:rPr>
                 <a:t>5</a:t>
               </a:r>
-              <a:endParaRPr sz="950" b="0" i="0">
-                <a:solidFill>
-                  <a:srgbClr val="595959"/>
-                </a:solidFill>
-                <a:latin typeface="Arial" panose="020B0604020202020204"/>
-              </a:endParaRPr>
             </a:p>
           </p:txBody>
         </p:sp>
@@ -17789,7 +18177,7 @@
             <a:noFill/>
           </p:spPr>
           <p:txBody>
-            <a:bodyPr wrap="none" lIns="0" tIns="0" rIns="0" bIns="0" anchor="ctr">
+            <a:bodyPr wrap="none" lIns="0" rIns="0" tIns="0" bIns="0" anchor="ctr">
               <a:noAutofit/>
             </a:bodyPr>
             <a:lstStyle/>
@@ -17800,16 +18188,12 @@
                   <a:solidFill>
                     <a:srgbClr val="262626"/>
                   </a:solidFill>
-                  <a:latin typeface="Arial" panose="020B0604020202020204"/>
+                  <a:latin typeface="Times New Roman"/>
+                  <a:ea typeface="Times New Roman"/>
+                  <a:cs typeface="Times New Roman"/>
                 </a:rPr>
                 <a:t>mean</a:t>
               </a:r>
-              <a:endParaRPr sz="800" b="0" i="0">
-                <a:solidFill>
-                  <a:srgbClr val="262626"/>
-                </a:solidFill>
-                <a:latin typeface="Arial" panose="020B0604020202020204"/>
-              </a:endParaRPr>
             </a:p>
           </p:txBody>
         </p:sp>
@@ -17830,7 +18214,7 @@
             <a:noFill/>
           </p:spPr>
           <p:txBody>
-            <a:bodyPr wrap="none" lIns="0" tIns="0" rIns="0" bIns="0" anchor="ctr">
+            <a:bodyPr wrap="none" lIns="0" rIns="0" tIns="0" bIns="0" anchor="ctr">
               <a:noAutofit/>
             </a:bodyPr>
             <a:lstStyle/>
@@ -17841,7 +18225,9 @@
                   <a:solidFill>
                     <a:srgbClr val="262626"/>
                   </a:solidFill>
-                  <a:latin typeface="Arial" panose="020B0604020202020204"/>
+                  <a:latin typeface="Times New Roman"/>
+                  <a:ea typeface="Times New Roman"/>
+                  <a:cs typeface="Times New Roman"/>
                 </a:rPr>
                 <a:t>+ E</a:t>
               </a:r>
@@ -17850,7 +18236,9 @@
                   <a:solidFill>
                     <a:srgbClr val="262626"/>
                   </a:solidFill>
-                  <a:latin typeface="Arial" panose="020B0604020202020204"/>
+                  <a:latin typeface="Times New Roman"/>
+                  <a:ea typeface="Times New Roman"/>
+                  <a:cs typeface="Times New Roman"/>
                 </a:rPr>
                 <a:t>time</a:t>
               </a:r>
@@ -17859,7 +18247,9 @@
                   <a:solidFill>
                     <a:srgbClr val="262626"/>
                   </a:solidFill>
-                  <a:latin typeface="Arial" panose="020B0604020202020204"/>
+                  <a:latin typeface="Times New Roman"/>
+                  <a:ea typeface="Times New Roman"/>
+                  <a:cs typeface="Times New Roman"/>
                 </a:rPr>
                 <a:t> + E</a:t>
               </a:r>
@@ -17868,7 +18258,9 @@
                   <a:solidFill>
                     <a:srgbClr val="262626"/>
                   </a:solidFill>
-                  <a:latin typeface="Arial" panose="020B0604020202020204"/>
+                  <a:latin typeface="Times New Roman"/>
+                  <a:ea typeface="Times New Roman"/>
+                  <a:cs typeface="Times New Roman"/>
                 </a:rPr>
                 <a:t>lap</a:t>
               </a:r>
@@ -17877,7 +18269,9 @@
                   <a:solidFill>
                     <a:srgbClr val="262626"/>
                   </a:solidFill>
-                  <a:latin typeface="Arial" panose="020B0604020202020204"/>
+                  <a:latin typeface="Times New Roman"/>
+                  <a:ea typeface="Times New Roman"/>
+                  <a:cs typeface="Times New Roman"/>
                 </a:rPr>
                 <a:t> + E</a:t>
               </a:r>
@@ -17886,16 +18280,12 @@
                   <a:solidFill>
                     <a:srgbClr val="262626"/>
                   </a:solidFill>
-                  <a:latin typeface="Arial" panose="020B0604020202020204"/>
+                  <a:latin typeface="Times New Roman"/>
+                  <a:ea typeface="Times New Roman"/>
+                  <a:cs typeface="Times New Roman"/>
                 </a:rPr>
                 <a:t>node</a:t>
               </a:r>
-              <a:endParaRPr sz="950" b="0" i="0" baseline="-25000">
-                <a:solidFill>
-                  <a:srgbClr val="262626"/>
-                </a:solidFill>
-                <a:latin typeface="Arial" panose="020B0604020202020204"/>
-              </a:endParaRPr>
             </a:p>
           </p:txBody>
         </p:sp>
@@ -17916,7 +18306,7 @@
             <a:noFill/>
           </p:spPr>
           <p:txBody>
-            <a:bodyPr wrap="none" lIns="0" tIns="0" rIns="0" bIns="0" anchor="ctr">
+            <a:bodyPr wrap="none" lIns="0" rIns="0" tIns="0" bIns="0" anchor="ctr">
               <a:noAutofit/>
             </a:bodyPr>
             <a:lstStyle/>
@@ -17927,7 +18317,9 @@
                   <a:solidFill>
                     <a:srgbClr val="262626"/>
                   </a:solidFill>
-                  <a:latin typeface="Arial" panose="020B0604020202020204"/>
+                  <a:latin typeface="Times New Roman"/>
+                  <a:ea typeface="Times New Roman"/>
+                  <a:cs typeface="Times New Roman"/>
                 </a:rPr>
                 <a:t>→ H</a:t>
               </a:r>
@@ -17936,16 +18328,12 @@
                   <a:solidFill>
                     <a:srgbClr val="262626"/>
                   </a:solidFill>
-                  <a:latin typeface="Arial" panose="020B0604020202020204"/>
+                  <a:latin typeface="Times New Roman"/>
+                  <a:ea typeface="Times New Roman"/>
+                  <a:cs typeface="Times New Roman"/>
                 </a:rPr>
                 <a:t>(0)</a:t>
               </a:r>
-              <a:endParaRPr sz="1000" b="0" i="0" baseline="30000">
-                <a:solidFill>
-                  <a:srgbClr val="262626"/>
-                </a:solidFill>
-                <a:latin typeface="Arial" panose="020B0604020202020204"/>
-              </a:endParaRPr>
             </a:p>
           </p:txBody>
         </p:sp>
@@ -18015,7 +18403,7 @@
             <a:noFill/>
           </p:spPr>
           <p:txBody>
-            <a:bodyPr wrap="none" lIns="0" tIns="0" rIns="0" bIns="0" anchor="ctr">
+            <a:bodyPr wrap="none" lIns="0" rIns="0" tIns="0" bIns="0" anchor="ctr">
               <a:noAutofit/>
             </a:bodyPr>
             <a:lstStyle/>
@@ -18026,16 +18414,12 @@
                   <a:solidFill>
                     <a:srgbClr val="262626"/>
                   </a:solidFill>
-                  <a:latin typeface="Arial" panose="020B0604020202020204"/>
+                  <a:latin typeface="Times New Roman"/>
+                  <a:ea typeface="Times New Roman"/>
+                  <a:cs typeface="Times New Roman"/>
                 </a:rPr>
                 <a:t>Encoder block × 5   (d = 80)</a:t>
               </a:r>
-              <a:endParaRPr sz="1050" b="1" i="0">
-                <a:solidFill>
-                  <a:srgbClr val="262626"/>
-                </a:solidFill>
-                <a:latin typeface="Arial" panose="020B0604020202020204"/>
-              </a:endParaRPr>
             </a:p>
           </p:txBody>
         </p:sp>
@@ -18151,7 +18535,7 @@
             <a:noFill/>
           </p:spPr>
           <p:txBody>
-            <a:bodyPr wrap="none" lIns="0" tIns="0" rIns="0" bIns="0" anchor="ctr">
+            <a:bodyPr wrap="none" lIns="0" rIns="0" tIns="0" bIns="0" anchor="ctr">
               <a:noAutofit/>
             </a:bodyPr>
             <a:lstStyle/>
@@ -18162,16 +18546,23 @@
                   <a:solidFill>
                     <a:srgbClr val="FFFFFF"/>
                   </a:solidFill>
-                  <a:latin typeface="Arial" panose="020B0604020202020204"/>
+                  <a:latin typeface="Times New Roman"/>
+                  <a:ea typeface="Times New Roman"/>
+                  <a:cs typeface="Times New Roman"/>
                 </a:rPr>
-                <a:t>Delay-propagation module</a:t>
+                <a:t>Contribution 3</a:t>
               </a:r>
-              <a:endParaRPr sz="1100" b="1" i="0">
-                <a:solidFill>
-                  <a:srgbClr val="FFFFFF"/>
-                </a:solidFill>
-                <a:latin typeface="Arial" panose="020B0604020202020204"/>
-              </a:endParaRPr>
+              <a:r>
+                <a:rPr sz="1100" b="1" i="0">
+                  <a:solidFill>
+                    <a:srgbClr val="FFFFFF"/>
+                  </a:solidFill>
+                  <a:latin typeface="Times New Roman"/>
+                  <a:ea typeface="Times New Roman"/>
+                  <a:cs typeface="Times New Roman"/>
+                </a:rPr>
+                <a:t>  ·  Delay-propagation module</a:t>
+              </a:r>
             </a:p>
           </p:txBody>
         </p:sp>
@@ -18240,7 +18631,7 @@
             <a:noFill/>
           </p:spPr>
           <p:txBody>
-            <a:bodyPr wrap="none" lIns="0" tIns="0" rIns="0" bIns="0" anchor="ctr">
+            <a:bodyPr wrap="none" lIns="0" rIns="0" tIns="0" bIns="0" anchor="ctr">
               <a:noAutofit/>
             </a:bodyPr>
             <a:lstStyle/>
@@ -18251,7 +18642,9 @@
                   <a:solidFill>
                     <a:srgbClr val="CB001C"/>
                   </a:solidFill>
-                  <a:latin typeface="Segoe UI Symbol" panose="020B0502040204020203"/>
+                  <a:latin typeface="Segoe UI Symbol"/>
+                  <a:ea typeface="Segoe UI Symbol"/>
+                  <a:cs typeface="Segoe UI Symbol"/>
                 </a:rPr>
                 <a:t>✕ </a:t>
               </a:r>
@@ -18260,16 +18653,12 @@
                   <a:solidFill>
                     <a:srgbClr val="595959"/>
                   </a:solidFill>
-                  <a:latin typeface="Arial" panose="020B0604020202020204"/>
+                  <a:latin typeface="Times New Roman"/>
+                  <a:ea typeface="Times New Roman"/>
+                  <a:cs typeface="Times New Roman"/>
                 </a:rPr>
                 <a:t>Prior work</a:t>
               </a:r>
-              <a:endParaRPr sz="1000" b="1" i="0">
-                <a:solidFill>
-                  <a:srgbClr val="595959"/>
-                </a:solidFill>
-                <a:latin typeface="Arial" panose="020B0604020202020204"/>
-              </a:endParaRPr>
             </a:p>
           </p:txBody>
         </p:sp>
@@ -18371,7 +18760,7 @@
             <a:noFill/>
           </p:spPr>
           <p:txBody>
-            <a:bodyPr wrap="none" lIns="0" tIns="0" rIns="0" bIns="0" anchor="ctr">
+            <a:bodyPr wrap="none" lIns="0" rIns="0" tIns="0" bIns="0" anchor="ctr">
               <a:noAutofit/>
             </a:bodyPr>
             <a:lstStyle/>
@@ -18382,16 +18771,12 @@
                   <a:solidFill>
                     <a:srgbClr val="FFFFFF"/>
                   </a:solidFill>
-                  <a:latin typeface="Arial" panose="020B0604020202020204"/>
+                  <a:latin typeface="Times New Roman"/>
+                  <a:ea typeface="Times New Roman"/>
+                  <a:cs typeface="Times New Roman"/>
                 </a:rPr>
                 <a:t>i</a:t>
               </a:r>
-              <a:endParaRPr sz="800" b="1" i="0">
-                <a:solidFill>
-                  <a:srgbClr val="FFFFFF"/>
-                </a:solidFill>
-                <a:latin typeface="Arial" panose="020B0604020202020204"/>
-              </a:endParaRPr>
             </a:p>
           </p:txBody>
         </p:sp>
@@ -18458,7 +18843,7 @@
             <a:noFill/>
           </p:spPr>
           <p:txBody>
-            <a:bodyPr wrap="none" lIns="0" tIns="0" rIns="0" bIns="0" anchor="ctr">
+            <a:bodyPr wrap="none" lIns="0" rIns="0" tIns="0" bIns="0" anchor="ctr">
               <a:noAutofit/>
             </a:bodyPr>
             <a:lstStyle/>
@@ -18469,16 +18854,12 @@
                   <a:solidFill>
                     <a:srgbClr val="FFFFFF"/>
                   </a:solidFill>
-                  <a:latin typeface="Arial" panose="020B0604020202020204"/>
+                  <a:latin typeface="Times New Roman"/>
+                  <a:ea typeface="Times New Roman"/>
+                  <a:cs typeface="Times New Roman"/>
                 </a:rPr>
                 <a:t>j</a:t>
               </a:r>
-              <a:endParaRPr sz="800" b="1" i="0">
-                <a:solidFill>
-                  <a:srgbClr val="FFFFFF"/>
-                </a:solidFill>
-                <a:latin typeface="Arial" panose="020B0604020202020204"/>
-              </a:endParaRPr>
             </a:p>
           </p:txBody>
         </p:sp>
@@ -18499,7 +18880,7 @@
             <a:noFill/>
           </p:spPr>
           <p:txBody>
-            <a:bodyPr wrap="none" lIns="0" tIns="0" rIns="0" bIns="0" anchor="ctr">
+            <a:bodyPr wrap="none" lIns="0" rIns="0" tIns="0" bIns="0" anchor="ctr">
               <a:noAutofit/>
             </a:bodyPr>
             <a:lstStyle/>
@@ -18510,16 +18891,12 @@
                   <a:solidFill>
                     <a:srgbClr val="595959"/>
                   </a:solidFill>
-                  <a:latin typeface="Arial" panose="020B0604020202020204"/>
+                  <a:latin typeface="Times New Roman"/>
+                  <a:ea typeface="Times New Roman"/>
+                  <a:cs typeface="Times New Roman"/>
                 </a:rPr>
                 <a:t>t</a:t>
               </a:r>
-              <a:endParaRPr sz="850" b="0" i="0">
-                <a:solidFill>
-                  <a:srgbClr val="595959"/>
-                </a:solidFill>
-                <a:latin typeface="Arial" panose="020B0604020202020204"/>
-              </a:endParaRPr>
             </a:p>
           </p:txBody>
         </p:sp>
@@ -18540,7 +18917,7 @@
             <a:noFill/>
           </p:spPr>
           <p:txBody>
-            <a:bodyPr wrap="none" lIns="0" tIns="0" rIns="0" bIns="0" anchor="ctr">
+            <a:bodyPr wrap="none" lIns="0" rIns="0" tIns="0" bIns="0" anchor="ctr">
               <a:noAutofit/>
             </a:bodyPr>
             <a:lstStyle/>
@@ -18551,16 +18928,12 @@
                   <a:solidFill>
                     <a:srgbClr val="595959"/>
                   </a:solidFill>
-                  <a:latin typeface="Arial" panose="020B0604020202020204"/>
+                  <a:latin typeface="Times New Roman"/>
+                  <a:ea typeface="Times New Roman"/>
+                  <a:cs typeface="Times New Roman"/>
                 </a:rPr>
                 <a:t>t</a:t>
               </a:r>
-              <a:endParaRPr sz="850" b="0" i="0">
-                <a:solidFill>
-                  <a:srgbClr val="595959"/>
-                </a:solidFill>
-                <a:latin typeface="Arial" panose="020B0604020202020204"/>
-              </a:endParaRPr>
             </a:p>
           </p:txBody>
         </p:sp>
@@ -18581,7 +18954,7 @@
             <a:noFill/>
           </p:spPr>
           <p:txBody>
-            <a:bodyPr wrap="none" lIns="0" tIns="0" rIns="0" bIns="0" anchor="ctr">
+            <a:bodyPr wrap="none" lIns="0" rIns="0" tIns="0" bIns="0" anchor="ctr">
               <a:noAutofit/>
             </a:bodyPr>
             <a:lstStyle/>
@@ -18592,16 +18965,12 @@
                   <a:solidFill>
                     <a:srgbClr val="595959"/>
                   </a:solidFill>
-                  <a:latin typeface="Arial" panose="020B0604020202020204"/>
+                  <a:latin typeface="Times New Roman"/>
+                  <a:ea typeface="Times New Roman"/>
+                  <a:cs typeface="Times New Roman"/>
                 </a:rPr>
                 <a:t>same-time links</a:t>
               </a:r>
-              <a:endParaRPr sz="950" b="0" i="0">
-                <a:solidFill>
-                  <a:srgbClr val="595959"/>
-                </a:solidFill>
-                <a:latin typeface="Arial" panose="020B0604020202020204"/>
-              </a:endParaRPr>
             </a:p>
           </p:txBody>
         </p:sp>
@@ -18706,7 +19075,7 @@
             <a:noFill/>
           </p:spPr>
           <p:txBody>
-            <a:bodyPr wrap="none" lIns="0" tIns="0" rIns="0" bIns="0" anchor="ctr">
+            <a:bodyPr wrap="none" lIns="0" rIns="0" tIns="0" bIns="0" anchor="ctr">
               <a:noAutofit/>
             </a:bodyPr>
             <a:lstStyle/>
@@ -18717,7 +19086,9 @@
                   <a:solidFill>
                     <a:srgbClr val="CB001C"/>
                   </a:solidFill>
-                  <a:latin typeface="Segoe UI Symbol" panose="020B0502040204020203"/>
+                  <a:latin typeface="Segoe UI Symbol"/>
+                  <a:ea typeface="Segoe UI Symbol"/>
+                  <a:cs typeface="Segoe UI Symbol"/>
                 </a:rPr>
                 <a:t>✓ </a:t>
               </a:r>
@@ -18726,16 +19097,12 @@
                   <a:solidFill>
                     <a:srgbClr val="CB001C"/>
                   </a:solidFill>
-                  <a:latin typeface="Arial" panose="020B0604020202020204"/>
+                  <a:latin typeface="Times New Roman"/>
+                  <a:ea typeface="Times New Roman"/>
+                  <a:cs typeface="Times New Roman"/>
                 </a:rPr>
-                <a:t>PHAST-DP</a:t>
+                <a:t>PHGST-DP</a:t>
               </a:r>
-              <a:endParaRPr sz="1000" b="1" i="0">
-                <a:solidFill>
-                  <a:srgbClr val="CB001C"/>
-                </a:solidFill>
-                <a:latin typeface="Arial" panose="020B0604020202020204"/>
-              </a:endParaRPr>
             </a:p>
           </p:txBody>
         </p:sp>
@@ -18955,7 +19322,7 @@
             <a:noFill/>
           </p:spPr>
           <p:txBody>
-            <a:bodyPr wrap="none" lIns="0" tIns="0" rIns="0" bIns="0" anchor="ctr">
+            <a:bodyPr wrap="none" lIns="0" rIns="0" tIns="0" bIns="0" anchor="ctr">
               <a:noAutofit/>
             </a:bodyPr>
             <a:lstStyle/>
@@ -18966,16 +19333,12 @@
                   <a:solidFill>
                     <a:srgbClr val="FFFFFF"/>
                   </a:solidFill>
-                  <a:latin typeface="Arial" panose="020B0604020202020204"/>
+                  <a:latin typeface="Times New Roman"/>
+                  <a:ea typeface="Times New Roman"/>
+                  <a:cs typeface="Times New Roman"/>
                 </a:rPr>
                 <a:t>i</a:t>
               </a:r>
-              <a:endParaRPr sz="800" b="1" i="0">
-                <a:solidFill>
-                  <a:srgbClr val="FFFFFF"/>
-                </a:solidFill>
-                <a:latin typeface="Arial" panose="020B0604020202020204"/>
-              </a:endParaRPr>
             </a:p>
           </p:txBody>
         </p:sp>
@@ -18996,7 +19359,7 @@
             <a:noFill/>
           </p:spPr>
           <p:txBody>
-            <a:bodyPr wrap="none" lIns="0" tIns="0" rIns="0" bIns="0" anchor="ctr">
+            <a:bodyPr wrap="none" lIns="0" rIns="0" tIns="0" bIns="0" anchor="ctr">
               <a:noAutofit/>
             </a:bodyPr>
             <a:lstStyle/>
@@ -19007,16 +19370,12 @@
                   <a:solidFill>
                     <a:srgbClr val="FFFFFF"/>
                   </a:solidFill>
-                  <a:latin typeface="Arial" panose="020B0604020202020204"/>
+                  <a:latin typeface="Times New Roman"/>
+                  <a:ea typeface="Times New Roman"/>
+                  <a:cs typeface="Times New Roman"/>
                 </a:rPr>
                 <a:t>j</a:t>
               </a:r>
-              <a:endParaRPr sz="800" b="1" i="0">
-                <a:solidFill>
-                  <a:srgbClr val="FFFFFF"/>
-                </a:solidFill>
-                <a:latin typeface="Arial" panose="020B0604020202020204"/>
-              </a:endParaRPr>
             </a:p>
           </p:txBody>
         </p:sp>
@@ -19037,7 +19396,7 @@
             <a:noFill/>
           </p:spPr>
           <p:txBody>
-            <a:bodyPr wrap="none" lIns="0" tIns="0" rIns="0" bIns="0" anchor="ctr">
+            <a:bodyPr wrap="none" lIns="0" rIns="0" tIns="0" bIns="0" anchor="ctr">
               <a:noAutofit/>
             </a:bodyPr>
             <a:lstStyle/>
@@ -19048,16 +19407,12 @@
                   <a:solidFill>
                     <a:srgbClr val="595959"/>
                   </a:solidFill>
-                  <a:latin typeface="Arial" panose="020B0604020202020204"/>
+                  <a:latin typeface="Times New Roman"/>
+                  <a:ea typeface="Times New Roman"/>
+                  <a:cs typeface="Times New Roman"/>
                 </a:rPr>
                 <a:t>t−τ</a:t>
               </a:r>
-              <a:endParaRPr sz="850" b="0" i="0">
-                <a:solidFill>
-                  <a:srgbClr val="595959"/>
-                </a:solidFill>
-                <a:latin typeface="Arial" panose="020B0604020202020204"/>
-              </a:endParaRPr>
             </a:p>
           </p:txBody>
         </p:sp>
@@ -19078,7 +19433,7 @@
             <a:noFill/>
           </p:spPr>
           <p:txBody>
-            <a:bodyPr wrap="none" lIns="0" tIns="0" rIns="0" bIns="0" anchor="ctr">
+            <a:bodyPr wrap="none" lIns="0" rIns="0" tIns="0" bIns="0" anchor="ctr">
               <a:noAutofit/>
             </a:bodyPr>
             <a:lstStyle/>
@@ -19089,16 +19444,12 @@
                   <a:solidFill>
                     <a:srgbClr val="595959"/>
                   </a:solidFill>
-                  <a:latin typeface="Arial" panose="020B0604020202020204"/>
+                  <a:latin typeface="Times New Roman"/>
+                  <a:ea typeface="Times New Roman"/>
+                  <a:cs typeface="Times New Roman"/>
                 </a:rPr>
                 <a:t>t</a:t>
               </a:r>
-              <a:endParaRPr sz="850" b="0" i="0">
-                <a:solidFill>
-                  <a:srgbClr val="595959"/>
-                </a:solidFill>
-                <a:latin typeface="Arial" panose="020B0604020202020204"/>
-              </a:endParaRPr>
             </a:p>
           </p:txBody>
         </p:sp>
@@ -19119,7 +19470,7 @@
             <a:noFill/>
           </p:spPr>
           <p:txBody>
-            <a:bodyPr wrap="none" lIns="0" tIns="0" rIns="0" bIns="0" anchor="ctr">
+            <a:bodyPr wrap="none" lIns="0" rIns="0" tIns="0" bIns="0" anchor="ctr">
               <a:noAutofit/>
             </a:bodyPr>
             <a:lstStyle/>
@@ -19130,16 +19481,12 @@
                   <a:solidFill>
                     <a:srgbClr val="CB001C"/>
                   </a:solidFill>
-                  <a:latin typeface="Arial" panose="020B0604020202020204"/>
+                  <a:latin typeface="Times New Roman"/>
+                  <a:ea typeface="Times New Roman"/>
+                  <a:cs typeface="Times New Roman"/>
                 </a:rPr>
                 <a:t>lagged precursors</a:t>
               </a:r>
-              <a:endParaRPr sz="950" b="1" i="0">
-                <a:solidFill>
-                  <a:srgbClr val="CB001C"/>
-                </a:solidFill>
-                <a:latin typeface="Arial" panose="020B0604020202020204"/>
-              </a:endParaRPr>
             </a:p>
           </p:txBody>
         </p:sp>
@@ -19160,7 +19507,7 @@
             <a:noFill/>
           </p:spPr>
           <p:txBody>
-            <a:bodyPr wrap="none" lIns="0" tIns="0" rIns="0" bIns="0" anchor="ctr">
+            <a:bodyPr wrap="none" lIns="0" rIns="0" tIns="0" bIns="0" anchor="ctr">
               <a:noAutofit/>
             </a:bodyPr>
             <a:lstStyle/>
@@ -19171,16 +19518,12 @@
                   <a:solidFill>
                     <a:srgbClr val="262626"/>
                   </a:solidFill>
-                  <a:latin typeface="Arial" panose="020B0604020202020204"/>
+                  <a:latin typeface="Times New Roman"/>
+                  <a:ea typeface="Times New Roman"/>
+                  <a:cs typeface="Times New Roman"/>
                 </a:rPr>
                 <a:t>Pattern attention</a:t>
               </a:r>
-              <a:endParaRPr sz="1000" b="1" i="0">
-                <a:solidFill>
-                  <a:srgbClr val="262626"/>
-                </a:solidFill>
-                <a:latin typeface="Arial" panose="020B0604020202020204"/>
-              </a:endParaRPr>
             </a:p>
           </p:txBody>
         </p:sp>
@@ -19201,7 +19544,7 @@
             <a:noFill/>
           </p:spPr>
           <p:txBody>
-            <a:bodyPr wrap="none" lIns="0" tIns="0" rIns="0" bIns="0" anchor="ctr">
+            <a:bodyPr wrap="none" lIns="0" rIns="0" tIns="0" bIns="0" anchor="ctr">
               <a:noAutofit/>
             </a:bodyPr>
             <a:lstStyle/>
@@ -19212,7 +19555,9 @@
                   <a:solidFill>
                     <a:srgbClr val="595959"/>
                   </a:solidFill>
-                  <a:latin typeface="Arial" panose="020B0604020202020204"/>
+                  <a:latin typeface="Times New Roman"/>
+                  <a:ea typeface="Times New Roman"/>
+                  <a:cs typeface="Times New Roman"/>
                 </a:rPr>
                 <a:t>queue patch P</a:t>
               </a:r>
@@ -19221,16 +19566,12 @@
                   <a:solidFill>
                     <a:srgbClr val="595959"/>
                   </a:solidFill>
-                  <a:latin typeface="Arial" panose="020B0604020202020204"/>
+                  <a:latin typeface="Times New Roman"/>
+                  <a:ea typeface="Times New Roman"/>
+                  <a:cs typeface="Times New Roman"/>
                 </a:rPr>
                 <a:t>t,n</a:t>
               </a:r>
-              <a:endParaRPr sz="950" b="0" i="0" baseline="-25000">
-                <a:solidFill>
-                  <a:srgbClr val="595959"/>
-                </a:solidFill>
-                <a:latin typeface="Arial" panose="020B0604020202020204"/>
-              </a:endParaRPr>
             </a:p>
           </p:txBody>
         </p:sp>
@@ -19251,7 +19592,7 @@
             <a:noFill/>
           </p:spPr>
           <p:txBody>
-            <a:bodyPr wrap="none" lIns="0" tIns="0" rIns="0" bIns="0" anchor="ctr">
+            <a:bodyPr wrap="none" lIns="0" rIns="0" tIns="0" bIns="0" anchor="ctr">
               <a:noAutofit/>
             </a:bodyPr>
             <a:lstStyle/>
@@ -19262,7 +19603,9 @@
                   <a:solidFill>
                     <a:srgbClr val="595959"/>
                   </a:solidFill>
-                  <a:latin typeface="Arial" panose="020B0604020202020204"/>
+                  <a:latin typeface="Times New Roman"/>
+                  <a:ea typeface="Times New Roman"/>
+                  <a:cs typeface="Times New Roman"/>
                 </a:rPr>
                 <a:t>× 16 keys K</a:t>
               </a:r>
@@ -19271,7 +19614,9 @@
                   <a:solidFill>
                     <a:srgbClr val="595959"/>
                   </a:solidFill>
-                  <a:latin typeface="Arial" panose="020B0604020202020204"/>
+                  <a:latin typeface="Times New Roman"/>
+                  <a:ea typeface="Times New Roman"/>
+                  <a:cs typeface="Times New Roman"/>
                 </a:rPr>
                 <a:t>P</a:t>
               </a:r>
@@ -19280,7 +19625,9 @@
                   <a:solidFill>
                     <a:srgbClr val="595959"/>
                   </a:solidFill>
-                  <a:latin typeface="Arial" panose="020B0604020202020204"/>
+                  <a:latin typeface="Times New Roman"/>
+                  <a:ea typeface="Times New Roman"/>
+                  <a:cs typeface="Times New Roman"/>
                 </a:rPr>
                 <a:t> → C</a:t>
               </a:r>
@@ -19289,16 +19636,12 @@
                   <a:solidFill>
                     <a:srgbClr val="595959"/>
                   </a:solidFill>
-                  <a:latin typeface="Arial" panose="020B0604020202020204"/>
+                  <a:latin typeface="Times New Roman"/>
+                  <a:ea typeface="Times New Roman"/>
+                  <a:cs typeface="Times New Roman"/>
                 </a:rPr>
                 <a:t>P</a:t>
               </a:r>
-              <a:endParaRPr sz="950" b="0" i="0" baseline="30000">
-                <a:solidFill>
-                  <a:srgbClr val="595959"/>
-                </a:solidFill>
-                <a:latin typeface="Arial" panose="020B0604020202020204"/>
-              </a:endParaRPr>
             </a:p>
           </p:txBody>
         </p:sp>
@@ -19319,7 +19662,7 @@
             <a:noFill/>
           </p:spPr>
           <p:txBody>
-            <a:bodyPr wrap="none" lIns="0" tIns="0" rIns="0" bIns="0" anchor="ctr">
+            <a:bodyPr wrap="none" lIns="0" rIns="0" tIns="0" bIns="0" anchor="ctr">
               <a:noAutofit/>
             </a:bodyPr>
             <a:lstStyle/>
@@ -19330,7 +19673,9 @@
                   <a:solidFill>
                     <a:srgbClr val="CB001C"/>
                   </a:solidFill>
-                  <a:latin typeface="Arial" panose="020B0604020202020204"/>
+                  <a:latin typeface="Times New Roman"/>
+                  <a:ea typeface="Times New Roman"/>
+                  <a:cs typeface="Times New Roman"/>
                 </a:rPr>
                 <a:t>C</a:t>
               </a:r>
@@ -19339,7 +19684,9 @@
                   <a:solidFill>
                     <a:srgbClr val="CB001C"/>
                   </a:solidFill>
-                  <a:latin typeface="Arial" panose="020B0604020202020204"/>
+                  <a:latin typeface="Times New Roman"/>
+                  <a:ea typeface="Times New Roman"/>
+                  <a:cs typeface="Times New Roman"/>
                 </a:rPr>
                 <a:t>P</a:t>
               </a:r>
@@ -19348,16 +19695,12 @@
                   <a:solidFill>
                     <a:srgbClr val="CB001C"/>
                   </a:solidFill>
-                  <a:latin typeface="Arial" panose="020B0604020202020204"/>
+                  <a:latin typeface="Times New Roman"/>
+                  <a:ea typeface="Times New Roman"/>
+                  <a:cs typeface="Times New Roman"/>
                 </a:rPr>
                 <a:t> added to geo. keys</a:t>
               </a:r>
-              <a:endParaRPr sz="950" b="1" i="0">
-                <a:solidFill>
-                  <a:srgbClr val="CB001C"/>
-                </a:solidFill>
-                <a:latin typeface="Arial" panose="020B0604020202020204"/>
-              </a:endParaRPr>
             </a:p>
           </p:txBody>
         </p:sp>
@@ -19540,7 +19883,7 @@
             <a:noFill/>
           </p:spPr>
           <p:txBody>
-            <a:bodyPr wrap="none" lIns="0" tIns="0" rIns="0" bIns="0" anchor="ctr">
+            <a:bodyPr wrap="none" lIns="0" rIns="0" tIns="0" bIns="0" anchor="ctr">
               <a:noAutofit/>
             </a:bodyPr>
             <a:lstStyle/>
@@ -19551,7 +19894,9 @@
                   <a:solidFill>
                     <a:srgbClr val="262626"/>
                   </a:solidFill>
-                  <a:latin typeface="Arial" panose="020B0604020202020204"/>
+                  <a:latin typeface="Times New Roman"/>
+                  <a:ea typeface="Times New Roman"/>
+                  <a:cs typeface="Times New Roman"/>
                 </a:rPr>
                 <a:t>Geographic attn ×2</a:t>
               </a:r>
@@ -19560,7 +19905,9 @@
                   <a:solidFill>
                     <a:srgbClr val="595959"/>
                   </a:solidFill>
-                  <a:latin typeface="Arial" panose="020B0604020202020204"/>
+                  <a:latin typeface="Times New Roman"/>
+                  <a:ea typeface="Times New Roman"/>
+                  <a:cs typeface="Times New Roman"/>
                 </a:rPr>
                 <a:t>  mask M</a:t>
               </a:r>
@@ -19569,7 +19916,9 @@
                   <a:solidFill>
                     <a:srgbClr val="595959"/>
                   </a:solidFill>
-                  <a:latin typeface="Arial" panose="020B0604020202020204"/>
+                  <a:latin typeface="Times New Roman"/>
+                  <a:ea typeface="Times New Roman"/>
+                  <a:cs typeface="Times New Roman"/>
                 </a:rPr>
                 <a:t>G</a:t>
               </a:r>
@@ -19578,7 +19927,9 @@
                   <a:solidFill>
                     <a:srgbClr val="595959"/>
                   </a:solidFill>
-                  <a:latin typeface="Arial" panose="020B0604020202020204"/>
+                  <a:latin typeface="Times New Roman"/>
+                  <a:ea typeface="Times New Roman"/>
+                  <a:cs typeface="Times New Roman"/>
                 </a:rPr>
                 <a:t>, keys + C</a:t>
               </a:r>
@@ -19587,16 +19938,12 @@
                   <a:solidFill>
                     <a:srgbClr val="595959"/>
                   </a:solidFill>
-                  <a:latin typeface="Arial" panose="020B0604020202020204"/>
+                  <a:latin typeface="Times New Roman"/>
+                  <a:ea typeface="Times New Roman"/>
+                  <a:cs typeface="Times New Roman"/>
                 </a:rPr>
                 <a:t>P</a:t>
               </a:r>
-              <a:endParaRPr sz="950" b="0" i="0" baseline="30000">
-                <a:solidFill>
-                  <a:srgbClr val="595959"/>
-                </a:solidFill>
-                <a:latin typeface="Arial" panose="020B0604020202020204"/>
-              </a:endParaRPr>
             </a:p>
           </p:txBody>
         </p:sp>
@@ -19780,7 +20127,7 @@
             <a:noFill/>
           </p:spPr>
           <p:txBody>
-            <a:bodyPr wrap="none" lIns="0" tIns="0" rIns="0" bIns="0" anchor="ctr">
+            <a:bodyPr wrap="none" lIns="0" rIns="0" tIns="0" bIns="0" anchor="ctr">
               <a:noAutofit/>
             </a:bodyPr>
             <a:lstStyle/>
@@ -19791,7 +20138,9 @@
                   <a:solidFill>
                     <a:srgbClr val="262626"/>
                   </a:solidFill>
-                  <a:latin typeface="Arial" panose="020B0604020202020204"/>
+                  <a:latin typeface="Times New Roman"/>
+                  <a:ea typeface="Times New Roman"/>
+                  <a:cs typeface="Times New Roman"/>
                 </a:rPr>
                 <a:t>Temporal attn ×4</a:t>
               </a:r>
@@ -19800,16 +20149,12 @@
                   <a:solidFill>
                     <a:srgbClr val="595959"/>
                   </a:solidFill>
-                  <a:latin typeface="Arial" panose="020B0604020202020204"/>
+                  <a:latin typeface="Times New Roman"/>
+                  <a:ea typeface="Times New Roman"/>
+                  <a:cs typeface="Times New Roman"/>
                 </a:rPr>
                 <a:t>  per resource, 30 windows</a:t>
               </a:r>
-              <a:endParaRPr sz="950" b="0" i="0">
-                <a:solidFill>
-                  <a:srgbClr val="595959"/>
-                </a:solidFill>
-                <a:latin typeface="Arial" panose="020B0604020202020204"/>
-              </a:endParaRPr>
             </a:p>
           </p:txBody>
         </p:sp>
@@ -19993,7 +20338,7 @@
             <a:noFill/>
           </p:spPr>
           <p:txBody>
-            <a:bodyPr wrap="none" lIns="0" tIns="0" rIns="0" bIns="0" anchor="ctr">
+            <a:bodyPr wrap="none" lIns="0" rIns="0" tIns="0" bIns="0" anchor="ctr">
               <a:noAutofit/>
             </a:bodyPr>
             <a:lstStyle/>
@@ -20004,7 +20349,9 @@
                   <a:solidFill>
                     <a:srgbClr val="262626"/>
                   </a:solidFill>
-                  <a:latin typeface="Arial" panose="020B0604020202020204"/>
+                  <a:latin typeface="Times New Roman"/>
+                  <a:ea typeface="Times New Roman"/>
+                  <a:cs typeface="Times New Roman"/>
                 </a:rPr>
                 <a:t>Semantic attn ×2</a:t>
               </a:r>
@@ -20013,7 +20360,9 @@
                   <a:solidFill>
                     <a:srgbClr val="595959"/>
                   </a:solidFill>
-                  <a:latin typeface="Arial" panose="020B0604020202020204"/>
+                  <a:latin typeface="Times New Roman"/>
+                  <a:ea typeface="Times New Roman"/>
+                  <a:cs typeface="Times New Roman"/>
                 </a:rPr>
                 <a:t>  mask M</a:t>
               </a:r>
@@ -20022,7 +20371,9 @@
                   <a:solidFill>
                     <a:srgbClr val="595959"/>
                   </a:solidFill>
-                  <a:latin typeface="Arial" panose="020B0604020202020204"/>
+                  <a:latin typeface="Times New Roman"/>
+                  <a:ea typeface="Times New Roman"/>
+                  <a:cs typeface="Times New Roman"/>
                 </a:rPr>
                 <a:t>S</a:t>
               </a:r>
@@ -20031,16 +20382,12 @@
                   <a:solidFill>
                     <a:srgbClr val="595959"/>
                   </a:solidFill>
-                  <a:latin typeface="Arial" panose="020B0604020202020204"/>
+                  <a:latin typeface="Times New Roman"/>
+                  <a:ea typeface="Times New Roman"/>
+                  <a:cs typeface="Times New Roman"/>
                 </a:rPr>
                 <a:t>, similar resources</a:t>
               </a:r>
-              <a:endParaRPr sz="950" b="0" i="0">
-                <a:solidFill>
-                  <a:srgbClr val="595959"/>
-                </a:solidFill>
-                <a:latin typeface="Arial" panose="020B0604020202020204"/>
-              </a:endParaRPr>
             </a:p>
           </p:txBody>
         </p:sp>
@@ -20216,7 +20563,7 @@
             <a:noFill/>
           </p:spPr>
           <p:txBody>
-            <a:bodyPr wrap="none" lIns="0" tIns="0" rIns="0" bIns="0" anchor="ctr">
+            <a:bodyPr wrap="none" lIns="0" rIns="0" tIns="0" bIns="0" anchor="ctr">
               <a:noAutofit/>
             </a:bodyPr>
             <a:lstStyle/>
@@ -20227,16 +20574,12 @@
                   <a:solidFill>
                     <a:srgbClr val="262626"/>
                   </a:solidFill>
-                  <a:latin typeface="Arial" panose="020B0604020202020204"/>
+                  <a:latin typeface="Times New Roman"/>
+                  <a:ea typeface="Times New Roman"/>
+                  <a:cs typeface="Times New Roman"/>
                 </a:rPr>
                 <a:t>Concat +</a:t>
               </a:r>
-              <a:endParaRPr sz="950" b="1" i="0">
-                <a:solidFill>
-                  <a:srgbClr val="262626"/>
-                </a:solidFill>
-                <a:latin typeface="Arial" panose="020B0604020202020204"/>
-              </a:endParaRPr>
             </a:p>
             <a:p>
               <a:pPr algn="ctr"/>
@@ -20245,16 +20588,12 @@
                   <a:solidFill>
                     <a:srgbClr val="262626"/>
                   </a:solidFill>
-                  <a:latin typeface="Arial" panose="020B0604020202020204"/>
+                  <a:latin typeface="Times New Roman"/>
+                  <a:ea typeface="Times New Roman"/>
+                  <a:cs typeface="Times New Roman"/>
                 </a:rPr>
                 <a:t>project</a:t>
               </a:r>
-              <a:endParaRPr sz="950" b="1" i="0">
-                <a:solidFill>
-                  <a:srgbClr val="262626"/>
-                </a:solidFill>
-                <a:latin typeface="Arial" panose="020B0604020202020204"/>
-              </a:endParaRPr>
             </a:p>
           </p:txBody>
         </p:sp>
@@ -20323,7 +20662,7 @@
             <a:noFill/>
           </p:spPr>
           <p:txBody>
-            <a:bodyPr wrap="none" lIns="0" tIns="0" rIns="0" bIns="0" anchor="ctr">
+            <a:bodyPr wrap="none" lIns="0" rIns="0" tIns="0" bIns="0" anchor="ctr">
               <a:noAutofit/>
             </a:bodyPr>
             <a:lstStyle/>
@@ -20334,16 +20673,12 @@
                   <a:solidFill>
                     <a:srgbClr val="262626"/>
                   </a:solidFill>
-                  <a:latin typeface="Arial" panose="020B0604020202020204"/>
+                  <a:latin typeface="Times New Roman"/>
+                  <a:ea typeface="Times New Roman"/>
+                  <a:cs typeface="Times New Roman"/>
                 </a:rPr>
                 <a:t>Add &amp; Norm</a:t>
               </a:r>
-              <a:endParaRPr sz="950" b="1" i="0">
-                <a:solidFill>
-                  <a:srgbClr val="262626"/>
-                </a:solidFill>
-                <a:latin typeface="Arial" panose="020B0604020202020204"/>
-              </a:endParaRPr>
             </a:p>
             <a:p>
               <a:pPr algn="ctr"/>
@@ -20352,16 +20687,12 @@
                   <a:solidFill>
                     <a:srgbClr val="262626"/>
                   </a:solidFill>
-                  <a:latin typeface="Arial" panose="020B0604020202020204"/>
+                  <a:latin typeface="Times New Roman"/>
+                  <a:ea typeface="Times New Roman"/>
+                  <a:cs typeface="Times New Roman"/>
                 </a:rPr>
                 <a:t>+ FFN</a:t>
               </a:r>
-              <a:endParaRPr sz="950" b="1" i="0">
-                <a:solidFill>
-                  <a:srgbClr val="262626"/>
-                </a:solidFill>
-                <a:latin typeface="Arial" panose="020B0604020202020204"/>
-              </a:endParaRPr>
             </a:p>
           </p:txBody>
         </p:sp>
@@ -20538,7 +20869,7 @@
             <a:noFill/>
           </p:spPr>
           <p:txBody>
-            <a:bodyPr wrap="none" lIns="0" tIns="0" rIns="0" bIns="0" anchor="ctr">
+            <a:bodyPr wrap="none" lIns="0" rIns="0" tIns="0" bIns="0" anchor="ctr">
               <a:noAutofit/>
             </a:bodyPr>
             <a:lstStyle/>
@@ -20549,16 +20880,12 @@
                   <a:solidFill>
                     <a:srgbClr val="262626"/>
                   </a:solidFill>
-                  <a:latin typeface="Arial" panose="020B0604020202020204"/>
+                  <a:latin typeface="Times New Roman"/>
+                  <a:ea typeface="Times New Roman"/>
+                  <a:cs typeface="Times New Roman"/>
                 </a:rPr>
                 <a:t>Multi-task heads</a:t>
               </a:r>
-              <a:endParaRPr sz="1100" b="1" i="0">
-                <a:solidFill>
-                  <a:srgbClr val="262626"/>
-                </a:solidFill>
-                <a:latin typeface="Arial" panose="020B0604020202020204"/>
-              </a:endParaRPr>
             </a:p>
           </p:txBody>
         </p:sp>
@@ -20627,7 +20954,7 @@
             <a:noFill/>
           </p:spPr>
           <p:txBody>
-            <a:bodyPr wrap="none" lIns="0" tIns="0" rIns="0" bIns="0" anchor="ctr">
+            <a:bodyPr wrap="none" lIns="0" rIns="0" tIns="0" bIns="0" anchor="ctr">
               <a:noAutofit/>
             </a:bodyPr>
             <a:lstStyle/>
@@ -20638,7 +20965,9 @@
                   <a:solidFill>
                     <a:srgbClr val="262626"/>
                   </a:solidFill>
-                  <a:latin typeface="Arial" panose="020B0604020202020204"/>
+                  <a:latin typeface="Times New Roman"/>
+                  <a:ea typeface="Times New Roman"/>
+                  <a:cs typeface="Times New Roman"/>
                 </a:rPr>
                 <a:t>Occurrence p</a:t>
               </a:r>
@@ -20647,7 +20976,9 @@
                   <a:solidFill>
                     <a:srgbClr val="262626"/>
                   </a:solidFill>
-                  <a:latin typeface="Arial" panose="020B0604020202020204"/>
+                  <a:latin typeface="Times New Roman"/>
+                  <a:ea typeface="Times New Roman"/>
+                  <a:cs typeface="Times New Roman"/>
                 </a:rPr>
                 <a:t>cont</a:t>
               </a:r>
@@ -20656,7 +20987,9 @@
                   <a:solidFill>
                     <a:srgbClr val="262626"/>
                   </a:solidFill>
-                  <a:latin typeface="Arial" panose="020B0604020202020204"/>
+                  <a:latin typeface="Times New Roman"/>
+                  <a:ea typeface="Times New Roman"/>
+                  <a:cs typeface="Times New Roman"/>
                 </a:rPr>
                 <a:t> / p</a:t>
               </a:r>
@@ -20665,16 +20998,12 @@
                   <a:solidFill>
                     <a:srgbClr val="262626"/>
                   </a:solidFill>
-                  <a:latin typeface="Arial" panose="020B0604020202020204"/>
+                  <a:latin typeface="Times New Roman"/>
+                  <a:ea typeface="Times New Roman"/>
+                  <a:cs typeface="Times New Roman"/>
                 </a:rPr>
                 <a:t>onset</a:t>
               </a:r>
-              <a:endParaRPr sz="950" b="1" i="0" baseline="30000">
-                <a:solidFill>
-                  <a:srgbClr val="262626"/>
-                </a:solidFill>
-                <a:latin typeface="Arial" panose="020B0604020202020204"/>
-              </a:endParaRPr>
             </a:p>
           </p:txBody>
         </p:sp>
@@ -20695,7 +21024,7 @@
             <a:noFill/>
           </p:spPr>
           <p:txBody>
-            <a:bodyPr wrap="none" lIns="0" tIns="0" rIns="0" bIns="0" anchor="ctr">
+            <a:bodyPr wrap="none" lIns="0" rIns="0" tIns="0" bIns="0" anchor="ctr">
               <a:noAutofit/>
             </a:bodyPr>
             <a:lstStyle/>
@@ -20706,16 +21035,12 @@
                   <a:solidFill>
                     <a:srgbClr val="595959"/>
                   </a:solidFill>
-                  <a:latin typeface="Arial" panose="020B0604020202020204"/>
+                  <a:latin typeface="Times New Roman"/>
+                  <a:ea typeface="Times New Roman"/>
+                  <a:cs typeface="Times New Roman"/>
                 </a:rPr>
                 <a:t>station event</a:t>
               </a:r>
-              <a:endParaRPr sz="900" b="0" i="0">
-                <a:solidFill>
-                  <a:srgbClr val="595959"/>
-                </a:solidFill>
-                <a:latin typeface="Arial" panose="020B0604020202020204"/>
-              </a:endParaRPr>
             </a:p>
           </p:txBody>
         </p:sp>
@@ -20784,7 +21109,7 @@
             <a:noFill/>
           </p:spPr>
           <p:txBody>
-            <a:bodyPr wrap="none" lIns="0" tIns="0" rIns="0" bIns="0" anchor="ctr">
+            <a:bodyPr wrap="none" lIns="0" rIns="0" tIns="0" bIns="0" anchor="ctr">
               <a:noAutofit/>
             </a:bodyPr>
             <a:lstStyle/>
@@ -20795,7 +21120,9 @@
                   <a:solidFill>
                     <a:srgbClr val="262626"/>
                   </a:solidFill>
-                  <a:latin typeface="Arial" panose="020B0604020202020204"/>
+                  <a:latin typeface="Times New Roman"/>
+                  <a:ea typeface="Times New Roman"/>
+                  <a:cs typeface="Times New Roman"/>
                 </a:rPr>
                 <a:t>Start π</a:t>
               </a:r>
@@ -20804,7 +21131,9 @@
                   <a:solidFill>
                     <a:srgbClr val="262626"/>
                   </a:solidFill>
-                  <a:latin typeface="Arial" panose="020B0604020202020204"/>
+                  <a:latin typeface="Times New Roman"/>
+                  <a:ea typeface="Times New Roman"/>
+                  <a:cs typeface="Times New Roman"/>
                 </a:rPr>
                 <a:t>s</a:t>
               </a:r>
@@ -20813,16 +21142,12 @@
                   <a:solidFill>
                     <a:srgbClr val="262626"/>
                   </a:solidFill>
-                  <a:latin typeface="Arial" panose="020B0604020202020204"/>
+                  <a:latin typeface="Times New Roman"/>
+                  <a:ea typeface="Times New Roman"/>
+                  <a:cs typeface="Times New Roman"/>
                 </a:rPr>
                 <a:t>  ·  duration d̂</a:t>
               </a:r>
-              <a:endParaRPr sz="950" b="1" i="0">
-                <a:solidFill>
-                  <a:srgbClr val="262626"/>
-                </a:solidFill>
-                <a:latin typeface="Arial" panose="020B0604020202020204"/>
-              </a:endParaRPr>
             </a:p>
           </p:txBody>
         </p:sp>
@@ -20843,7 +21168,7 @@
             <a:noFill/>
           </p:spPr>
           <p:txBody>
-            <a:bodyPr wrap="none" lIns="0" tIns="0" rIns="0" bIns="0" anchor="ctr">
+            <a:bodyPr wrap="none" lIns="0" rIns="0" tIns="0" bIns="0" anchor="ctr">
               <a:noAutofit/>
             </a:bodyPr>
             <a:lstStyle/>
@@ -20854,16 +21179,12 @@
                   <a:solidFill>
                     <a:srgbClr val="595959"/>
                   </a:solidFill>
-                  <a:latin typeface="Arial" panose="020B0604020202020204"/>
+                  <a:latin typeface="Times New Roman"/>
+                  <a:ea typeface="Times New Roman"/>
+                  <a:cs typeface="Times New Roman"/>
                 </a:rPr>
                 <a:t>when and how long</a:t>
               </a:r>
-              <a:endParaRPr sz="900" b="0" i="0">
-                <a:solidFill>
-                  <a:srgbClr val="595959"/>
-                </a:solidFill>
-                <a:latin typeface="Arial" panose="020B0604020202020204"/>
-              </a:endParaRPr>
             </a:p>
           </p:txBody>
         </p:sp>
@@ -20932,7 +21253,7 @@
             <a:noFill/>
           </p:spPr>
           <p:txBody>
-            <a:bodyPr wrap="none" lIns="0" tIns="0" rIns="0" bIns="0" anchor="ctr">
+            <a:bodyPr wrap="none" lIns="0" rIns="0" tIns="0" bIns="0" anchor="ctr">
               <a:noAutofit/>
             </a:bodyPr>
             <a:lstStyle/>
@@ -20943,16 +21264,12 @@
                   <a:solidFill>
                     <a:srgbClr val="262626"/>
                   </a:solidFill>
-                  <a:latin typeface="Arial" panose="020B0604020202020204"/>
+                  <a:latin typeface="Times New Roman"/>
+                  <a:ea typeface="Times New Roman"/>
+                  <a:cs typeface="Times New Roman"/>
                 </a:rPr>
                 <a:t>Prefix p̂  ·  occupancy Ô</a:t>
               </a:r>
-              <a:endParaRPr sz="950" b="1" i="0">
-                <a:solidFill>
-                  <a:srgbClr val="262626"/>
-                </a:solidFill>
-                <a:latin typeface="Arial" panose="020B0604020202020204"/>
-              </a:endParaRPr>
             </a:p>
           </p:txBody>
         </p:sp>
@@ -20973,7 +21290,7 @@
             <a:noFill/>
           </p:spPr>
           <p:txBody>
-            <a:bodyPr wrap="none" lIns="0" tIns="0" rIns="0" bIns="0" anchor="ctr">
+            <a:bodyPr wrap="none" lIns="0" rIns="0" tIns="0" bIns="0" anchor="ctr">
               <a:noAutofit/>
             </a:bodyPr>
             <a:lstStyle/>
@@ -20984,16 +21301,12 @@
                   <a:solidFill>
                     <a:srgbClr val="595959"/>
                   </a:solidFill>
-                  <a:latin typeface="Arial" panose="020B0604020202020204"/>
+                  <a:latin typeface="Times New Roman"/>
+                  <a:ea typeface="Times New Roman"/>
+                  <a:cs typeface="Times New Roman"/>
                 </a:rPr>
                 <a:t>dense future grid</a:t>
               </a:r>
-              <a:endParaRPr sz="900" b="0" i="0">
-                <a:solidFill>
-                  <a:srgbClr val="595959"/>
-                </a:solidFill>
-                <a:latin typeface="Arial" panose="020B0604020202020204"/>
-              </a:endParaRPr>
             </a:p>
           </p:txBody>
         </p:sp>
@@ -21062,7 +21375,7 @@
             <a:noFill/>
           </p:spPr>
           <p:txBody>
-            <a:bodyPr wrap="none" lIns="0" tIns="0" rIns="0" bIns="0" anchor="ctr">
+            <a:bodyPr wrap="none" lIns="0" rIns="0" tIns="0" bIns="0" anchor="ctr">
               <a:noAutofit/>
             </a:bodyPr>
             <a:lstStyle/>
@@ -21073,16 +21386,12 @@
                   <a:solidFill>
                     <a:srgbClr val="262626"/>
                   </a:solidFill>
-                  <a:latin typeface="Arial" panose="020B0604020202020204"/>
+                  <a:latin typeface="Times New Roman"/>
+                  <a:ea typeface="Times New Roman"/>
+                  <a:cs typeface="Times New Roman"/>
                 </a:rPr>
                 <a:t>Cause ĉ  ·  remaining ℓ̂</a:t>
               </a:r>
-              <a:endParaRPr sz="950" b="1" i="0">
-                <a:solidFill>
-                  <a:srgbClr val="262626"/>
-                </a:solidFill>
-                <a:latin typeface="Arial" panose="020B0604020202020204"/>
-              </a:endParaRPr>
             </a:p>
           </p:txBody>
         </p:sp>
@@ -21103,7 +21412,7 @@
             <a:noFill/>
           </p:spPr>
           <p:txBody>
-            <a:bodyPr wrap="none" lIns="0" tIns="0" rIns="0" bIns="0" anchor="ctr">
+            <a:bodyPr wrap="none" lIns="0" rIns="0" tIns="0" bIns="0" anchor="ctr">
               <a:noAutofit/>
             </a:bodyPr>
             <a:lstStyle/>
@@ -21114,16 +21423,12 @@
                   <a:solidFill>
                     <a:srgbClr val="595959"/>
                   </a:solidFill>
-                  <a:latin typeface="Arial" panose="020B0604020202020204"/>
+                  <a:latin typeface="Times New Roman"/>
+                  <a:ea typeface="Times New Roman"/>
+                  <a:cs typeface="Times New Roman"/>
                 </a:rPr>
                 <a:t>graph-level pooling</a:t>
               </a:r>
-              <a:endParaRPr sz="900" b="0" i="0">
-                <a:solidFill>
-                  <a:srgbClr val="595959"/>
-                </a:solidFill>
-                <a:latin typeface="Arial" panose="020B0604020202020204"/>
-              </a:endParaRPr>
             </a:p>
           </p:txBody>
         </p:sp>
@@ -21193,7 +21498,7 @@
             <a:noFill/>
           </p:spPr>
           <p:txBody>
-            <a:bodyPr wrap="none" lIns="0" tIns="0" rIns="0" bIns="0" anchor="ctr">
+            <a:bodyPr wrap="none" lIns="0" rIns="0" tIns="0" bIns="0" anchor="ctr">
               <a:noAutofit/>
             </a:bodyPr>
             <a:lstStyle/>
@@ -21204,16 +21509,12 @@
                   <a:solidFill>
                     <a:srgbClr val="595959"/>
                   </a:solidFill>
-                  <a:latin typeface="Arial" panose="020B0604020202020204"/>
+                  <a:latin typeface="Times New Roman"/>
+                  <a:ea typeface="Times New Roman"/>
+                  <a:cs typeface="Times New Roman"/>
                 </a:rPr>
                 <a:t>validation-controlled decoding</a:t>
               </a:r>
-              <a:endParaRPr sz="900" b="0" i="0">
-                <a:solidFill>
-                  <a:srgbClr val="595959"/>
-                </a:solidFill>
-                <a:latin typeface="Arial" panose="020B0604020202020204"/>
-              </a:endParaRPr>
             </a:p>
           </p:txBody>
         </p:sp>
@@ -21333,7 +21634,7 @@
             <a:noFill/>
           </p:spPr>
           <p:txBody>
-            <a:bodyPr wrap="none" lIns="0" tIns="0" rIns="0" bIns="0" anchor="ctr">
+            <a:bodyPr wrap="none" lIns="0" rIns="0" tIns="0" bIns="0" anchor="ctr">
               <a:noAutofit/>
             </a:bodyPr>
             <a:lstStyle/>
@@ -21344,16 +21645,12 @@
                   <a:solidFill>
                     <a:srgbClr val="262626"/>
                   </a:solidFill>
-                  <a:latin typeface="Arial" panose="020B0604020202020204"/>
+                  <a:latin typeface="Times New Roman"/>
+                  <a:ea typeface="Times New Roman"/>
+                  <a:cs typeface="Times New Roman"/>
                 </a:rPr>
                 <a:t>Bottleneck report</a:t>
               </a:r>
-              <a:endParaRPr sz="1250" b="1" i="0">
-                <a:solidFill>
-                  <a:srgbClr val="262626"/>
-                </a:solidFill>
-                <a:latin typeface="Arial" panose="020B0604020202020204"/>
-              </a:endParaRPr>
             </a:p>
           </p:txBody>
         </p:sp>
@@ -21418,7 +21715,7 @@
             <a:noFill/>
           </p:spPr>
           <p:txBody>
-            <a:bodyPr wrap="none" lIns="0" tIns="0" rIns="0" bIns="0" anchor="ctr">
+            <a:bodyPr wrap="none" lIns="0" rIns="0" tIns="0" bIns="0" anchor="ctr">
               <a:noAutofit/>
             </a:bodyPr>
             <a:lstStyle/>
@@ -21429,16 +21726,12 @@
                   <a:solidFill>
                     <a:srgbClr val="262626"/>
                   </a:solidFill>
-                  <a:latin typeface="Arial" panose="020B0604020202020204"/>
+                  <a:latin typeface="Times New Roman"/>
+                  <a:ea typeface="Times New Roman"/>
+                  <a:cs typeface="Times New Roman"/>
                 </a:rPr>
                 <a:t>Weld-2</a:t>
               </a:r>
-              <a:endParaRPr sz="950" b="0" i="0">
-                <a:solidFill>
-                  <a:srgbClr val="262626"/>
-                </a:solidFill>
-                <a:latin typeface="Arial" panose="020B0604020202020204"/>
-              </a:endParaRPr>
             </a:p>
           </p:txBody>
         </p:sp>
@@ -21540,7 +21833,7 @@
             <a:noFill/>
           </p:spPr>
           <p:txBody>
-            <a:bodyPr wrap="none" lIns="0" tIns="0" rIns="0" bIns="0" anchor="ctr">
+            <a:bodyPr wrap="none" lIns="0" rIns="0" tIns="0" bIns="0" anchor="ctr">
               <a:noAutofit/>
             </a:bodyPr>
             <a:lstStyle/>
@@ -21551,16 +21844,12 @@
                   <a:solidFill>
                     <a:srgbClr val="262626"/>
                   </a:solidFill>
-                  <a:latin typeface="Arial" panose="020B0604020202020204"/>
+                  <a:latin typeface="Times New Roman"/>
+                  <a:ea typeface="Times New Roman"/>
+                  <a:cs typeface="Times New Roman"/>
                 </a:rPr>
                 <a:t>Gantry-1</a:t>
               </a:r>
-              <a:endParaRPr sz="950" b="0" i="0">
-                <a:solidFill>
-                  <a:srgbClr val="262626"/>
-                </a:solidFill>
-                <a:latin typeface="Arial" panose="020B0604020202020204"/>
-              </a:endParaRPr>
             </a:p>
           </p:txBody>
         </p:sp>
@@ -21662,7 +21951,7 @@
             <a:noFill/>
           </p:spPr>
           <p:txBody>
-            <a:bodyPr wrap="none" lIns="0" tIns="0" rIns="0" bIns="0" anchor="ctr">
+            <a:bodyPr wrap="none" lIns="0" rIns="0" tIns="0" bIns="0" anchor="ctr">
               <a:noAutofit/>
             </a:bodyPr>
             <a:lstStyle/>
@@ -21673,16 +21962,12 @@
                   <a:solidFill>
                     <a:srgbClr val="262626"/>
                   </a:solidFill>
-                  <a:latin typeface="Arial" panose="020B0604020202020204"/>
+                  <a:latin typeface="Times New Roman"/>
+                  <a:ea typeface="Times New Roman"/>
+                  <a:cs typeface="Times New Roman"/>
                 </a:rPr>
                 <a:t>AGV-3</a:t>
               </a:r>
-              <a:endParaRPr sz="950" b="0" i="0">
-                <a:solidFill>
-                  <a:srgbClr val="262626"/>
-                </a:solidFill>
-                <a:latin typeface="Arial" panose="020B0604020202020204"/>
-              </a:endParaRPr>
             </a:p>
           </p:txBody>
         </p:sp>
@@ -21773,7 +22058,7 @@
             <a:noFill/>
           </p:spPr>
           <p:txBody>
-            <a:bodyPr wrap="none" lIns="0" tIns="0" rIns="0" bIns="0" anchor="ctr">
+            <a:bodyPr wrap="none" lIns="0" rIns="0" tIns="0" bIns="0" anchor="ctr">
               <a:noAutofit/>
             </a:bodyPr>
             <a:lstStyle/>
@@ -21784,16 +22069,12 @@
                   <a:solidFill>
                     <a:srgbClr val="262626"/>
                   </a:solidFill>
-                  <a:latin typeface="Arial" panose="020B0604020202020204"/>
+                  <a:latin typeface="Times New Roman"/>
+                  <a:ea typeface="Times New Roman"/>
+                  <a:cs typeface="Times New Roman"/>
                 </a:rPr>
                 <a:t>now</a:t>
               </a:r>
-              <a:endParaRPr sz="850" b="0" i="0">
-                <a:solidFill>
-                  <a:srgbClr val="262626"/>
-                </a:solidFill>
-                <a:latin typeface="Arial" panose="020B0604020202020204"/>
-              </a:endParaRPr>
             </a:p>
           </p:txBody>
         </p:sp>
@@ -21878,7 +22159,7 @@
             <a:noFill/>
           </p:spPr>
           <p:txBody>
-            <a:bodyPr wrap="none" lIns="0" tIns="0" rIns="0" bIns="0" anchor="ctr">
+            <a:bodyPr wrap="none" lIns="0" rIns="0" tIns="0" bIns="0" anchor="ctr">
               <a:noAutofit/>
             </a:bodyPr>
             <a:lstStyle/>
@@ -21889,16 +22170,12 @@
                   <a:solidFill>
                     <a:srgbClr val="CB001C"/>
                   </a:solidFill>
-                  <a:latin typeface="Arial" panose="020B0604020202020204"/>
+                  <a:latin typeface="Times New Roman"/>
+                  <a:ea typeface="Times New Roman"/>
+                  <a:cs typeface="Times New Roman"/>
                 </a:rPr>
                 <a:t>ŝ</a:t>
               </a:r>
-              <a:endParaRPr sz="950" b="1" i="0">
-                <a:solidFill>
-                  <a:srgbClr val="CB001C"/>
-                </a:solidFill>
-                <a:latin typeface="Arial" panose="020B0604020202020204"/>
-              </a:endParaRPr>
             </a:p>
           </p:txBody>
         </p:sp>
@@ -21983,7 +22260,7 @@
             <a:noFill/>
           </p:spPr>
           <p:txBody>
-            <a:bodyPr wrap="none" lIns="0" tIns="0" rIns="0" bIns="0" anchor="ctr">
+            <a:bodyPr wrap="none" lIns="0" rIns="0" tIns="0" bIns="0" anchor="ctr">
               <a:noAutofit/>
             </a:bodyPr>
             <a:lstStyle/>
@@ -21994,16 +22271,12 @@
                   <a:solidFill>
                     <a:srgbClr val="CB001C"/>
                   </a:solidFill>
-                  <a:latin typeface="Arial" panose="020B0604020202020204"/>
+                  <a:latin typeface="Times New Roman"/>
+                  <a:ea typeface="Times New Roman"/>
+                  <a:cs typeface="Times New Roman"/>
                 </a:rPr>
                 <a:t>d̂</a:t>
               </a:r>
-              <a:endParaRPr sz="950" b="1" i="0">
-                <a:solidFill>
-                  <a:srgbClr val="CB001C"/>
-                </a:solidFill>
-                <a:latin typeface="Arial" panose="020B0604020202020204"/>
-              </a:endParaRPr>
             </a:p>
           </p:txBody>
         </p:sp>
@@ -22024,7 +22297,7 @@
             <a:noFill/>
           </p:spPr>
           <p:txBody>
-            <a:bodyPr wrap="none" lIns="0" tIns="0" rIns="0" bIns="0" anchor="ctr">
+            <a:bodyPr wrap="none" lIns="0" rIns="0" tIns="0" bIns="0" anchor="ctr">
               <a:noAutofit/>
             </a:bodyPr>
             <a:lstStyle/>
@@ -22035,16 +22308,12 @@
                   <a:solidFill>
                     <a:srgbClr val="595959"/>
                   </a:solidFill>
-                  <a:latin typeface="Arial" panose="020B0604020202020204"/>
+                  <a:latin typeface="Times New Roman"/>
+                  <a:ea typeface="Times New Roman"/>
+                  <a:cs typeface="Times New Roman"/>
                 </a:rPr>
                 <a:t>future minutes (cap 5/10/15)</a:t>
               </a:r>
-              <a:endParaRPr sz="850" b="0" i="0">
-                <a:solidFill>
-                  <a:srgbClr val="595959"/>
-                </a:solidFill>
-                <a:latin typeface="Arial" panose="020B0604020202020204"/>
-              </a:endParaRPr>
             </a:p>
           </p:txBody>
         </p:sp>
@@ -22065,7 +22334,7 @@
             <a:noFill/>
           </p:spPr>
           <p:txBody>
-            <a:bodyPr wrap="none" lIns="0" tIns="0" rIns="0" bIns="0" anchor="ctr">
+            <a:bodyPr wrap="none" lIns="0" rIns="0" tIns="0" bIns="0" anchor="ctr">
               <a:noAutofit/>
             </a:bodyPr>
             <a:lstStyle/>
@@ -22076,16 +22345,12 @@
                   <a:solidFill>
                     <a:srgbClr val="262626"/>
                   </a:solidFill>
-                  <a:latin typeface="Arial" panose="020B0604020202020204"/>
+                  <a:latin typeface="Times New Roman"/>
+                  <a:ea typeface="Times New Roman"/>
+                  <a:cs typeface="Times New Roman"/>
                 </a:rPr>
                 <a:t>Process cause ĉ</a:t>
               </a:r>
-              <a:endParaRPr sz="1000" b="1" i="0">
-                <a:solidFill>
-                  <a:srgbClr val="262626"/>
-                </a:solidFill>
-                <a:latin typeface="Arial" panose="020B0604020202020204"/>
-              </a:endParaRPr>
             </a:p>
           </p:txBody>
         </p:sp>
@@ -22106,7 +22371,7 @@
             <a:noFill/>
           </p:spPr>
           <p:txBody>
-            <a:bodyPr wrap="none" lIns="0" tIns="0" rIns="0" bIns="0" anchor="ctr">
+            <a:bodyPr wrap="none" lIns="0" rIns="0" tIns="0" bIns="0" anchor="ctr">
               <a:noAutofit/>
             </a:bodyPr>
             <a:lstStyle/>
@@ -22117,16 +22382,12 @@
                   <a:solidFill>
                     <a:srgbClr val="595959"/>
                   </a:solidFill>
-                  <a:latin typeface="Arial" panose="020B0604020202020204"/>
+                  <a:latin typeface="Times New Roman"/>
+                  <a:ea typeface="Times New Roman"/>
+                  <a:cs typeface="Times New Roman"/>
                 </a:rPr>
                 <a:t>Transport</a:t>
               </a:r>
-              <a:endParaRPr sz="900" b="0" i="0">
-                <a:solidFill>
-                  <a:srgbClr val="595959"/>
-                </a:solidFill>
-                <a:latin typeface="Arial" panose="020B0604020202020204"/>
-              </a:endParaRPr>
             </a:p>
           </p:txBody>
         </p:sp>
@@ -22237,7 +22498,7 @@
             <a:noFill/>
           </p:spPr>
           <p:txBody>
-            <a:bodyPr wrap="none" lIns="0" tIns="0" rIns="0" bIns="0" anchor="ctr">
+            <a:bodyPr wrap="none" lIns="0" rIns="0" tIns="0" bIns="0" anchor="ctr">
               <a:noAutofit/>
             </a:bodyPr>
             <a:lstStyle/>
@@ -22248,16 +22509,12 @@
                   <a:solidFill>
                     <a:srgbClr val="595959"/>
                   </a:solidFill>
-                  <a:latin typeface="Arial" panose="020B0604020202020204"/>
+                  <a:latin typeface="Times New Roman"/>
+                  <a:ea typeface="Times New Roman"/>
+                  <a:cs typeface="Times New Roman"/>
                 </a:rPr>
                 <a:t>Shortage</a:t>
               </a:r>
-              <a:endParaRPr sz="900" b="0" i="0">
-                <a:solidFill>
-                  <a:srgbClr val="595959"/>
-                </a:solidFill>
-                <a:latin typeface="Arial" panose="020B0604020202020204"/>
-              </a:endParaRPr>
             </a:p>
           </p:txBody>
         </p:sp>
@@ -22368,7 +22625,7 @@
             <a:noFill/>
           </p:spPr>
           <p:txBody>
-            <a:bodyPr wrap="none" lIns="0" tIns="0" rIns="0" bIns="0" anchor="ctr">
+            <a:bodyPr wrap="none" lIns="0" rIns="0" tIns="0" bIns="0" anchor="ctr">
               <a:noAutofit/>
             </a:bodyPr>
             <a:lstStyle/>
@@ -22379,16 +22636,12 @@
                   <a:solidFill>
                     <a:srgbClr val="595959"/>
                   </a:solidFill>
-                  <a:latin typeface="Arial" panose="020B0604020202020204"/>
+                  <a:latin typeface="Times New Roman"/>
+                  <a:ea typeface="Times New Roman"/>
+                  <a:cs typeface="Times New Roman"/>
                 </a:rPr>
                 <a:t>Starvation</a:t>
               </a:r>
-              <a:endParaRPr sz="900" b="0" i="0">
-                <a:solidFill>
-                  <a:srgbClr val="595959"/>
-                </a:solidFill>
-                <a:latin typeface="Arial" panose="020B0604020202020204"/>
-              </a:endParaRPr>
             </a:p>
           </p:txBody>
         </p:sp>
@@ -22499,7 +22752,7 @@
             <a:noFill/>
           </p:spPr>
           <p:txBody>
-            <a:bodyPr wrap="none" lIns="0" tIns="0" rIns="0" bIns="0" anchor="ctr">
+            <a:bodyPr wrap="none" lIns="0" rIns="0" tIns="0" bIns="0" anchor="ctr">
               <a:noAutofit/>
             </a:bodyPr>
             <a:lstStyle/>
@@ -22510,16 +22763,12 @@
                   <a:solidFill>
                     <a:srgbClr val="595959"/>
                   </a:solidFill>
-                  <a:latin typeface="Arial" panose="020B0604020202020204"/>
+                  <a:latin typeface="Times New Roman"/>
+                  <a:ea typeface="Times New Roman"/>
+                  <a:cs typeface="Times New Roman"/>
                 </a:rPr>
                 <a:t>Queue</a:t>
               </a:r>
-              <a:endParaRPr sz="900" b="0" i="0">
-                <a:solidFill>
-                  <a:srgbClr val="595959"/>
-                </a:solidFill>
-                <a:latin typeface="Arial" panose="020B0604020202020204"/>
-              </a:endParaRPr>
             </a:p>
           </p:txBody>
         </p:sp>
@@ -22630,7 +22879,7 @@
             <a:noFill/>
           </p:spPr>
           <p:txBody>
-            <a:bodyPr wrap="none" lIns="0" tIns="0" rIns="0" bIns="0" anchor="ctr">
+            <a:bodyPr wrap="none" lIns="0" rIns="0" tIns="0" bIns="0" anchor="ctr">
               <a:noAutofit/>
             </a:bodyPr>
             <a:lstStyle/>
@@ -22641,16 +22890,12 @@
                   <a:solidFill>
                     <a:srgbClr val="262626"/>
                   </a:solidFill>
-                  <a:latin typeface="Arial" panose="020B0604020202020204"/>
+                  <a:latin typeface="Times New Roman"/>
+                  <a:ea typeface="Times New Roman"/>
+                  <a:cs typeface="Times New Roman"/>
                 </a:rPr>
                 <a:t>Remaining order time ℓ̂</a:t>
               </a:r>
-              <a:endParaRPr sz="1000" b="1" i="0">
-                <a:solidFill>
-                  <a:srgbClr val="262626"/>
-                </a:solidFill>
-                <a:latin typeface="Arial" panose="020B0604020202020204"/>
-              </a:endParaRPr>
             </a:p>
           </p:txBody>
         </p:sp>
@@ -22761,7 +23006,7 @@
             <a:noFill/>
           </p:spPr>
           <p:txBody>
-            <a:bodyPr wrap="none" lIns="0" tIns="0" rIns="0" bIns="0" anchor="ctr">
+            <a:bodyPr wrap="none" lIns="0" rIns="0" tIns="0" bIns="0" anchor="ctr">
               <a:noAutofit/>
             </a:bodyPr>
             <a:lstStyle/>
@@ -22772,16 +23017,12 @@
                   <a:solidFill>
                     <a:srgbClr val="262626"/>
                   </a:solidFill>
-                  <a:latin typeface="Arial" panose="020B0604020202020204"/>
+                  <a:latin typeface="Times New Roman"/>
+                  <a:ea typeface="Times New Roman"/>
+                  <a:cs typeface="Times New Roman"/>
                 </a:rPr>
                 <a:t>12 min left</a:t>
               </a:r>
-              <a:endParaRPr sz="900" b="0" i="0">
-                <a:solidFill>
-                  <a:srgbClr val="262626"/>
-                </a:solidFill>
-                <a:latin typeface="Arial" panose="020B0604020202020204"/>
-              </a:endParaRPr>
             </a:p>
           </p:txBody>
         </p:sp>
@@ -22875,7 +23116,7 @@
           <a:noFill/>
         </p:spPr>
         <p:txBody>
-          <a:bodyPr wrap="none" lIns="0" tIns="0" rIns="0" bIns="0" anchor="ctr">
+          <a:bodyPr wrap="none" lIns="0" rIns="0" tIns="0" bIns="0" anchor="ctr">
             <a:noAutofit/>
           </a:bodyPr>
           <a:lstStyle/>
@@ -22886,7 +23127,9 @@
                 <a:solidFill>
                   <a:srgbClr val="262626"/>
                 </a:solidFill>
-                <a:latin typeface="Arial" panose="020B0604020202020204"/>
+                <a:latin typeface="Times New Roman"/>
+                <a:ea typeface="Times New Roman"/>
+                <a:cs typeface="Times New Roman"/>
               </a:rPr>
               <a:t>X</a:t>
             </a:r>
@@ -22895,16 +23138,12 @@
                 <a:solidFill>
                   <a:srgbClr val="262626"/>
                 </a:solidFill>
-                <a:latin typeface="Arial" panose="020B0604020202020204"/>
+                <a:latin typeface="Times New Roman"/>
+                <a:ea typeface="Times New Roman"/>
+                <a:cs typeface="Times New Roman"/>
               </a:rPr>
               <a:t>t</a:t>
             </a:r>
-            <a:endParaRPr sz="1000" b="1" i="0" baseline="-25000">
-              <a:solidFill>
-                <a:srgbClr val="262626"/>
-              </a:solidFill>
-              <a:latin typeface="Arial" panose="020B0604020202020204"/>
-            </a:endParaRPr>
           </a:p>
         </p:txBody>
       </p:sp>
@@ -22961,7 +23200,7 @@
           <a:noFill/>
         </p:spPr>
         <p:txBody>
-          <a:bodyPr wrap="none" lIns="0" tIns="0" rIns="0" bIns="0" anchor="ctr">
+          <a:bodyPr wrap="none" lIns="0" rIns="0" tIns="0" bIns="0" anchor="ctr">
             <a:noAutofit/>
           </a:bodyPr>
           <a:lstStyle/>
@@ -22972,7 +23211,9 @@
                 <a:solidFill>
                   <a:srgbClr val="3D6EB4"/>
                 </a:solidFill>
-                <a:latin typeface="Arial" panose="020B0604020202020204"/>
+                <a:latin typeface="Times New Roman"/>
+                <a:ea typeface="Times New Roman"/>
+                <a:cs typeface="Times New Roman"/>
               </a:rPr>
               <a:t>G,  M</a:t>
             </a:r>
@@ -22981,7 +23222,9 @@
                 <a:solidFill>
                   <a:srgbClr val="3D6EB4"/>
                 </a:solidFill>
-                <a:latin typeface="Arial" panose="020B0604020202020204"/>
+                <a:latin typeface="Times New Roman"/>
+                <a:ea typeface="Times New Roman"/>
+                <a:cs typeface="Times New Roman"/>
               </a:rPr>
               <a:t>G</a:t>
             </a:r>
@@ -22990,7 +23233,9 @@
                 <a:solidFill>
                   <a:srgbClr val="3D6EB4"/>
                 </a:solidFill>
-                <a:latin typeface="Arial" panose="020B0604020202020204"/>
+                <a:latin typeface="Times New Roman"/>
+                <a:ea typeface="Times New Roman"/>
+                <a:cs typeface="Times New Roman"/>
               </a:rPr>
               <a:t>,  M</a:t>
             </a:r>
@@ -22999,16 +23244,12 @@
                 <a:solidFill>
                   <a:srgbClr val="3D6EB4"/>
                 </a:solidFill>
-                <a:latin typeface="Arial" panose="020B0604020202020204"/>
+                <a:latin typeface="Times New Roman"/>
+                <a:ea typeface="Times New Roman"/>
+                <a:cs typeface="Times New Roman"/>
               </a:rPr>
               <a:t>S</a:t>
             </a:r>
-            <a:endParaRPr sz="1000" b="1" i="0" baseline="30000">
-              <a:solidFill>
-                <a:srgbClr val="3D6EB4"/>
-              </a:solidFill>
-              <a:latin typeface="Arial" panose="020B0604020202020204"/>
-            </a:endParaRPr>
           </a:p>
         </p:txBody>
       </p:sp>
@@ -23094,7 +23335,7 @@
           <a:noFill/>
         </p:spPr>
         <p:txBody>
-          <a:bodyPr wrap="none" lIns="0" tIns="0" rIns="0" bIns="0" anchor="ctr">
+          <a:bodyPr wrap="none" lIns="0" rIns="0" tIns="0" bIns="0" anchor="ctr">
             <a:noAutofit/>
           </a:bodyPr>
           <a:lstStyle/>
@@ -23105,7 +23346,9 @@
                 <a:solidFill>
                   <a:srgbClr val="F26121"/>
                 </a:solidFill>
-                <a:latin typeface="Arial" panose="020B0604020202020204"/>
+                <a:latin typeface="Times New Roman"/>
+                <a:ea typeface="Times New Roman"/>
+                <a:cs typeface="Times New Roman"/>
               </a:rPr>
               <a:t>pattern keys K</a:t>
             </a:r>
@@ -23114,16 +23357,12 @@
                 <a:solidFill>
                   <a:srgbClr val="F26121"/>
                 </a:solidFill>
-                <a:latin typeface="Arial" panose="020B0604020202020204"/>
+                <a:latin typeface="Times New Roman"/>
+                <a:ea typeface="Times New Roman"/>
+                <a:cs typeface="Times New Roman"/>
               </a:rPr>
               <a:t>P</a:t>
             </a:r>
-            <a:endParaRPr sz="950" b="1" i="0" baseline="30000">
-              <a:solidFill>
-                <a:srgbClr val="F26121"/>
-              </a:solidFill>
-              <a:latin typeface="Arial" panose="020B0604020202020204"/>
-            </a:endParaRPr>
           </a:p>
         </p:txBody>
       </p:sp>
@@ -23210,7 +23449,7 @@
           <a:noFill/>
         </p:spPr>
         <p:txBody>
-          <a:bodyPr wrap="none" lIns="0" tIns="0" rIns="0" bIns="0" anchor="ctr">
+          <a:bodyPr wrap="none" lIns="0" rIns="0" tIns="0" bIns="0" anchor="ctr">
             <a:noAutofit/>
           </a:bodyPr>
           <a:lstStyle/>
@@ -23221,16 +23460,12 @@
                 <a:solidFill>
                   <a:srgbClr val="F26121"/>
                 </a:solidFill>
-                <a:latin typeface="Arial" panose="020B0604020202020204"/>
+                <a:latin typeface="Times New Roman"/>
+                <a:ea typeface="Times New Roman"/>
+                <a:cs typeface="Times New Roman"/>
               </a:rPr>
               <a:t>training targets</a:t>
             </a:r>
-            <a:endParaRPr sz="900" b="0" i="1">
-              <a:solidFill>
-                <a:srgbClr val="F26121"/>
-              </a:solidFill>
-              <a:latin typeface="Arial" panose="020B0604020202020204"/>
-            </a:endParaRPr>
           </a:p>
         </p:txBody>
       </p:sp>
@@ -23270,130 +23505,6 @@
           </a:fontRef>
         </p:style>
       </p:cxnSp>
-      <p:pic>
-        <p:nvPicPr>
-          <p:cNvPr id="474" name="图片 473" descr="noun_Worker_8351138 (1)"/>
-          <p:cNvPicPr>
-            <a:picLocks noChangeAspect="1"/>
-          </p:cNvPicPr>
-          <p:nvPr/>
-        </p:nvPicPr>
-        <p:blipFill>
-          <a:blip r:embed="rId5">
-            <a:extLst>
-              <a:ext uri="{96DAC541-7B7A-43D3-8B79-37D633B846F1}">
-                <asvg:svgBlip xmlns:asvg="http://schemas.microsoft.com/office/drawing/2016/SVG/main" r:embed="rId6"/>
-              </a:ext>
-            </a:extLst>
-          </a:blip>
-          <a:srcRect b="14815"/>
-          <a:stretch>
-            <a:fillRect/>
-          </a:stretch>
-        </p:blipFill>
-        <p:spPr>
-          <a:xfrm>
-            <a:off x="387350" y="2583180"/>
-            <a:ext cx="542290" cy="567055"/>
-          </a:xfrm>
-          <a:prstGeom prst="rect">
-            <a:avLst/>
-          </a:prstGeom>
-        </p:spPr>
-      </p:pic>
-      <p:pic>
-        <p:nvPicPr>
-          <p:cNvPr id="475" name="图片 474" descr="noun_batchpicking_5980198"/>
-          <p:cNvPicPr>
-            <a:picLocks noChangeAspect="1"/>
-          </p:cNvPicPr>
-          <p:nvPr/>
-        </p:nvPicPr>
-        <p:blipFill>
-          <a:blip r:embed="rId7">
-            <a:extLst>
-              <a:ext uri="{96DAC541-7B7A-43D3-8B79-37D633B846F1}">
-                <asvg:svgBlip xmlns:asvg="http://schemas.microsoft.com/office/drawing/2016/SVG/main" r:embed="rId8"/>
-              </a:ext>
-            </a:extLst>
-          </a:blip>
-          <a:srcRect b="23750"/>
-          <a:stretch>
-            <a:fillRect/>
-          </a:stretch>
-        </p:blipFill>
-        <p:spPr>
-          <a:xfrm>
-            <a:off x="991870" y="3245485"/>
-            <a:ext cx="720090" cy="686435"/>
-          </a:xfrm>
-          <a:prstGeom prst="rect">
-            <a:avLst/>
-          </a:prstGeom>
-        </p:spPr>
-      </p:pic>
-      <p:pic>
-        <p:nvPicPr>
-          <p:cNvPr id="476" name="图片 475" descr="noun_pipe_8065225"/>
-          <p:cNvPicPr>
-            <a:picLocks noChangeAspect="1"/>
-          </p:cNvPicPr>
-          <p:nvPr/>
-        </p:nvPicPr>
-        <p:blipFill>
-          <a:blip r:embed="rId9">
-            <a:extLst>
-              <a:ext uri="{96DAC541-7B7A-43D3-8B79-37D633B846F1}">
-                <asvg:svgBlip xmlns:asvg="http://schemas.microsoft.com/office/drawing/2016/SVG/main" r:embed="rId10"/>
-              </a:ext>
-            </a:extLst>
-          </a:blip>
-          <a:srcRect b="17975"/>
-          <a:stretch>
-            <a:fillRect/>
-          </a:stretch>
-        </p:blipFill>
-        <p:spPr>
-          <a:xfrm>
-            <a:off x="312420" y="3188335"/>
-            <a:ext cx="711835" cy="716915"/>
-          </a:xfrm>
-          <a:prstGeom prst="rect">
-            <a:avLst/>
-          </a:prstGeom>
-        </p:spPr>
-      </p:pic>
-      <p:pic>
-        <p:nvPicPr>
-          <p:cNvPr id="477" name="图片 476" descr="noun_machinetomachine_7000254"/>
-          <p:cNvPicPr>
-            <a:picLocks noChangeAspect="1"/>
-          </p:cNvPicPr>
-          <p:nvPr/>
-        </p:nvPicPr>
-        <p:blipFill>
-          <a:blip r:embed="rId11">
-            <a:extLst>
-              <a:ext uri="{96DAC541-7B7A-43D3-8B79-37D633B846F1}">
-                <asvg:svgBlip xmlns:asvg="http://schemas.microsoft.com/office/drawing/2016/SVG/main" r:embed="rId12"/>
-              </a:ext>
-            </a:extLst>
-          </a:blip>
-          <a:srcRect b="9630"/>
-          <a:stretch>
-            <a:fillRect/>
-          </a:stretch>
-        </p:blipFill>
-        <p:spPr>
-          <a:xfrm>
-            <a:off x="1155700" y="2601595"/>
-            <a:ext cx="506095" cy="561975"/>
-          </a:xfrm>
-          <a:prstGeom prst="rect">
-            <a:avLst/>
-          </a:prstGeom>
-        </p:spPr>
-      </p:pic>
     </p:spTree>
   </p:cSld>
   <p:clrMapOvr>
@@ -23445,9 +23556,9 @@
     </a:clrScheme>
     <a:fontScheme name="Office">
       <a:majorFont>
-        <a:latin typeface="Calibri"/>
-        <a:ea typeface=""/>
-        <a:cs typeface=""/>
+        <a:latin typeface="Times New Roman"/>
+        <a:ea typeface="Times New Roman"/>
+        <a:cs typeface="Times New Roman"/>
         <a:font script="Jpan" typeface="ＭＳ Ｐゴシック"/>
         <a:font script="Hang" typeface="맑은 고딕"/>
         <a:font script="Hans" typeface="宋体"/>
@@ -23480,9 +23591,9 @@
         <a:font script="Geor" typeface="Sylfaen"/>
       </a:majorFont>
       <a:minorFont>
-        <a:latin typeface="Calibri"/>
-        <a:ea typeface=""/>
-        <a:cs typeface=""/>
+        <a:latin typeface="Times New Roman"/>
+        <a:ea typeface="Times New Roman"/>
+        <a:cs typeface="Times New Roman"/>
         <a:font script="Jpan" typeface="ＭＳ Ｐゴシック"/>
         <a:font script="Hang" typeface="맑은 고딕"/>
         <a:font script="Hans" typeface="宋体"/>
@@ -23718,10 +23829,6 @@
       </a:style>
     </a:lnDef>
   </a:objectDefaults>
-  <a:extLst>
-    <a:ext uri="{05A4C25C-085E-4340-85A3-A5531E510DB2}">
-      <thm15:themeFamily xmlns:thm15="http://schemas.microsoft.com/office/thememl/2012/main" name="Office Theme" id="{62F939B6-93AF-4DB8-9C6B-D6C7DFDC589F}" vid="{4A3C46E8-61CC-4603-A589-7422A47A8E4A}"/>
-    </a:ext>
-  </a:extLst>
+  <a:extraClrSchemeLst/>
 </a:theme>
 </file>